--- a/docs/report/Cursor_ABAP_Skills_Parity_발표자료.pptx
+++ b/docs/report/Cursor_ABAP_Skills_Parity_발표자료.pptx
@@ -17,6 +17,7 @@
     <p:sldId id="265" r:id="rId16"/>
     <p:sldId id="266" r:id="rId17"/>
     <p:sldId id="267" r:id="rId18"/>
+    <p:sldId id="268" r:id="rId19"/>
   </p:sldIdLst>
   <p:sldSz cx="12191695" cy="6858000" type="screen4x3"/>
   <p:notesSz cx="6858000" cy="9144000"/>
@@ -3150,8 +3151,8 @@
         </p:nvSpPr>
         <p:spPr>
           <a:xfrm>
-            <a:off x="731520" y="1828800"/>
-            <a:ext cx="10515600" cy="914400"/>
+            <a:off x="640080" y="2103120"/>
+            <a:ext cx="10972800" cy="914400"/>
           </a:xfrm>
           <a:prstGeom prst="rect">
             <a:avLst/>
@@ -3165,13 +3166,13 @@
           <a:lstStyle/>
           <a:p>
             <a:r>
-              <a:rPr sz="2000" b="0">
-                <a:solidFill>
-                  <a:srgbClr val="A8C5D8"/>
-                </a:solidFill>
-                <a:latin typeface="Malgun Gothic"/>
-              </a:rPr>
-              <a:t>ABAP 개발에 Cursor Skills를 적용하면</a:t>
+              <a:rPr sz="3200" b="1">
+                <a:solidFill>
+                  <a:srgbClr val="FFFFFF"/>
+                </a:solidFill>
+                <a:latin typeface="Malgun Gothic"/>
+              </a:rPr>
+              <a:t>지금까지 논의한 내용 정리</a:t>
             </a:r>
           </a:p>
         </p:txBody>
@@ -3184,8 +3185,8 @@
         </p:nvSpPr>
         <p:spPr>
           <a:xfrm>
-            <a:off x="731520" y="2377440"/>
-            <a:ext cx="10515600" cy="1280160"/>
+            <a:off x="640080" y="3108960"/>
+            <a:ext cx="10972800" cy="1097280"/>
           </a:xfrm>
           <a:prstGeom prst="rect">
             <a:avLst/>
@@ -3199,48 +3200,14 @@
           <a:lstStyle/>
           <a:p>
             <a:r>
-              <a:rPr sz="3200" b="1">
-                <a:solidFill>
-                  <a:srgbClr val="FFFFFF"/>
-                </a:solidFill>
-                <a:latin typeface="Malgun Gothic"/>
-              </a:rPr>
-              <a:t>질문·오류는 줄고, 품질은 유지되는가?</a:t>
-            </a:r>
-          </a:p>
-        </p:txBody>
-      </p:sp>
-      <p:sp>
-        <p:nvSpPr>
-          <p:cNvPr id="5" name="TextBox 4"/>
-          <p:cNvSpPr txBox="1"/>
-          <p:nvPr/>
-        </p:nvSpPr>
-        <p:spPr>
-          <a:xfrm>
-            <a:off x="731520" y="4023360"/>
-            <a:ext cx="10515600" cy="914400"/>
-          </a:xfrm>
-          <a:prstGeom prst="rect">
-            <a:avLst/>
-          </a:prstGeom>
-          <a:noFill/>
-        </p:spPr>
-        <p:txBody>
-          <a:bodyPr wrap="none">
-            <a:spAutoFit/>
-          </a:bodyPr>
-          <a:lstStyle/>
-          <a:p>
-            <a:r>
               <a:rPr sz="1600" b="0">
                 <a:solidFill>
-                  <a:srgbClr val="D0DCE8"/>
-                </a:solidFill>
-                <a:latin typeface="Malgun Gothic"/>
-              </a:rPr>
-              <a:t>Ops Monitor (SM37/ST22/SXI) 동일 설계서 재현 실험
-Session A(장기 구현+Skills 정착) vs Session B(Greenfield 재현)</a:t>
+                  <a:srgbClr val="B8C8D8"/>
+                </a:solidFill>
+                <a:latin typeface="Malgun Gothic"/>
+              </a:rPr>
+              <a:t>질문 집계 → A/B 세션 비교 → 채점 방식 → Hard Gate 보정
+(기승전결보다, 대화가 진행된 순서대로)</a:t>
             </a:r>
           </a:p>
         </p:txBody>
@@ -3315,7 +3282,7 @@
         <p:spPr>
           <a:xfrm>
             <a:off x="0" y="0"/>
-            <a:ext cx="12191695" cy="640080"/>
+            <a:ext cx="12191695" cy="502920"/>
           </a:xfrm>
           <a:prstGeom prst="rect">
             <a:avLst/>
@@ -3357,8 +3324,8 @@
         </p:nvSpPr>
         <p:spPr>
           <a:xfrm>
-            <a:off x="548640" y="777240"/>
-            <a:ext cx="11155680" cy="640080"/>
+            <a:off x="502920" y="109728"/>
+            <a:ext cx="10972800" cy="320040"/>
           </a:xfrm>
           <a:prstGeom prst="rect">
             <a:avLst/>
@@ -3366,19 +3333,19 @@
           <a:noFill/>
         </p:spPr>
         <p:txBody>
-          <a:bodyPr wrap="square">
+          <a:bodyPr wrap="none">
             <a:spAutoFit/>
           </a:bodyPr>
           <a:lstStyle/>
           <a:p>
             <a:r>
-              <a:rPr sz="2800" b="1">
-                <a:solidFill>
-                  <a:srgbClr val="0B1F3A"/>
-                </a:solidFill>
-                <a:latin typeface="Malgun Gothic"/>
-              </a:rPr>
-              <a:t>6. 일반화 — 추정은 맞지만, 범위가 있다</a:t>
+              <a:rPr sz="1100" b="0">
+                <a:solidFill>
+                  <a:srgbClr val="FFFFFF"/>
+                </a:solidFill>
+                <a:latin typeface="Malgun Gothic"/>
+              </a:rPr>
+              <a:t>논의 정리  |  Cursor × ABAP Ops Monitor</a:t>
             </a:r>
           </a:p>
         </p:txBody>
@@ -3391,8 +3358,8 @@
         </p:nvSpPr>
         <p:spPr>
           <a:xfrm>
-            <a:off x="640080" y="1554480"/>
-            <a:ext cx="10972800" cy="4572000"/>
+            <a:off x="502920" y="685800"/>
+            <a:ext cx="11155680" cy="548640"/>
           </a:xfrm>
           <a:prstGeom prst="rect">
             <a:avLst/>
@@ -3400,88 +3367,19 @@
           <a:noFill/>
         </p:spPr>
         <p:txBody>
-          <a:bodyPr wrap="square">
+          <a:bodyPr wrap="none">
             <a:spAutoFit/>
           </a:bodyPr>
           <a:lstStyle/>
           <a:p>
-            <a:pPr>
-              <a:spcAft>
-                <a:spcPts val="800"/>
-              </a:spcAft>
-            </a:pPr>
-            <a:r>
-              <a:rPr sz="1500" b="0">
-                <a:solidFill>
-                  <a:srgbClr val="1A1A1A"/>
-                </a:solidFill>
-                <a:latin typeface="Malgun Gothic"/>
-              </a:rPr>
-              <a:t>큰 효과의 상당 부분 = 동일 설계서·동일 프로그램 유형의 오류를 목록화한 결과</a:t>
-            </a:r>
-          </a:p>
-          <a:p>
-            <a:pPr>
-              <a:spcAft>
-                <a:spcPts val="800"/>
-              </a:spcAft>
-            </a:pPr>
-            <a:r>
-              <a:rPr sz="1500" b="0">
-                <a:solidFill>
-                  <a:srgbClr val="1A1A1A"/>
-                </a:solidFill>
-                <a:latin typeface="Malgun Gothic"/>
-              </a:rPr>
-              <a:t>Preflight의 ~70%는 다른 ALV/HTML/OO 리포트에도 전이 가능 (선언, ECC fcode, CSS {})</a:t>
-            </a:r>
-          </a:p>
-          <a:p>
-            <a:pPr>
-              <a:spcAft>
-                <a:spcPts val="800"/>
-              </a:spcAft>
-            </a:pPr>
-            <a:r>
-              <a:rPr sz="1500" b="0">
-                <a:solidFill>
-                  <a:srgbClr val="1A1A1A"/>
-                </a:solidFill>
-                <a:latin typeface="Malgun Gothic"/>
-              </a:rPr>
-              <a:t>UX/도메인 스킬의 ~80%+는 Ops Monitor(SM37/ST22/SXI) 특화</a:t>
-            </a:r>
-          </a:p>
-          <a:p>
-            <a:pPr>
-              <a:spcAft>
-                <a:spcPts val="800"/>
-              </a:spcAft>
-            </a:pPr>
-            <a:r>
-              <a:rPr sz="1500" b="0">
-                <a:solidFill>
-                  <a:srgbClr val="1A1A1A"/>
-                </a:solidFill>
-                <a:latin typeface="Malgun Gothic"/>
-              </a:rPr>
-              <a:t>다른 형식 프로그램이면 특화 규칙이 약해져 오류·질문이 다시 늘 가능성 (유형 n=1)</a:t>
-            </a:r>
-          </a:p>
-          <a:p>
-            <a:pPr>
-              <a:spcAft>
-                <a:spcPts val="800"/>
-              </a:spcAft>
-            </a:pPr>
-            <a:r>
-              <a:rPr sz="1500" b="0">
-                <a:solidFill>
-                  <a:srgbClr val="1A1A1A"/>
-                </a:solidFill>
-                <a:latin typeface="Malgun Gothic"/>
-              </a:rPr>
-              <a:t>다양한 프로그램 대화를 쌓아 실패→규칙으로 승격할수록 일반 효과가 커짐</a:t>
+            <a:r>
+              <a:rPr sz="2600" b="1">
+                <a:solidFill>
+                  <a:srgbClr val="0B1F3A"/>
+                </a:solidFill>
+                <a:latin typeface="Malgun Gothic"/>
+              </a:rPr>
+              <a:t>⑥ 질문 수에 따른 Parity 향상</a:t>
             </a:r>
           </a:p>
         </p:txBody>
@@ -3494,8 +3392,8 @@
         </p:nvSpPr>
         <p:spPr>
           <a:xfrm>
-            <a:off x="548640" y="6309360"/>
-            <a:ext cx="10972800" cy="274320"/>
+            <a:off x="594360" y="1371600"/>
+            <a:ext cx="10972800" cy="4754880"/>
           </a:xfrm>
           <a:prstGeom prst="rect">
             <a:avLst/>
@@ -3503,6 +3401,93 @@
           <a:noFill/>
         </p:spPr>
         <p:txBody>
+          <a:bodyPr wrap="square">
+            <a:spAutoFit/>
+          </a:bodyPr>
+          <a:lstStyle/>
+          <a:p>
+            <a:pPr>
+              <a:spcAft>
+                <a:spcPts val="700"/>
+              </a:spcAft>
+            </a:pPr>
+            <a:r>
+              <a:rPr sz="1600" b="0">
+                <a:solidFill>
+                  <a:srgbClr val="1A1A1A"/>
+                </a:solidFill>
+                <a:latin typeface="Malgun Gothic"/>
+              </a:rPr>
+              <a:t>가로축: 프로그램 관련 누적 질문 (PPT/`계속`/메타 집계 제외)</a:t>
+            </a:r>
+          </a:p>
+          <a:p>
+            <a:pPr>
+              <a:spcAft>
+                <a:spcPts val="700"/>
+              </a:spcAft>
+            </a:pPr>
+            <a:r>
+              <a:rPr sz="1600" b="0">
+                <a:solidFill>
+                  <a:srgbClr val="1A1A1A"/>
+                </a:solidFill>
+                <a:latin typeface="Malgun Gothic"/>
+              </a:rPr>
+              <a:t>A: 천천히 오름 → 첫 PASS ≈ Q57 → 최종 54</a:t>
+            </a:r>
+          </a:p>
+          <a:p>
+            <a:pPr>
+              <a:spcAft>
+                <a:spcPts val="700"/>
+              </a:spcAft>
+            </a:pPr>
+            <a:r>
+              <a:rPr sz="1600" b="0">
+                <a:solidFill>
+                  <a:srgbClr val="1A1A1A"/>
+                </a:solidFill>
+                <a:latin typeface="Malgun Gothic"/>
+              </a:rPr>
+              <a:t>B: 소스 먼저 나오고 실기에서 막힘 → 첫 PASS ≈ Q12 → 최종 55</a:t>
+            </a:r>
+          </a:p>
+          <a:p>
+            <a:pPr>
+              <a:spcAft>
+                <a:spcPts val="700"/>
+              </a:spcAft>
+            </a:pPr>
+            <a:r>
+              <a:rPr sz="1600" b="0">
+                <a:solidFill>
+                  <a:srgbClr val="1A1A1A"/>
+                </a:solidFill>
+                <a:latin typeface="Malgun Gothic"/>
+              </a:rPr>
+              <a:t>같은 Q=16에서: A≈33(FAIL) / B=55(PASS) — 도달 속도 차이</a:t>
+            </a:r>
+          </a:p>
+        </p:txBody>
+      </p:sp>
+      <p:sp>
+        <p:nvSpPr>
+          <p:cNvPr id="7" name="TextBox 6"/>
+          <p:cNvSpPr txBox="1"/>
+          <p:nvPr/>
+        </p:nvSpPr>
+        <p:spPr>
+          <a:xfrm>
+            <a:off x="502920" y="6446520"/>
+            <a:ext cx="10972800" cy="274320"/>
+          </a:xfrm>
+          <a:prstGeom prst="rect">
+            <a:avLst/>
+          </a:prstGeom>
+          <a:noFill/>
+        </p:spPr>
+        <p:txBody>
           <a:bodyPr wrap="none">
             <a:spAutoFit/>
           </a:bodyPr>
@@ -3515,7 +3500,7 @@
                 </a:solidFill>
                 <a:latin typeface="Malgun Gothic"/>
               </a:rPr>
-              <a:t>Cursor × ABAP Skills 실험  |  10/12</a:t>
+              <a:t>10 / 13</a:t>
             </a:r>
           </a:p>
         </p:txBody>
@@ -3590,7 +3575,7 @@
         <p:spPr>
           <a:xfrm>
             <a:off x="0" y="0"/>
-            <a:ext cx="12191695" cy="640080"/>
+            <a:ext cx="12191695" cy="502920"/>
           </a:xfrm>
           <a:prstGeom prst="rect">
             <a:avLst/>
@@ -3632,8 +3617,8 @@
         </p:nvSpPr>
         <p:spPr>
           <a:xfrm>
-            <a:off x="548640" y="777240"/>
-            <a:ext cx="11155680" cy="640080"/>
+            <a:off x="502920" y="109728"/>
+            <a:ext cx="10972800" cy="320040"/>
           </a:xfrm>
           <a:prstGeom prst="rect">
             <a:avLst/>
@@ -3641,19 +3626,19 @@
           <a:noFill/>
         </p:spPr>
         <p:txBody>
-          <a:bodyPr wrap="square">
+          <a:bodyPr wrap="none">
             <a:spAutoFit/>
           </a:bodyPr>
           <a:lstStyle/>
           <a:p>
             <a:r>
-              <a:rPr sz="2800" b="1">
-                <a:solidFill>
-                  <a:srgbClr val="0B1F3A"/>
-                </a:solidFill>
-                <a:latin typeface="Malgun Gothic"/>
-              </a:rPr>
-              <a:t>7. 보고용 결론</a:t>
+              <a:rPr sz="1100" b="0">
+                <a:solidFill>
+                  <a:srgbClr val="FFFFFF"/>
+                </a:solidFill>
+                <a:latin typeface="Malgun Gothic"/>
+              </a:rPr>
+              <a:t>논의 정리  |  Cursor × ABAP Ops Monitor</a:t>
             </a:r>
           </a:p>
         </p:txBody>
@@ -3666,8 +3651,8 @@
         </p:nvSpPr>
         <p:spPr>
           <a:xfrm>
-            <a:off x="640080" y="1554480"/>
-            <a:ext cx="10972800" cy="4572000"/>
+            <a:off x="502920" y="685800"/>
+            <a:ext cx="11155680" cy="548640"/>
           </a:xfrm>
           <a:prstGeom prst="rect">
             <a:avLst/>
@@ -3675,88 +3660,19 @@
           <a:noFill/>
         </p:spPr>
         <p:txBody>
-          <a:bodyPr wrap="square">
+          <a:bodyPr wrap="none">
             <a:spAutoFit/>
           </a:bodyPr>
           <a:lstStyle/>
           <a:p>
-            <a:pPr>
-              <a:spcAft>
-                <a:spcPts val="800"/>
-              </a:spcAft>
-            </a:pPr>
-            <a:r>
-              <a:rPr sz="1600" b="0">
-                <a:solidFill>
-                  <a:srgbClr val="1A1A1A"/>
-                </a:solidFill>
-                <a:latin typeface="Malgun Gothic"/>
-              </a:rPr>
-              <a:t>① 품질: 동일 Parity 채점표로 A=54, B=55 (Δ=1) → 유사 수준으로 생성됨</a:t>
-            </a:r>
-          </a:p>
-          <a:p>
-            <a:pPr>
-              <a:spcAft>
-                <a:spcPts val="800"/>
-              </a:spcAft>
-            </a:pPr>
-            <a:r>
-              <a:rPr sz="1600" b="0">
-                <a:solidFill>
-                  <a:srgbClr val="1A1A1A"/>
-                </a:solidFill>
-                <a:latin typeface="Malgun Gothic"/>
-              </a:rPr>
-              <a:t>② 과정: Hard Gate 기준 첫 PASS Q ≈57(A) → ≈12(B), 공정 질문 ≈63→16</a:t>
-            </a:r>
-          </a:p>
-          <a:p>
-            <a:pPr>
-              <a:spcAft>
-                <a:spcPts val="800"/>
-              </a:spcAft>
-            </a:pPr>
-            <a:r>
-              <a:rPr sz="1600" b="0">
-                <a:solidFill>
-                  <a:srgbClr val="1A1A1A"/>
-                </a:solidFill>
-                <a:latin typeface="Malgun Gothic"/>
-              </a:rPr>
-              <a:t>③ 방법: 실패를 Skill/Rule로 고착하면 같은/유사 유형의 왕복이 크게 감소</a:t>
-            </a:r>
-          </a:p>
-          <a:p>
-            <a:pPr>
-              <a:spcAft>
-                <a:spcPts val="800"/>
-              </a:spcAft>
-            </a:pPr>
-            <a:r>
-              <a:rPr sz="1600" b="0">
-                <a:solidFill>
-                  <a:srgbClr val="1A1A1A"/>
-                </a:solidFill>
-                <a:latin typeface="Malgun Gothic"/>
-              </a:rPr>
-              <a:t>④ 한계: ‘처음부터 완벽’이 아님. 활성화·런타임 결함 구간은 PASS 불가</a:t>
-            </a:r>
-          </a:p>
-          <a:p>
-            <a:pPr>
-              <a:spcAft>
-                <a:spcPts val="800"/>
-              </a:spcAft>
-            </a:pPr>
-            <a:r>
-              <a:rPr sz="1600" b="0">
-                <a:solidFill>
-                  <a:srgbClr val="1A1A1A"/>
-                </a:solidFill>
-                <a:latin typeface="Malgun Gothic"/>
-              </a:rPr>
-              <a:t>⑤ 확장: 다른 ABAP 유형 실험으로 일반화 가설을 숫자로 검증할 차례</a:t>
+            <a:r>
+              <a:rPr sz="2600" b="1">
+                <a:solidFill>
+                  <a:srgbClr val="0B1F3A"/>
+                </a:solidFill>
+                <a:latin typeface="Malgun Gothic"/>
+              </a:rPr>
+              <a:t>⑦ Hard Gate — 지적하신 대로 보정</a:t>
             </a:r>
           </a:p>
         </p:txBody>
@@ -3769,8 +3685,8 @@
         </p:nvSpPr>
         <p:spPr>
           <a:xfrm>
-            <a:off x="548640" y="6309360"/>
-            <a:ext cx="10972800" cy="274320"/>
+            <a:off x="594360" y="1371600"/>
+            <a:ext cx="10972800" cy="4754880"/>
           </a:xfrm>
           <a:prstGeom prst="rect">
             <a:avLst/>
@@ -3778,6 +3694,141 @@
           <a:noFill/>
         </p:spPr>
         <p:txBody>
+          <a:bodyPr wrap="square">
+            <a:spAutoFit/>
+          </a:bodyPr>
+          <a:lstStyle/>
+          <a:p>
+            <a:pPr>
+              <a:spcAft>
+                <a:spcPts val="700"/>
+              </a:spcAft>
+            </a:pPr>
+            <a:r>
+              <a:rPr sz="1500" b="0">
+                <a:solidFill>
+                  <a:srgbClr val="1A1A1A"/>
+                </a:solidFill>
+                <a:latin typeface="Malgun Gothic"/>
+              </a:rPr>
+              <a:t>문제: B를 ‘처음부터 거의 완성’처럼 채점함 (코드에 HTML 있음 ≈ 고득점)</a:t>
+            </a:r>
+          </a:p>
+          <a:p>
+            <a:pPr>
+              <a:spcAft>
+                <a:spcPts val="700"/>
+              </a:spcAft>
+            </a:pPr>
+            <a:r>
+              <a:rPr sz="1500" b="0">
+                <a:solidFill>
+                  <a:srgbClr val="1A1A1A"/>
+                </a:solidFill>
+                <a:latin typeface="Malgun Gothic"/>
+              </a:rPr>
+              <a:t>원칙: 에러 나거나 기능이 안 되면 PASS 안 됨</a:t>
+            </a:r>
+          </a:p>
+          <a:p>
+            <a:pPr>
+              <a:spcAft>
+                <a:spcPts val="700"/>
+              </a:spcAft>
+            </a:pPr>
+            <a:r>
+              <a:rPr sz="1500" b="0">
+                <a:solidFill>
+                  <a:srgbClr val="1A1A1A"/>
+                </a:solidFill>
+                <a:latin typeface="Malgun Gothic"/>
+              </a:rPr>
+              <a:t>  · 활성화 실패 → PASS 불가</a:t>
+            </a:r>
+          </a:p>
+          <a:p>
+            <a:pPr>
+              <a:spcAft>
+                <a:spcPts val="700"/>
+              </a:spcAft>
+            </a:pPr>
+            <a:r>
+              <a:rPr sz="1500" b="0">
+                <a:solidFill>
+                  <a:srgbClr val="1A1A1A"/>
+                </a:solidFill>
+                <a:latin typeface="Malgun Gothic"/>
+              </a:rPr>
+              <a:t>  · 팝업 X 불능 / ST22 조회 버그 / 빈 화면 → PASS 불가</a:t>
+            </a:r>
+          </a:p>
+          <a:p>
+            <a:pPr>
+              <a:spcAft>
+                <a:spcPts val="700"/>
+              </a:spcAft>
+            </a:pPr>
+            <a:r>
+              <a:rPr sz="1500" b="0">
+                <a:solidFill>
+                  <a:srgbClr val="1A1A1A"/>
+                </a:solidFill>
+                <a:latin typeface="Malgun Gothic"/>
+              </a:rPr>
+              <a:t>  · 미실기(코드만) → 점수 상한 40</a:t>
+            </a:r>
+          </a:p>
+          <a:p>
+            <a:pPr>
+              <a:spcAft>
+                <a:spcPts val="700"/>
+              </a:spcAft>
+            </a:pPr>
+            <a:r>
+              <a:rPr sz="1500" b="0">
+                <a:solidFill>
+                  <a:srgbClr val="1A1A1A"/>
+                </a:solidFill>
+                <a:latin typeface="Malgun Gothic"/>
+              </a:rPr>
+              <a:t>보정 후 B: Q1=30(FAIL) … Q12=53(첫 PASS) … Q16=55</a:t>
+            </a:r>
+          </a:p>
+          <a:p>
+            <a:pPr>
+              <a:spcAft>
+                <a:spcPts val="700"/>
+              </a:spcAft>
+            </a:pPr>
+            <a:r>
+              <a:rPr sz="1500" b="0">
+                <a:solidFill>
+                  <a:srgbClr val="1A1A1A"/>
+                </a:solidFill>
+                <a:latin typeface="Malgun Gothic"/>
+              </a:rPr>
+              <a:t>‘Q=3에 PASS’ 서술은 철회</a:t>
+            </a:r>
+          </a:p>
+        </p:txBody>
+      </p:sp>
+      <p:sp>
+        <p:nvSpPr>
+          <p:cNvPr id="7" name="TextBox 6"/>
+          <p:cNvSpPr txBox="1"/>
+          <p:nvPr/>
+        </p:nvSpPr>
+        <p:spPr>
+          <a:xfrm>
+            <a:off x="502920" y="6446520"/>
+            <a:ext cx="10972800" cy="274320"/>
+          </a:xfrm>
+          <a:prstGeom prst="rect">
+            <a:avLst/>
+          </a:prstGeom>
+          <a:noFill/>
+        </p:spPr>
+        <p:txBody>
           <a:bodyPr wrap="none">
             <a:spAutoFit/>
           </a:bodyPr>
@@ -3790,7 +3841,7 @@
                 </a:solidFill>
                 <a:latin typeface="Malgun Gothic"/>
               </a:rPr>
-              <a:t>Cursor × ABAP Skills 실험  |  11/12</a:t>
+              <a:t>11 / 13</a:t>
             </a:r>
           </a:p>
         </p:txBody>
@@ -3828,7 +3879,7 @@
             <a:avLst/>
           </a:prstGeom>
           <a:solidFill>
-            <a:srgbClr val="0B1F3A"/>
+            <a:srgbClr val="F2F5F8"/>
           </a:solidFill>
           <a:ln>
             <a:noFill/>
@@ -3858,107 +3909,20 @@
       </p:sp>
       <p:sp>
         <p:nvSpPr>
-          <p:cNvPr id="3" name="TextBox 2"/>
-          <p:cNvSpPr txBox="1"/>
-          <p:nvPr/>
-        </p:nvSpPr>
-        <p:spPr>
-          <a:xfrm>
-            <a:off x="731520" y="2377440"/>
-            <a:ext cx="10515600" cy="1097280"/>
-          </a:xfrm>
-          <a:prstGeom prst="rect">
-            <a:avLst/>
-          </a:prstGeom>
-          <a:noFill/>
-        </p:spPr>
-        <p:txBody>
-          <a:bodyPr wrap="none">
-            <a:spAutoFit/>
-          </a:bodyPr>
-          <a:lstStyle/>
-          <a:p>
-            <a:r>
-              <a:rPr sz="2600" b="1">
-                <a:solidFill>
-                  <a:srgbClr val="FFFFFF"/>
-                </a:solidFill>
-                <a:latin typeface="Malgun Gothic"/>
-              </a:rPr>
-              <a:t>실패를 규칙으로 축적하면,
-같은 목표를 더 짧은 대화로 달성할 수 있다.</a:t>
-            </a:r>
-          </a:p>
-        </p:txBody>
-      </p:sp>
-      <p:sp>
-        <p:nvSpPr>
-          <p:cNvPr id="4" name="TextBox 3"/>
-          <p:cNvSpPr txBox="1"/>
-          <p:nvPr/>
-        </p:nvSpPr>
-        <p:spPr>
-          <a:xfrm>
-            <a:off x="731520" y="4114800"/>
-            <a:ext cx="10515600" cy="731520"/>
-          </a:xfrm>
-          <a:prstGeom prst="rect">
-            <a:avLst/>
-          </a:prstGeom>
-          <a:noFill/>
-        </p:spPr>
-        <p:txBody>
-          <a:bodyPr wrap="none">
-            <a:spAutoFit/>
-          </a:bodyPr>
-          <a:lstStyle/>
-          <a:p>
-            <a:r>
-              <a:rPr sz="1600" b="0">
-                <a:solidFill>
-                  <a:srgbClr val="A8C5D8"/>
-                </a:solidFill>
-                <a:latin typeface="Malgun Gothic"/>
-              </a:rPr>
-              <a:t>단, 동작 검증(Hard Gate) 없는 점수는 신뢰하지 않는다.</a:t>
-            </a:r>
-          </a:p>
-        </p:txBody>
-      </p:sp>
-    </p:spTree>
-  </p:cSld>
-  <p:clrMapOvr>
-    <a:masterClrMapping/>
-  </p:clrMapOvr>
-</p:sld>
-</file>
-
-<file path=ppt/slides/slide2.xml><?xml version="1.0" encoding="utf-8"?>
-<p:sld xmlns:a="http://schemas.openxmlformats.org/drawingml/2006/main" xmlns:p="http://schemas.openxmlformats.org/presentationml/2006/main" xmlns:r="http://schemas.openxmlformats.org/officeDocument/2006/relationships">
-  <p:cSld>
-    <p:spTree>
-      <p:nvGrpSpPr>
-        <p:cNvPr id="1" name=""/>
-        <p:cNvGrpSpPr/>
-        <p:nvPr/>
-      </p:nvGrpSpPr>
-      <p:grpSpPr/>
-      <p:sp>
-        <p:nvSpPr>
-          <p:cNvPr id="2" name="Rectangle 1"/>
+          <p:cNvPr id="3" name="Rectangle 2"/>
           <p:cNvSpPr/>
           <p:nvPr/>
         </p:nvSpPr>
         <p:spPr>
           <a:xfrm>
             <a:off x="0" y="0"/>
-            <a:ext cx="12191695" cy="6858000"/>
+            <a:ext cx="12191695" cy="502920"/>
           </a:xfrm>
           <a:prstGeom prst="rect">
             <a:avLst/>
           </a:prstGeom>
           <a:solidFill>
-            <a:srgbClr val="F2F5F8"/>
+            <a:srgbClr val="0B1F3A"/>
           </a:solidFill>
           <a:ln>
             <a:noFill/>
@@ -3988,20 +3952,243 @@
       </p:sp>
       <p:sp>
         <p:nvSpPr>
-          <p:cNvPr id="3" name="Rectangle 2"/>
+          <p:cNvPr id="4" name="TextBox 3"/>
+          <p:cNvSpPr txBox="1"/>
+          <p:nvPr/>
+        </p:nvSpPr>
+        <p:spPr>
+          <a:xfrm>
+            <a:off x="502920" y="109728"/>
+            <a:ext cx="10972800" cy="320040"/>
+          </a:xfrm>
+          <a:prstGeom prst="rect">
+            <a:avLst/>
+          </a:prstGeom>
+          <a:noFill/>
+        </p:spPr>
+        <p:txBody>
+          <a:bodyPr wrap="none">
+            <a:spAutoFit/>
+          </a:bodyPr>
+          <a:lstStyle/>
+          <a:p>
+            <a:r>
+              <a:rPr sz="1100" b="0">
+                <a:solidFill>
+                  <a:srgbClr val="FFFFFF"/>
+                </a:solidFill>
+                <a:latin typeface="Malgun Gothic"/>
+              </a:rPr>
+              <a:t>논의 정리  |  Cursor × ABAP Ops Monitor</a:t>
+            </a:r>
+          </a:p>
+        </p:txBody>
+      </p:sp>
+      <p:sp>
+        <p:nvSpPr>
+          <p:cNvPr id="5" name="TextBox 4"/>
+          <p:cNvSpPr txBox="1"/>
+          <p:nvPr/>
+        </p:nvSpPr>
+        <p:spPr>
+          <a:xfrm>
+            <a:off x="502920" y="685800"/>
+            <a:ext cx="11155680" cy="548640"/>
+          </a:xfrm>
+          <a:prstGeom prst="rect">
+            <a:avLst/>
+          </a:prstGeom>
+          <a:noFill/>
+        </p:spPr>
+        <p:txBody>
+          <a:bodyPr wrap="none">
+            <a:spAutoFit/>
+          </a:bodyPr>
+          <a:lstStyle/>
+          <a:p>
+            <a:r>
+              <a:rPr sz="2600" b="1">
+                <a:solidFill>
+                  <a:srgbClr val="0B1F3A"/>
+                </a:solidFill>
+                <a:latin typeface="Malgun Gothic"/>
+              </a:rPr>
+              <a:t>⑧ 일반화에 대한 추정 — 대체로 맞음</a:t>
+            </a:r>
+          </a:p>
+        </p:txBody>
+      </p:sp>
+      <p:sp>
+        <p:nvSpPr>
+          <p:cNvPr id="6" name="TextBox 5"/>
+          <p:cNvSpPr txBox="1"/>
+          <p:nvPr/>
+        </p:nvSpPr>
+        <p:spPr>
+          <a:xfrm>
+            <a:off x="594360" y="1371600"/>
+            <a:ext cx="10972800" cy="4754880"/>
+          </a:xfrm>
+          <a:prstGeom prst="rect">
+            <a:avLst/>
+          </a:prstGeom>
+          <a:noFill/>
+        </p:spPr>
+        <p:txBody>
+          <a:bodyPr wrap="square">
+            <a:spAutoFit/>
+          </a:bodyPr>
+          <a:lstStyle/>
+          <a:p>
+            <a:pPr>
+              <a:spcAft>
+                <a:spcPts val="700"/>
+              </a:spcAft>
+            </a:pPr>
+            <a:r>
+              <a:rPr sz="1500" b="0">
+                <a:solidFill>
+                  <a:srgbClr val="1A1A1A"/>
+                </a:solidFill>
+                <a:latin typeface="Malgun Gothic"/>
+              </a:rPr>
+              <a:t>큰 효과의 상당 부분 = 동일 프로그램 유형 오류를 목록화한 덕분</a:t>
+            </a:r>
+          </a:p>
+          <a:p>
+            <a:pPr>
+              <a:spcAft>
+                <a:spcPts val="700"/>
+              </a:spcAft>
+            </a:pPr>
+            <a:r>
+              <a:rPr sz="1500" b="0">
+                <a:solidFill>
+                  <a:srgbClr val="1A1A1A"/>
+                </a:solidFill>
+                <a:latin typeface="Malgun Gothic"/>
+              </a:rPr>
+              <a:t>Preflight 약 70%는 다른 ALV/HTML 리포트에도 쓸 만함</a:t>
+            </a:r>
+          </a:p>
+          <a:p>
+            <a:pPr>
+              <a:spcAft>
+                <a:spcPts val="700"/>
+              </a:spcAft>
+            </a:pPr>
+            <a:r>
+              <a:rPr sz="1500" b="0">
+                <a:solidFill>
+                  <a:srgbClr val="1A1A1A"/>
+                </a:solidFill>
+                <a:latin typeface="Malgun Gothic"/>
+              </a:rPr>
+              <a:t>UX·도메인 스킬 약 80%+는 Ops Monitor 특화</a:t>
+            </a:r>
+          </a:p>
+          <a:p>
+            <a:pPr>
+              <a:spcAft>
+                <a:spcPts val="700"/>
+              </a:spcAft>
+            </a:pPr>
+            <a:r>
+              <a:rPr sz="1500" b="0">
+                <a:solidFill>
+                  <a:srgbClr val="1A1A1A"/>
+                </a:solidFill>
+                <a:latin typeface="Malgun Gothic"/>
+              </a:rPr>
+              <a:t>다른 형식 프로그램이면 오류·질문이 다시 늘 가능성 큼 (아직 실험 n=1)</a:t>
+            </a:r>
+          </a:p>
+          <a:p>
+            <a:pPr>
+              <a:spcAft>
+                <a:spcPts val="700"/>
+              </a:spcAft>
+            </a:pPr>
+            <a:r>
+              <a:rPr sz="1500" b="0">
+                <a:solidFill>
+                  <a:srgbClr val="1A1A1A"/>
+                </a:solidFill>
+                <a:latin typeface="Malgun Gothic"/>
+              </a:rPr>
+              <a:t>다양한 프로그램 대화를 쌓아 규칙으로 올리면 효과가 넓어질 것</a:t>
+            </a:r>
+          </a:p>
+        </p:txBody>
+      </p:sp>
+      <p:sp>
+        <p:nvSpPr>
+          <p:cNvPr id="7" name="TextBox 6"/>
+          <p:cNvSpPr txBox="1"/>
+          <p:nvPr/>
+        </p:nvSpPr>
+        <p:spPr>
+          <a:xfrm>
+            <a:off x="502920" y="6446520"/>
+            <a:ext cx="10972800" cy="274320"/>
+          </a:xfrm>
+          <a:prstGeom prst="rect">
+            <a:avLst/>
+          </a:prstGeom>
+          <a:noFill/>
+        </p:spPr>
+        <p:txBody>
+          <a:bodyPr wrap="none">
+            <a:spAutoFit/>
+          </a:bodyPr>
+          <a:lstStyle/>
+          <a:p>
+            <a:r>
+              <a:rPr sz="1000" b="0">
+                <a:solidFill>
+                  <a:srgbClr val="5A5A5A"/>
+                </a:solidFill>
+                <a:latin typeface="Malgun Gothic"/>
+              </a:rPr>
+              <a:t>12 / 13</a:t>
+            </a:r>
+          </a:p>
+        </p:txBody>
+      </p:sp>
+    </p:spTree>
+  </p:cSld>
+  <p:clrMapOvr>
+    <a:masterClrMapping/>
+  </p:clrMapOvr>
+</p:sld>
+</file>
+
+<file path=ppt/slides/slide13.xml><?xml version="1.0" encoding="utf-8"?>
+<p:sld xmlns:a="http://schemas.openxmlformats.org/drawingml/2006/main" xmlns:p="http://schemas.openxmlformats.org/presentationml/2006/main" xmlns:r="http://schemas.openxmlformats.org/officeDocument/2006/relationships">
+  <p:cSld>
+    <p:spTree>
+      <p:nvGrpSpPr>
+        <p:cNvPr id="1" name=""/>
+        <p:cNvGrpSpPr/>
+        <p:nvPr/>
+      </p:nvGrpSpPr>
+      <p:grpSpPr/>
+      <p:sp>
+        <p:nvSpPr>
+          <p:cNvPr id="2" name="Rectangle 1"/>
           <p:cNvSpPr/>
           <p:nvPr/>
         </p:nvSpPr>
         <p:spPr>
           <a:xfrm>
             <a:off x="0" y="0"/>
-            <a:ext cx="12191695" cy="640080"/>
+            <a:ext cx="12191695" cy="6858000"/>
           </a:xfrm>
           <a:prstGeom prst="rect">
             <a:avLst/>
           </a:prstGeom>
           <a:solidFill>
-            <a:srgbClr val="0B1F3A"/>
+            <a:srgbClr val="F2F5F8"/>
           </a:solidFill>
           <a:ln>
             <a:noFill/>
@@ -4031,241 +4218,20 @@
       </p:sp>
       <p:sp>
         <p:nvSpPr>
-          <p:cNvPr id="4" name="TextBox 3"/>
-          <p:cNvSpPr txBox="1"/>
-          <p:nvPr/>
-        </p:nvSpPr>
-        <p:spPr>
-          <a:xfrm>
-            <a:off x="548640" y="777240"/>
-            <a:ext cx="11155680" cy="640080"/>
-          </a:xfrm>
-          <a:prstGeom prst="rect">
-            <a:avLst/>
-          </a:prstGeom>
-          <a:noFill/>
-        </p:spPr>
-        <p:txBody>
-          <a:bodyPr wrap="square">
-            <a:spAutoFit/>
-          </a:bodyPr>
-          <a:lstStyle/>
-          <a:p>
-            <a:r>
-              <a:rPr sz="2800" b="1">
-                <a:solidFill>
-                  <a:srgbClr val="0B1F3A"/>
-                </a:solidFill>
-                <a:latin typeface="Malgun Gothic"/>
-              </a:rPr>
-              <a:t>목차</a:t>
-            </a:r>
-          </a:p>
-        </p:txBody>
-      </p:sp>
-      <p:sp>
-        <p:nvSpPr>
-          <p:cNvPr id="5" name="TextBox 4"/>
-          <p:cNvSpPr txBox="1"/>
-          <p:nvPr/>
-        </p:nvSpPr>
-        <p:spPr>
-          <a:xfrm>
-            <a:off x="640080" y="1554480"/>
-            <a:ext cx="10972800" cy="4572000"/>
-          </a:xfrm>
-          <a:prstGeom prst="rect">
-            <a:avLst/>
-          </a:prstGeom>
-          <a:noFill/>
-        </p:spPr>
-        <p:txBody>
-          <a:bodyPr wrap="square">
-            <a:spAutoFit/>
-          </a:bodyPr>
-          <a:lstStyle/>
-          <a:p>
-            <a:pPr>
-              <a:spcAft>
-                <a:spcPts val="800"/>
-              </a:spcAft>
-            </a:pPr>
-            <a:r>
-              <a:rPr sz="1600" b="0">
-                <a:solidFill>
-                  <a:srgbClr val="1A1A1A"/>
-                </a:solidFill>
-                <a:latin typeface="Malgun Gothic"/>
-              </a:rPr>
-              <a:t>1. 실험 구조 — 두 세션의 관계</a:t>
-            </a:r>
-          </a:p>
-          <a:p>
-            <a:pPr>
-              <a:spcAft>
-                <a:spcPts val="800"/>
-              </a:spcAft>
-            </a:pPr>
-            <a:r>
-              <a:rPr sz="1600" b="0">
-                <a:solidFill>
-                  <a:srgbClr val="1A1A1A"/>
-                </a:solidFill>
-                <a:latin typeface="Malgun Gothic"/>
-              </a:rPr>
-              <a:t>2. Skills로 무엇을 고착했는가</a:t>
-            </a:r>
-          </a:p>
-          <a:p>
-            <a:pPr>
-              <a:spcAft>
-                <a:spcPts val="800"/>
-              </a:spcAft>
-            </a:pPr>
-            <a:r>
-              <a:rPr sz="1600" b="0">
-                <a:solidFill>
-                  <a:srgbClr val="1A1A1A"/>
-                </a:solidFill>
-                <a:latin typeface="Malgun Gothic"/>
-              </a:rPr>
-              <a:t>3. ‘만족할 때까지 질문 수’의 한계</a:t>
-            </a:r>
-          </a:p>
-          <a:p>
-            <a:pPr>
-              <a:spcAft>
-                <a:spcPts val="800"/>
-              </a:spcAft>
-            </a:pPr>
-            <a:r>
-              <a:rPr sz="1600" b="0">
-                <a:solidFill>
-                  <a:srgbClr val="1A1A1A"/>
-                </a:solidFill>
-                <a:latin typeface="Malgun Gothic"/>
-              </a:rPr>
-              <a:t>4. 품질 동등성(Parity) 채점표 · Hard Gate</a:t>
-            </a:r>
-          </a:p>
-          <a:p>
-            <a:pPr>
-              <a:spcAft>
-                <a:spcPts val="800"/>
-              </a:spcAft>
-            </a:pPr>
-            <a:r>
-              <a:rPr sz="1600" b="0">
-                <a:solidFill>
-                  <a:srgbClr val="1A1A1A"/>
-                </a:solidFill>
-                <a:latin typeface="Malgun Gothic"/>
-              </a:rPr>
-              <a:t>5. 최종 점수 &amp; 질문 수에 따른 향상 곡선</a:t>
-            </a:r>
-          </a:p>
-          <a:p>
-            <a:pPr>
-              <a:spcAft>
-                <a:spcPts val="800"/>
-              </a:spcAft>
-            </a:pPr>
-            <a:r>
-              <a:rPr sz="1600" b="0">
-                <a:solidFill>
-                  <a:srgbClr val="1A1A1A"/>
-                </a:solidFill>
-                <a:latin typeface="Malgun Gothic"/>
-              </a:rPr>
-              <a:t>6. 일반화 한계와 다음 단계</a:t>
-            </a:r>
-          </a:p>
-          <a:p>
-            <a:pPr>
-              <a:spcAft>
-                <a:spcPts val="800"/>
-              </a:spcAft>
-            </a:pPr>
-            <a:r>
-              <a:rPr sz="1600" b="0">
-                <a:solidFill>
-                  <a:srgbClr val="1A1A1A"/>
-                </a:solidFill>
-                <a:latin typeface="Malgun Gothic"/>
-              </a:rPr>
-              <a:t>7. 보고용 결론</a:t>
-            </a:r>
-          </a:p>
-        </p:txBody>
-      </p:sp>
-      <p:sp>
-        <p:nvSpPr>
-          <p:cNvPr id="6" name="TextBox 5"/>
-          <p:cNvSpPr txBox="1"/>
-          <p:nvPr/>
-        </p:nvSpPr>
-        <p:spPr>
-          <a:xfrm>
-            <a:off x="548640" y="6309360"/>
-            <a:ext cx="10972800" cy="274320"/>
-          </a:xfrm>
-          <a:prstGeom prst="rect">
-            <a:avLst/>
-          </a:prstGeom>
-          <a:noFill/>
-        </p:spPr>
-        <p:txBody>
-          <a:bodyPr wrap="none">
-            <a:spAutoFit/>
-          </a:bodyPr>
-          <a:lstStyle/>
-          <a:p>
-            <a:r>
-              <a:rPr sz="1000" b="0">
-                <a:solidFill>
-                  <a:srgbClr val="5A5A5A"/>
-                </a:solidFill>
-                <a:latin typeface="Malgun Gothic"/>
-              </a:rPr>
-              <a:t>Cursor × ABAP Skills 실험  |  2/12</a:t>
-            </a:r>
-          </a:p>
-        </p:txBody>
-      </p:sp>
-    </p:spTree>
-  </p:cSld>
-  <p:clrMapOvr>
-    <a:masterClrMapping/>
-  </p:clrMapOvr>
-</p:sld>
-</file>
-
-<file path=ppt/slides/slide3.xml><?xml version="1.0" encoding="utf-8"?>
-<p:sld xmlns:a="http://schemas.openxmlformats.org/drawingml/2006/main" xmlns:p="http://schemas.openxmlformats.org/presentationml/2006/main" xmlns:r="http://schemas.openxmlformats.org/officeDocument/2006/relationships">
-  <p:cSld>
-    <p:spTree>
-      <p:nvGrpSpPr>
-        <p:cNvPr id="1" name=""/>
-        <p:cNvGrpSpPr/>
-        <p:nvPr/>
-      </p:nvGrpSpPr>
-      <p:grpSpPr/>
-      <p:sp>
-        <p:nvSpPr>
-          <p:cNvPr id="2" name="Rectangle 1"/>
+          <p:cNvPr id="3" name="Rectangle 2"/>
           <p:cNvSpPr/>
           <p:nvPr/>
         </p:nvSpPr>
         <p:spPr>
           <a:xfrm>
             <a:off x="0" y="0"/>
-            <a:ext cx="12191695" cy="6858000"/>
+            <a:ext cx="12191695" cy="502920"/>
           </a:xfrm>
           <a:prstGeom prst="rect">
             <a:avLst/>
           </a:prstGeom>
           <a:solidFill>
-            <a:srgbClr val="F2F5F8"/>
+            <a:srgbClr val="0B1F3A"/>
           </a:solidFill>
           <a:ln>
             <a:noFill/>
@@ -4295,57 +4261,14 @@
       </p:sp>
       <p:sp>
         <p:nvSpPr>
-          <p:cNvPr id="3" name="Rectangle 2"/>
-          <p:cNvSpPr/>
-          <p:nvPr/>
-        </p:nvSpPr>
-        <p:spPr>
-          <a:xfrm>
-            <a:off x="0" y="0"/>
-            <a:ext cx="12191695" cy="640080"/>
-          </a:xfrm>
-          <a:prstGeom prst="rect">
-            <a:avLst/>
-          </a:prstGeom>
-          <a:solidFill>
-            <a:srgbClr val="0B1F3A"/>
-          </a:solidFill>
-          <a:ln>
-            <a:noFill/>
-          </a:ln>
-        </p:spPr>
-        <p:style>
-          <a:lnRef idx="1">
-            <a:schemeClr val="accent1"/>
-          </a:lnRef>
-          <a:fillRef idx="3">
-            <a:schemeClr val="accent1"/>
-          </a:fillRef>
-          <a:effectRef idx="2">
-            <a:schemeClr val="accent1"/>
-          </a:effectRef>
-          <a:fontRef idx="minor">
-            <a:schemeClr val="lt1"/>
-          </a:fontRef>
-        </p:style>
-        <p:txBody>
-          <a:bodyPr rtlCol="0" anchor="ctr"/>
-          <a:lstStyle/>
-          <a:p>
-            <a:pPr algn="ctr"/>
-          </a:p>
-        </p:txBody>
-      </p:sp>
-      <p:sp>
-        <p:nvSpPr>
           <p:cNvPr id="4" name="TextBox 3"/>
           <p:cNvSpPr txBox="1"/>
           <p:nvPr/>
         </p:nvSpPr>
         <p:spPr>
           <a:xfrm>
-            <a:off x="548640" y="777240"/>
-            <a:ext cx="11155680" cy="640080"/>
+            <a:off x="502920" y="109728"/>
+            <a:ext cx="10972800" cy="320040"/>
           </a:xfrm>
           <a:prstGeom prst="rect">
             <a:avLst/>
@@ -4353,34 +4276,68 @@
           <a:noFill/>
         </p:spPr>
         <p:txBody>
-          <a:bodyPr wrap="square">
+          <a:bodyPr wrap="none">
             <a:spAutoFit/>
           </a:bodyPr>
           <a:lstStyle/>
           <a:p>
             <a:r>
-              <a:rPr sz="2800" b="1">
+              <a:rPr sz="1100" b="0">
+                <a:solidFill>
+                  <a:srgbClr val="FFFFFF"/>
+                </a:solidFill>
+                <a:latin typeface="Malgun Gothic"/>
+              </a:rPr>
+              <a:t>논의 정리  |  Cursor × ABAP Ops Monitor</a:t>
+            </a:r>
+          </a:p>
+        </p:txBody>
+      </p:sp>
+      <p:sp>
+        <p:nvSpPr>
+          <p:cNvPr id="5" name="TextBox 4"/>
+          <p:cNvSpPr txBox="1"/>
+          <p:nvPr/>
+        </p:nvSpPr>
+        <p:spPr>
+          <a:xfrm>
+            <a:off x="502920" y="685800"/>
+            <a:ext cx="11155680" cy="548640"/>
+          </a:xfrm>
+          <a:prstGeom prst="rect">
+            <a:avLst/>
+          </a:prstGeom>
+          <a:noFill/>
+        </p:spPr>
+        <p:txBody>
+          <a:bodyPr wrap="none">
+            <a:spAutoFit/>
+          </a:bodyPr>
+          <a:lstStyle/>
+          <a:p>
+            <a:r>
+              <a:rPr sz="2600" b="1">
                 <a:solidFill>
                   <a:srgbClr val="0B1F3A"/>
                 </a:solidFill>
                 <a:latin typeface="Malgun Gothic"/>
               </a:rPr>
-              <a:t>1. 실험 구조 — 두 세션의 관계</a:t>
+              <a:t>한 장으로 보면</a:t>
             </a:r>
           </a:p>
         </p:txBody>
       </p:sp>
       <p:graphicFrame>
         <p:nvGraphicFramePr>
-          <p:cNvPr id="5" name="Table 4"/>
+          <p:cNvPr id="6" name="Table 5"/>
           <p:cNvGraphicFramePr>
             <a:graphicFrameLocks noGrp="1"/>
           </p:cNvGraphicFramePr>
           <p:nvPr/>
         </p:nvGraphicFramePr>
         <p:xfrm>
-          <a:off x="548640" y="1554480"/>
-          <a:ext cx="11064240" cy="2926080"/>
+          <a:off x="548640" y="1417320"/>
+          <a:ext cx="11064240" cy="3840480"/>
         </p:xfrm>
         <a:graphic>
           <a:graphicData uri="http://schemas.openxmlformats.org/drawingml/2006/table">
@@ -4389,11 +4346,10 @@
                 <a:tableStyleId>{5C22544A-7EE6-4342-B048-85BDC9FD1C3A}</a:tableStyleId>
               </a:tblPr>
               <a:tblGrid>
-                <a:gridCol w="2011680"/>
-                <a:gridCol w="4572000"/>
-                <a:gridCol w="4480560"/>
+                <a:gridCol w="5029200"/>
+                <a:gridCol w="6035040"/>
               </a:tblGrid>
-              <a:tr h="585216">
+              <a:tr h="640080">
                 <a:tc>
                   <a:txBody>
                     <a:bodyPr/>
@@ -4406,7 +4362,7 @@
                           </a:solidFill>
                           <a:latin typeface="Malgun Gothic"/>
                         </a:rPr>
-                        <a:t>구분</a:t>
+                        <a:t>말하고자 하는 것</a:t>
                       </a:r>
                     </a:p>
                   </a:txBody>
@@ -4428,7 +4384,1176 @@
                           </a:solidFill>
                           <a:latin typeface="Malgun Gothic"/>
                         </a:rPr>
-                        <a:t>Session A</a:t>
+                        <a:t>숫자/판정</a:t>
+                      </a:r>
+                    </a:p>
+                  </a:txBody>
+                  <a:tcPr>
+                    <a:solidFill>
+                      <a:srgbClr val="0B1F3A"/>
+                    </a:solidFill>
+                  </a:tcPr>
+                </a:tc>
+              </a:tr>
+              <a:tr h="640080">
+                <a:tc>
+                  <a:txBody>
+                    <a:bodyPr/>
+                    <a:lstStyle/>
+                    <a:p>
+                      <a:r>
+                        <a:rPr sz="1100" b="0">
+                          <a:solidFill>
+                            <a:srgbClr val="1A1A1A"/>
+                          </a:solidFill>
+                          <a:latin typeface="Malgun Gothic"/>
+                        </a:rPr>
+                        <a:t>최종 품질</a:t>
+                      </a:r>
+                    </a:p>
+                  </a:txBody>
+                  <a:tcPr>
+                    <a:solidFill>
+                      <a:srgbClr val="FFFFFF"/>
+                    </a:solidFill>
+                  </a:tcPr>
+                </a:tc>
+                <a:tc>
+                  <a:txBody>
+                    <a:bodyPr/>
+                    <a:lstStyle/>
+                    <a:p>
+                      <a:r>
+                        <a:rPr sz="1100" b="0">
+                          <a:solidFill>
+                            <a:srgbClr val="1A1A1A"/>
+                          </a:solidFill>
+                          <a:latin typeface="Malgun Gothic"/>
+                        </a:rPr>
+                        <a:t>A 54 ≈ B 55 (동등)</a:t>
+                      </a:r>
+                    </a:p>
+                  </a:txBody>
+                  <a:tcPr>
+                    <a:solidFill>
+                      <a:srgbClr val="FFFFFF"/>
+                    </a:solidFill>
+                  </a:tcPr>
+                </a:tc>
+              </a:tr>
+              <a:tr h="640080">
+                <a:tc>
+                  <a:txBody>
+                    <a:bodyPr/>
+                    <a:lstStyle/>
+                    <a:p>
+                      <a:r>
+                        <a:rPr sz="1100" b="0">
+                          <a:solidFill>
+                            <a:srgbClr val="1A1A1A"/>
+                          </a:solidFill>
+                          <a:latin typeface="Malgun Gothic"/>
+                        </a:rPr>
+                        <a:t>과정</a:t>
+                      </a:r>
+                    </a:p>
+                  </a:txBody>
+                  <a:tcPr>
+                    <a:solidFill>
+                      <a:srgbClr val="E8EEF3"/>
+                    </a:solidFill>
+                  </a:tcPr>
+                </a:tc>
+                <a:tc>
+                  <a:txBody>
+                    <a:bodyPr/>
+                    <a:lstStyle/>
+                    <a:p>
+                      <a:r>
+                        <a:rPr sz="1100" b="0">
+                          <a:solidFill>
+                            <a:srgbClr val="1A1A1A"/>
+                          </a:solidFill>
+                          <a:latin typeface="Malgun Gothic"/>
+                        </a:rPr>
+                        <a:t>공정 Q 63→16, 첫 PASS 57→12</a:t>
+                      </a:r>
+                    </a:p>
+                  </a:txBody>
+                  <a:tcPr>
+                    <a:solidFill>
+                      <a:srgbClr val="E8EEF3"/>
+                    </a:solidFill>
+                  </a:tcPr>
+                </a:tc>
+              </a:tr>
+              <a:tr h="640080">
+                <a:tc>
+                  <a:txBody>
+                    <a:bodyPr/>
+                    <a:lstStyle/>
+                    <a:p>
+                      <a:r>
+                        <a:rPr sz="1100" b="0">
+                          <a:solidFill>
+                            <a:srgbClr val="1A1A1A"/>
+                          </a:solidFill>
+                          <a:latin typeface="Malgun Gothic"/>
+                        </a:rPr>
+                        <a:t>방법</a:t>
+                      </a:r>
+                    </a:p>
+                  </a:txBody>
+                  <a:tcPr>
+                    <a:solidFill>
+                      <a:srgbClr val="FFFFFF"/>
+                    </a:solidFill>
+                  </a:tcPr>
+                </a:tc>
+                <a:tc>
+                  <a:txBody>
+                    <a:bodyPr/>
+                    <a:lstStyle/>
+                    <a:p>
+                      <a:r>
+                        <a:rPr sz="1100" b="0">
+                          <a:solidFill>
+                            <a:srgbClr val="1A1A1A"/>
+                          </a:solidFill>
+                          <a:latin typeface="Malgun Gothic"/>
+                        </a:rPr>
+                        <a:t>실패 → Skill/Rule 고착 → 재현</a:t>
+                      </a:r>
+                    </a:p>
+                  </a:txBody>
+                  <a:tcPr>
+                    <a:solidFill>
+                      <a:srgbClr val="FFFFFF"/>
+                    </a:solidFill>
+                  </a:tcPr>
+                </a:tc>
+              </a:tr>
+              <a:tr h="640080">
+                <a:tc>
+                  <a:txBody>
+                    <a:bodyPr/>
+                    <a:lstStyle/>
+                    <a:p>
+                      <a:r>
+                        <a:rPr sz="1100" b="0">
+                          <a:solidFill>
+                            <a:srgbClr val="1A1A1A"/>
+                          </a:solidFill>
+                          <a:latin typeface="Malgun Gothic"/>
+                        </a:rPr>
+                        <a:t>채점</a:t>
+                      </a:r>
+                    </a:p>
+                  </a:txBody>
+                  <a:tcPr>
+                    <a:solidFill>
+                      <a:srgbClr val="E8EEF3"/>
+                    </a:solidFill>
+                  </a:tcPr>
+                </a:tc>
+                <a:tc>
+                  <a:txBody>
+                    <a:bodyPr/>
+                    <a:lstStyle/>
+                    <a:p>
+                      <a:r>
+                        <a:rPr sz="1100" b="0">
+                          <a:solidFill>
+                            <a:srgbClr val="1A1A1A"/>
+                          </a:solidFill>
+                          <a:latin typeface="Malgun Gothic"/>
+                        </a:rPr>
+                        <a:t>Parity 56점 + Hard Gate</a:t>
+                      </a:r>
+                    </a:p>
+                  </a:txBody>
+                  <a:tcPr>
+                    <a:solidFill>
+                      <a:srgbClr val="E8EEF3"/>
+                    </a:solidFill>
+                  </a:tcPr>
+                </a:tc>
+              </a:tr>
+              <a:tr h="640080">
+                <a:tc>
+                  <a:txBody>
+                    <a:bodyPr/>
+                    <a:lstStyle/>
+                    <a:p>
+                      <a:r>
+                        <a:rPr sz="1100" b="0">
+                          <a:solidFill>
+                            <a:srgbClr val="1A1A1A"/>
+                          </a:solidFill>
+                          <a:latin typeface="Malgun Gothic"/>
+                        </a:rPr>
+                        <a:t>주의</a:t>
+                      </a:r>
+                    </a:p>
+                  </a:txBody>
+                  <a:tcPr>
+                    <a:solidFill>
+                      <a:srgbClr val="FFFFFF"/>
+                    </a:solidFill>
+                  </a:tcPr>
+                </a:tc>
+                <a:tc>
+                  <a:txBody>
+                    <a:bodyPr/>
+                    <a:lstStyle/>
+                    <a:p>
+                      <a:r>
+                        <a:rPr sz="1100" b="0">
+                          <a:solidFill>
+                            <a:srgbClr val="1A1A1A"/>
+                          </a:solidFill>
+                          <a:latin typeface="Malgun Gothic"/>
+                        </a:rPr>
+                        <a:t>코드만으로 PASS 금지 / 유형 1건 한계</a:t>
+                      </a:r>
+                    </a:p>
+                  </a:txBody>
+                  <a:tcPr>
+                    <a:solidFill>
+                      <a:srgbClr val="FFFFFF"/>
+                    </a:solidFill>
+                  </a:tcPr>
+                </a:tc>
+              </a:tr>
+            </a:tbl>
+          </a:graphicData>
+        </a:graphic>
+      </p:graphicFrame>
+      <p:sp>
+        <p:nvSpPr>
+          <p:cNvPr id="7" name="TextBox 6"/>
+          <p:cNvSpPr txBox="1"/>
+          <p:nvPr/>
+        </p:nvSpPr>
+        <p:spPr>
+          <a:xfrm>
+            <a:off x="502920" y="6446520"/>
+            <a:ext cx="10972800" cy="274320"/>
+          </a:xfrm>
+          <a:prstGeom prst="rect">
+            <a:avLst/>
+          </a:prstGeom>
+          <a:noFill/>
+        </p:spPr>
+        <p:txBody>
+          <a:bodyPr wrap="none">
+            <a:spAutoFit/>
+          </a:bodyPr>
+          <a:lstStyle/>
+          <a:p>
+            <a:r>
+              <a:rPr sz="1000" b="0">
+                <a:solidFill>
+                  <a:srgbClr val="5A5A5A"/>
+                </a:solidFill>
+                <a:latin typeface="Malgun Gothic"/>
+              </a:rPr>
+              <a:t>13 / 13</a:t>
+            </a:r>
+          </a:p>
+        </p:txBody>
+      </p:sp>
+    </p:spTree>
+  </p:cSld>
+  <p:clrMapOvr>
+    <a:masterClrMapping/>
+  </p:clrMapOvr>
+</p:sld>
+</file>
+
+<file path=ppt/slides/slide2.xml><?xml version="1.0" encoding="utf-8"?>
+<p:sld xmlns:a="http://schemas.openxmlformats.org/drawingml/2006/main" xmlns:p="http://schemas.openxmlformats.org/presentationml/2006/main" xmlns:r="http://schemas.openxmlformats.org/officeDocument/2006/relationships">
+  <p:cSld>
+    <p:spTree>
+      <p:nvGrpSpPr>
+        <p:cNvPr id="1" name=""/>
+        <p:cNvGrpSpPr/>
+        <p:nvPr/>
+      </p:nvGrpSpPr>
+      <p:grpSpPr/>
+      <p:sp>
+        <p:nvSpPr>
+          <p:cNvPr id="2" name="Rectangle 1"/>
+          <p:cNvSpPr/>
+          <p:nvPr/>
+        </p:nvSpPr>
+        <p:spPr>
+          <a:xfrm>
+            <a:off x="0" y="0"/>
+            <a:ext cx="12191695" cy="6858000"/>
+          </a:xfrm>
+          <a:prstGeom prst="rect">
+            <a:avLst/>
+          </a:prstGeom>
+          <a:solidFill>
+            <a:srgbClr val="F2F5F8"/>
+          </a:solidFill>
+          <a:ln>
+            <a:noFill/>
+          </a:ln>
+        </p:spPr>
+        <p:style>
+          <a:lnRef idx="1">
+            <a:schemeClr val="accent1"/>
+          </a:lnRef>
+          <a:fillRef idx="3">
+            <a:schemeClr val="accent1"/>
+          </a:fillRef>
+          <a:effectRef idx="2">
+            <a:schemeClr val="accent1"/>
+          </a:effectRef>
+          <a:fontRef idx="minor">
+            <a:schemeClr val="lt1"/>
+          </a:fontRef>
+        </p:style>
+        <p:txBody>
+          <a:bodyPr rtlCol="0" anchor="ctr"/>
+          <a:lstStyle/>
+          <a:p>
+            <a:pPr algn="ctr"/>
+          </a:p>
+        </p:txBody>
+      </p:sp>
+      <p:sp>
+        <p:nvSpPr>
+          <p:cNvPr id="3" name="Rectangle 2"/>
+          <p:cNvSpPr/>
+          <p:nvPr/>
+        </p:nvSpPr>
+        <p:spPr>
+          <a:xfrm>
+            <a:off x="0" y="0"/>
+            <a:ext cx="12191695" cy="502920"/>
+          </a:xfrm>
+          <a:prstGeom prst="rect">
+            <a:avLst/>
+          </a:prstGeom>
+          <a:solidFill>
+            <a:srgbClr val="0B1F3A"/>
+          </a:solidFill>
+          <a:ln>
+            <a:noFill/>
+          </a:ln>
+        </p:spPr>
+        <p:style>
+          <a:lnRef idx="1">
+            <a:schemeClr val="accent1"/>
+          </a:lnRef>
+          <a:fillRef idx="3">
+            <a:schemeClr val="accent1"/>
+          </a:fillRef>
+          <a:effectRef idx="2">
+            <a:schemeClr val="accent1"/>
+          </a:effectRef>
+          <a:fontRef idx="minor">
+            <a:schemeClr val="lt1"/>
+          </a:fontRef>
+        </p:style>
+        <p:txBody>
+          <a:bodyPr rtlCol="0" anchor="ctr"/>
+          <a:lstStyle/>
+          <a:p>
+            <a:pPr algn="ctr"/>
+          </a:p>
+        </p:txBody>
+      </p:sp>
+      <p:sp>
+        <p:nvSpPr>
+          <p:cNvPr id="4" name="TextBox 3"/>
+          <p:cNvSpPr txBox="1"/>
+          <p:nvPr/>
+        </p:nvSpPr>
+        <p:spPr>
+          <a:xfrm>
+            <a:off x="502920" y="109728"/>
+            <a:ext cx="10972800" cy="320040"/>
+          </a:xfrm>
+          <a:prstGeom prst="rect">
+            <a:avLst/>
+          </a:prstGeom>
+          <a:noFill/>
+        </p:spPr>
+        <p:txBody>
+          <a:bodyPr wrap="none">
+            <a:spAutoFit/>
+          </a:bodyPr>
+          <a:lstStyle/>
+          <a:p>
+            <a:r>
+              <a:rPr sz="1100" b="0">
+                <a:solidFill>
+                  <a:srgbClr val="FFFFFF"/>
+                </a:solidFill>
+                <a:latin typeface="Malgun Gothic"/>
+              </a:rPr>
+              <a:t>논의 정리  |  Cursor × ABAP Ops Monitor</a:t>
+            </a:r>
+          </a:p>
+        </p:txBody>
+      </p:sp>
+      <p:sp>
+        <p:nvSpPr>
+          <p:cNvPr id="5" name="TextBox 4"/>
+          <p:cNvSpPr txBox="1"/>
+          <p:nvPr/>
+        </p:nvSpPr>
+        <p:spPr>
+          <a:xfrm>
+            <a:off x="502920" y="685800"/>
+            <a:ext cx="11155680" cy="548640"/>
+          </a:xfrm>
+          <a:prstGeom prst="rect">
+            <a:avLst/>
+          </a:prstGeom>
+          <a:noFill/>
+        </p:spPr>
+        <p:txBody>
+          <a:bodyPr wrap="none">
+            <a:spAutoFit/>
+          </a:bodyPr>
+          <a:lstStyle/>
+          <a:p>
+            <a:r>
+              <a:rPr sz="2600" b="1">
+                <a:solidFill>
+                  <a:srgbClr val="0B1F3A"/>
+                </a:solidFill>
+                <a:latin typeface="Malgun Gothic"/>
+              </a:rPr>
+              <a:t>오늘 정리하는 흐름</a:t>
+            </a:r>
+          </a:p>
+        </p:txBody>
+      </p:sp>
+      <p:sp>
+        <p:nvSpPr>
+          <p:cNvPr id="6" name="TextBox 5"/>
+          <p:cNvSpPr txBox="1"/>
+          <p:nvPr/>
+        </p:nvSpPr>
+        <p:spPr>
+          <a:xfrm>
+            <a:off x="594360" y="1371600"/>
+            <a:ext cx="10972800" cy="4754880"/>
+          </a:xfrm>
+          <a:prstGeom prst="rect">
+            <a:avLst/>
+          </a:prstGeom>
+          <a:noFill/>
+        </p:spPr>
+        <p:txBody>
+          <a:bodyPr wrap="square">
+            <a:spAutoFit/>
+          </a:bodyPr>
+          <a:lstStyle/>
+          <a:p>
+            <a:pPr>
+              <a:spcAft>
+                <a:spcPts val="700"/>
+              </a:spcAft>
+            </a:pPr>
+            <a:r>
+              <a:rPr sz="1600" b="0">
+                <a:solidFill>
+                  <a:srgbClr val="1A1A1A"/>
+                </a:solidFill>
+                <a:latin typeface="Malgun Gothic"/>
+              </a:rPr>
+              <a:t>① 이 AI 폴더에서 무엇을 물었나 (질문 유형·개수)</a:t>
+            </a:r>
+          </a:p>
+          <a:p>
+            <a:pPr>
+              <a:spcAft>
+                <a:spcPts val="700"/>
+              </a:spcAft>
+            </a:pPr>
+            <a:r>
+              <a:rPr sz="1600" b="0">
+                <a:solidFill>
+                  <a:srgbClr val="1A1A1A"/>
+                </a:solidFill>
+                <a:latin typeface="Malgun Gothic"/>
+              </a:rPr>
+              <a:t>② 집계 범위 — 어떤 세션까지 셀 수 있었나</a:t>
+            </a:r>
+          </a:p>
+          <a:p>
+            <a:pPr>
+              <a:spcAft>
+                <a:spcPts val="700"/>
+              </a:spcAft>
+            </a:pPr>
+            <a:r>
+              <a:rPr sz="1600" b="0">
+                <a:solidFill>
+                  <a:srgbClr val="1A1A1A"/>
+                </a:solidFill>
+                <a:latin typeface="Malgun Gothic"/>
+              </a:rPr>
+              <a:t>③ Session A와 B의 관계 (Skills를 만들어 재현에 씀)</a:t>
+            </a:r>
+          </a:p>
+          <a:p>
+            <a:pPr>
+              <a:spcAft>
+                <a:spcPts val="700"/>
+              </a:spcAft>
+            </a:pPr>
+            <a:r>
+              <a:rPr sz="1600" b="0">
+                <a:solidFill>
+                  <a:srgbClr val="1A1A1A"/>
+                </a:solidFill>
+                <a:latin typeface="Malgun Gothic"/>
+              </a:rPr>
+              <a:t>④ DoD / ‘만족할 때까지 질문 수’가 객관적이지 않다는 문제</a:t>
+            </a:r>
+          </a:p>
+          <a:p>
+            <a:pPr>
+              <a:spcAft>
+                <a:spcPts val="700"/>
+              </a:spcAft>
+            </a:pPr>
+            <a:r>
+              <a:rPr sz="1600" b="0">
+                <a:solidFill>
+                  <a:srgbClr val="1A1A1A"/>
+                </a:solidFill>
+                <a:latin typeface="Malgun Gothic"/>
+              </a:rPr>
+              <a:t>⑤ Parity 채점표로 품질을 다시 잼</a:t>
+            </a:r>
+          </a:p>
+          <a:p>
+            <a:pPr>
+              <a:spcAft>
+                <a:spcPts val="700"/>
+              </a:spcAft>
+            </a:pPr>
+            <a:r>
+              <a:rPr sz="1600" b="0">
+                <a:solidFill>
+                  <a:srgbClr val="1A1A1A"/>
+                </a:solidFill>
+                <a:latin typeface="Malgun Gothic"/>
+              </a:rPr>
+              <a:t>⑥ 질문 수에 따라 점수가 어떻게 올랐는지</a:t>
+            </a:r>
+          </a:p>
+          <a:p>
+            <a:pPr>
+              <a:spcAft>
+                <a:spcPts val="700"/>
+              </a:spcAft>
+            </a:pPr>
+            <a:r>
+              <a:rPr sz="1600" b="0">
+                <a:solidFill>
+                  <a:srgbClr val="1A1A1A"/>
+                </a:solidFill>
+                <a:latin typeface="Malgun Gothic"/>
+              </a:rPr>
+              <a:t>⑦ Hard Gate — 에러·미동작이면 PASS 불가 (곡선 보정)</a:t>
+            </a:r>
+          </a:p>
+          <a:p>
+            <a:pPr>
+              <a:spcAft>
+                <a:spcPts val="700"/>
+              </a:spcAft>
+            </a:pPr>
+            <a:r>
+              <a:rPr sz="1600" b="0">
+                <a:solidFill>
+                  <a:srgbClr val="1A1A1A"/>
+                </a:solidFill>
+                <a:latin typeface="Malgun Gothic"/>
+              </a:rPr>
+              <a:t>⑧ 일반화에 대한 추정과 한계</a:t>
+            </a:r>
+          </a:p>
+        </p:txBody>
+      </p:sp>
+      <p:sp>
+        <p:nvSpPr>
+          <p:cNvPr id="7" name="TextBox 6"/>
+          <p:cNvSpPr txBox="1"/>
+          <p:nvPr/>
+        </p:nvSpPr>
+        <p:spPr>
+          <a:xfrm>
+            <a:off x="502920" y="6446520"/>
+            <a:ext cx="10972800" cy="274320"/>
+          </a:xfrm>
+          <a:prstGeom prst="rect">
+            <a:avLst/>
+          </a:prstGeom>
+          <a:noFill/>
+        </p:spPr>
+        <p:txBody>
+          <a:bodyPr wrap="none">
+            <a:spAutoFit/>
+          </a:bodyPr>
+          <a:lstStyle/>
+          <a:p>
+            <a:r>
+              <a:rPr sz="1000" b="0">
+                <a:solidFill>
+                  <a:srgbClr val="5A5A5A"/>
+                </a:solidFill>
+                <a:latin typeface="Malgun Gothic"/>
+              </a:rPr>
+              <a:t>2 / 13</a:t>
+            </a:r>
+          </a:p>
+        </p:txBody>
+      </p:sp>
+    </p:spTree>
+  </p:cSld>
+  <p:clrMapOvr>
+    <a:masterClrMapping/>
+  </p:clrMapOvr>
+</p:sld>
+</file>
+
+<file path=ppt/slides/slide3.xml><?xml version="1.0" encoding="utf-8"?>
+<p:sld xmlns:a="http://schemas.openxmlformats.org/drawingml/2006/main" xmlns:p="http://schemas.openxmlformats.org/presentationml/2006/main" xmlns:r="http://schemas.openxmlformats.org/officeDocument/2006/relationships">
+  <p:cSld>
+    <p:spTree>
+      <p:nvGrpSpPr>
+        <p:cNvPr id="1" name=""/>
+        <p:cNvGrpSpPr/>
+        <p:nvPr/>
+      </p:nvGrpSpPr>
+      <p:grpSpPr/>
+      <p:sp>
+        <p:nvSpPr>
+          <p:cNvPr id="2" name="Rectangle 1"/>
+          <p:cNvSpPr/>
+          <p:nvPr/>
+        </p:nvSpPr>
+        <p:spPr>
+          <a:xfrm>
+            <a:off x="0" y="0"/>
+            <a:ext cx="12191695" cy="6858000"/>
+          </a:xfrm>
+          <a:prstGeom prst="rect">
+            <a:avLst/>
+          </a:prstGeom>
+          <a:solidFill>
+            <a:srgbClr val="F2F5F8"/>
+          </a:solidFill>
+          <a:ln>
+            <a:noFill/>
+          </a:ln>
+        </p:spPr>
+        <p:style>
+          <a:lnRef idx="1">
+            <a:schemeClr val="accent1"/>
+          </a:lnRef>
+          <a:fillRef idx="3">
+            <a:schemeClr val="accent1"/>
+          </a:fillRef>
+          <a:effectRef idx="2">
+            <a:schemeClr val="accent1"/>
+          </a:effectRef>
+          <a:fontRef idx="minor">
+            <a:schemeClr val="lt1"/>
+          </a:fontRef>
+        </p:style>
+        <p:txBody>
+          <a:bodyPr rtlCol="0" anchor="ctr"/>
+          <a:lstStyle/>
+          <a:p>
+            <a:pPr algn="ctr"/>
+          </a:p>
+        </p:txBody>
+      </p:sp>
+      <p:sp>
+        <p:nvSpPr>
+          <p:cNvPr id="3" name="Rectangle 2"/>
+          <p:cNvSpPr/>
+          <p:nvPr/>
+        </p:nvSpPr>
+        <p:spPr>
+          <a:xfrm>
+            <a:off x="0" y="0"/>
+            <a:ext cx="12191695" cy="502920"/>
+          </a:xfrm>
+          <a:prstGeom prst="rect">
+            <a:avLst/>
+          </a:prstGeom>
+          <a:solidFill>
+            <a:srgbClr val="0B1F3A"/>
+          </a:solidFill>
+          <a:ln>
+            <a:noFill/>
+          </a:ln>
+        </p:spPr>
+        <p:style>
+          <a:lnRef idx="1">
+            <a:schemeClr val="accent1"/>
+          </a:lnRef>
+          <a:fillRef idx="3">
+            <a:schemeClr val="accent1"/>
+          </a:fillRef>
+          <a:effectRef idx="2">
+            <a:schemeClr val="accent1"/>
+          </a:effectRef>
+          <a:fontRef idx="minor">
+            <a:schemeClr val="lt1"/>
+          </a:fontRef>
+        </p:style>
+        <p:txBody>
+          <a:bodyPr rtlCol="0" anchor="ctr"/>
+          <a:lstStyle/>
+          <a:p>
+            <a:pPr algn="ctr"/>
+          </a:p>
+        </p:txBody>
+      </p:sp>
+      <p:sp>
+        <p:nvSpPr>
+          <p:cNvPr id="4" name="TextBox 3"/>
+          <p:cNvSpPr txBox="1"/>
+          <p:nvPr/>
+        </p:nvSpPr>
+        <p:spPr>
+          <a:xfrm>
+            <a:off x="502920" y="109728"/>
+            <a:ext cx="10972800" cy="320040"/>
+          </a:xfrm>
+          <a:prstGeom prst="rect">
+            <a:avLst/>
+          </a:prstGeom>
+          <a:noFill/>
+        </p:spPr>
+        <p:txBody>
+          <a:bodyPr wrap="none">
+            <a:spAutoFit/>
+          </a:bodyPr>
+          <a:lstStyle/>
+          <a:p>
+            <a:r>
+              <a:rPr sz="1100" b="0">
+                <a:solidFill>
+                  <a:srgbClr val="FFFFFF"/>
+                </a:solidFill>
+                <a:latin typeface="Malgun Gothic"/>
+              </a:rPr>
+              <a:t>논의 정리  |  Cursor × ABAP Ops Monitor</a:t>
+            </a:r>
+          </a:p>
+        </p:txBody>
+      </p:sp>
+      <p:sp>
+        <p:nvSpPr>
+          <p:cNvPr id="5" name="TextBox 4"/>
+          <p:cNvSpPr txBox="1"/>
+          <p:nvPr/>
+        </p:nvSpPr>
+        <p:spPr>
+          <a:xfrm>
+            <a:off x="502920" y="685800"/>
+            <a:ext cx="11155680" cy="548640"/>
+          </a:xfrm>
+          <a:prstGeom prst="rect">
+            <a:avLst/>
+          </a:prstGeom>
+          <a:noFill/>
+        </p:spPr>
+        <p:txBody>
+          <a:bodyPr wrap="none">
+            <a:spAutoFit/>
+          </a:bodyPr>
+          <a:lstStyle/>
+          <a:p>
+            <a:r>
+              <a:rPr sz="2600" b="1">
+                <a:solidFill>
+                  <a:srgbClr val="0B1F3A"/>
+                </a:solidFill>
+                <a:latin typeface="Malgun Gothic"/>
+              </a:rPr>
+              <a:t>① 주로 한 질문 유형</a:t>
+            </a:r>
+          </a:p>
+        </p:txBody>
+      </p:sp>
+      <p:sp>
+        <p:nvSpPr>
+          <p:cNvPr id="6" name="TextBox 5"/>
+          <p:cNvSpPr txBox="1"/>
+          <p:nvPr/>
+        </p:nvSpPr>
+        <p:spPr>
+          <a:xfrm>
+            <a:off x="594360" y="1371600"/>
+            <a:ext cx="10972800" cy="4754880"/>
+          </a:xfrm>
+          <a:prstGeom prst="rect">
+            <a:avLst/>
+          </a:prstGeom>
+          <a:noFill/>
+        </p:spPr>
+        <p:txBody>
+          <a:bodyPr wrap="square">
+            <a:spAutoFit/>
+          </a:bodyPr>
+          <a:lstStyle/>
+          <a:p>
+            <a:pPr>
+              <a:spcAft>
+                <a:spcPts val="700"/>
+              </a:spcAft>
+            </a:pPr>
+            <a:r>
+              <a:rPr sz="1500" b="0">
+                <a:solidFill>
+                  <a:srgbClr val="1A1A1A"/>
+                </a:solidFill>
+                <a:latin typeface="Malgun Gothic"/>
+              </a:rPr>
+              <a:t>SE38 붙여넣기용 전체/부분 소스 요청 (GitHub·경로 접근 어려움)</a:t>
+            </a:r>
+          </a:p>
+          <a:p>
+            <a:pPr>
+              <a:spcAft>
+                <a:spcPts val="700"/>
+              </a:spcAft>
+            </a:pPr>
+            <a:r>
+              <a:rPr sz="1500" b="0">
+                <a:solidFill>
+                  <a:srgbClr val="1A1A1A"/>
+                </a:solidFill>
+                <a:latin typeface="Malgun Gothic"/>
+              </a:rPr>
+              <a:t>컴파일·활성화 오류 수정 (타입, ECC API, DATUM, 문자열 템플릿…)</a:t>
+            </a:r>
+          </a:p>
+          <a:p>
+            <a:pPr>
+              <a:spcAft>
+                <a:spcPts val="700"/>
+              </a:spcAft>
+            </a:pPr>
+            <a:r>
+              <a:rPr sz="1500" b="0">
+                <a:solidFill>
+                  <a:srgbClr val="1A1A1A"/>
+                </a:solidFill>
+                <a:latin typeface="Malgun Gothic"/>
+              </a:rPr>
+              <a:t>UX·차트·레이아웃 다듬기 (비율, 색, 툴바, 팝업)</a:t>
+            </a:r>
+          </a:p>
+          <a:p>
+            <a:pPr>
+              <a:spcAft>
+                <a:spcPts val="700"/>
+              </a:spcAft>
+            </a:pPr>
+            <a:r>
+              <a:rPr sz="1500" b="0">
+                <a:solidFill>
+                  <a:srgbClr val="1A1A1A"/>
+                </a:solidFill>
+                <a:latin typeface="Malgun Gothic"/>
+              </a:rPr>
+              <a:t>실기 증상 (빈 화면, 팝업 X, ST22 미표시, 더블클릭 동작)</a:t>
+            </a:r>
+          </a:p>
+          <a:p>
+            <a:pPr>
+              <a:spcAft>
+                <a:spcPts val="700"/>
+              </a:spcAft>
+            </a:pPr>
+            <a:r>
+              <a:rPr sz="1500" b="0">
+                <a:solidFill>
+                  <a:srgbClr val="1A1A1A"/>
+                </a:solidFill>
+                <a:latin typeface="Malgun Gothic"/>
+              </a:rPr>
+              <a:t>Selection Screen / Dynpro 설정 가이드</a:t>
+            </a:r>
+          </a:p>
+          <a:p>
+            <a:pPr>
+              <a:spcAft>
+                <a:spcPts val="700"/>
+              </a:spcAft>
+            </a:pPr>
+            <a:r>
+              <a:rPr sz="1500" b="0">
+                <a:solidFill>
+                  <a:srgbClr val="1A1A1A"/>
+                </a:solidFill>
+                <a:latin typeface="Malgun Gothic"/>
+              </a:rPr>
+              <a:t>후반: 질문 요약·개수 집계·A/B 비교·채점 방식 논의</a:t>
+            </a:r>
+          </a:p>
+        </p:txBody>
+      </p:sp>
+      <p:sp>
+        <p:nvSpPr>
+          <p:cNvPr id="7" name="TextBox 6"/>
+          <p:cNvSpPr txBox="1"/>
+          <p:nvPr/>
+        </p:nvSpPr>
+        <p:spPr>
+          <a:xfrm>
+            <a:off x="502920" y="6446520"/>
+            <a:ext cx="10972800" cy="274320"/>
+          </a:xfrm>
+          <a:prstGeom prst="rect">
+            <a:avLst/>
+          </a:prstGeom>
+          <a:noFill/>
+        </p:spPr>
+        <p:txBody>
+          <a:bodyPr wrap="none">
+            <a:spAutoFit/>
+          </a:bodyPr>
+          <a:lstStyle/>
+          <a:p>
+            <a:r>
+              <a:rPr sz="1000" b="0">
+                <a:solidFill>
+                  <a:srgbClr val="5A5A5A"/>
+                </a:solidFill>
+                <a:latin typeface="Malgun Gothic"/>
+              </a:rPr>
+              <a:t>3 / 13</a:t>
+            </a:r>
+          </a:p>
+        </p:txBody>
+      </p:sp>
+    </p:spTree>
+  </p:cSld>
+  <p:clrMapOvr>
+    <a:masterClrMapping/>
+  </p:clrMapOvr>
+</p:sld>
+</file>
+
+<file path=ppt/slides/slide4.xml><?xml version="1.0" encoding="utf-8"?>
+<p:sld xmlns:a="http://schemas.openxmlformats.org/drawingml/2006/main" xmlns:p="http://schemas.openxmlformats.org/presentationml/2006/main" xmlns:r="http://schemas.openxmlformats.org/officeDocument/2006/relationships">
+  <p:cSld>
+    <p:spTree>
+      <p:nvGrpSpPr>
+        <p:cNvPr id="1" name=""/>
+        <p:cNvGrpSpPr/>
+        <p:nvPr/>
+      </p:nvGrpSpPr>
+      <p:grpSpPr/>
+      <p:sp>
+        <p:nvSpPr>
+          <p:cNvPr id="2" name="Rectangle 1"/>
+          <p:cNvSpPr/>
+          <p:nvPr/>
+        </p:nvSpPr>
+        <p:spPr>
+          <a:xfrm>
+            <a:off x="0" y="0"/>
+            <a:ext cx="12191695" cy="6858000"/>
+          </a:xfrm>
+          <a:prstGeom prst="rect">
+            <a:avLst/>
+          </a:prstGeom>
+          <a:solidFill>
+            <a:srgbClr val="F2F5F8"/>
+          </a:solidFill>
+          <a:ln>
+            <a:noFill/>
+          </a:ln>
+        </p:spPr>
+        <p:style>
+          <a:lnRef idx="1">
+            <a:schemeClr val="accent1"/>
+          </a:lnRef>
+          <a:fillRef idx="3">
+            <a:schemeClr val="accent1"/>
+          </a:fillRef>
+          <a:effectRef idx="2">
+            <a:schemeClr val="accent1"/>
+          </a:effectRef>
+          <a:fontRef idx="minor">
+            <a:schemeClr val="lt1"/>
+          </a:fontRef>
+        </p:style>
+        <p:txBody>
+          <a:bodyPr rtlCol="0" anchor="ctr"/>
+          <a:lstStyle/>
+          <a:p>
+            <a:pPr algn="ctr"/>
+          </a:p>
+        </p:txBody>
+      </p:sp>
+      <p:sp>
+        <p:nvSpPr>
+          <p:cNvPr id="3" name="Rectangle 2"/>
+          <p:cNvSpPr/>
+          <p:nvPr/>
+        </p:nvSpPr>
+        <p:spPr>
+          <a:xfrm>
+            <a:off x="0" y="0"/>
+            <a:ext cx="12191695" cy="502920"/>
+          </a:xfrm>
+          <a:prstGeom prst="rect">
+            <a:avLst/>
+          </a:prstGeom>
+          <a:solidFill>
+            <a:srgbClr val="0B1F3A"/>
+          </a:solidFill>
+          <a:ln>
+            <a:noFill/>
+          </a:ln>
+        </p:spPr>
+        <p:style>
+          <a:lnRef idx="1">
+            <a:schemeClr val="accent1"/>
+          </a:lnRef>
+          <a:fillRef idx="3">
+            <a:schemeClr val="accent1"/>
+          </a:fillRef>
+          <a:effectRef idx="2">
+            <a:schemeClr val="accent1"/>
+          </a:effectRef>
+          <a:fontRef idx="minor">
+            <a:schemeClr val="lt1"/>
+          </a:fontRef>
+        </p:style>
+        <p:txBody>
+          <a:bodyPr rtlCol="0" anchor="ctr"/>
+          <a:lstStyle/>
+          <a:p>
+            <a:pPr algn="ctr"/>
+          </a:p>
+        </p:txBody>
+      </p:sp>
+      <p:sp>
+        <p:nvSpPr>
+          <p:cNvPr id="4" name="TextBox 3"/>
+          <p:cNvSpPr txBox="1"/>
+          <p:nvPr/>
+        </p:nvSpPr>
+        <p:spPr>
+          <a:xfrm>
+            <a:off x="502920" y="109728"/>
+            <a:ext cx="10972800" cy="320040"/>
+          </a:xfrm>
+          <a:prstGeom prst="rect">
+            <a:avLst/>
+          </a:prstGeom>
+          <a:noFill/>
+        </p:spPr>
+        <p:txBody>
+          <a:bodyPr wrap="none">
+            <a:spAutoFit/>
+          </a:bodyPr>
+          <a:lstStyle/>
+          <a:p>
+            <a:r>
+              <a:rPr sz="1100" b="0">
+                <a:solidFill>
+                  <a:srgbClr val="FFFFFF"/>
+                </a:solidFill>
+                <a:latin typeface="Malgun Gothic"/>
+              </a:rPr>
+              <a:t>논의 정리  |  Cursor × ABAP Ops Monitor</a:t>
+            </a:r>
+          </a:p>
+        </p:txBody>
+      </p:sp>
+      <p:sp>
+        <p:nvSpPr>
+          <p:cNvPr id="5" name="TextBox 4"/>
+          <p:cNvSpPr txBox="1"/>
+          <p:nvPr/>
+        </p:nvSpPr>
+        <p:spPr>
+          <a:xfrm>
+            <a:off x="502920" y="685800"/>
+            <a:ext cx="11155680" cy="548640"/>
+          </a:xfrm>
+          <a:prstGeom prst="rect">
+            <a:avLst/>
+          </a:prstGeom>
+          <a:noFill/>
+        </p:spPr>
+        <p:txBody>
+          <a:bodyPr wrap="none">
+            <a:spAutoFit/>
+          </a:bodyPr>
+          <a:lstStyle/>
+          <a:p>
+            <a:r>
+              <a:rPr sz="2600" b="1">
+                <a:solidFill>
+                  <a:srgbClr val="0B1F3A"/>
+                </a:solidFill>
+                <a:latin typeface="Malgun Gothic"/>
+              </a:rPr>
+              <a:t>① 질문 개수 (접근 가능 2세션 합산)</a:t>
+            </a:r>
+          </a:p>
+        </p:txBody>
+      </p:sp>
+      <p:graphicFrame>
+        <p:nvGraphicFramePr>
+          <p:cNvPr id="6" name="Table 5"/>
+          <p:cNvGraphicFramePr>
+            <a:graphicFrameLocks noGrp="1"/>
+          </p:cNvGraphicFramePr>
+          <p:nvPr/>
+        </p:nvGraphicFramePr>
+        <p:xfrm>
+          <a:off x="548640" y="1463040"/>
+          <a:ext cx="10972800" cy="2194560"/>
+        </p:xfrm>
+        <a:graphic>
+          <a:graphicData uri="http://schemas.openxmlformats.org/drawingml/2006/table">
+            <a:tbl>
+              <a:tblPr firstRow="1" bandRow="1">
+                <a:tableStyleId>{5C22544A-7EE6-4342-B048-85BDC9FD1C3A}</a:tableStyleId>
+              </a:tblPr>
+              <a:tblGrid>
+                <a:gridCol w="4114800"/>
+                <a:gridCol w="2286000"/>
+                <a:gridCol w="4572000"/>
+              </a:tblGrid>
+              <a:tr h="548640">
+                <a:tc>
+                  <a:txBody>
+                    <a:bodyPr/>
+                    <a:lstStyle/>
+                    <a:p>
+                      <a:r>
+                        <a:rPr sz="1200" b="1">
+                          <a:solidFill>
+                            <a:srgbClr val="FFFFFF"/>
+                          </a:solidFill>
+                          <a:latin typeface="Malgun Gothic"/>
+                        </a:rPr>
+                        <a:t>항목</a:t>
                       </a:r>
                     </a:p>
                   </a:txBody>
@@ -4450,7 +5575,888 @@
                           </a:solidFill>
                           <a:latin typeface="Malgun Gothic"/>
                         </a:rPr>
-                        <a:t>Session B</a:t>
+                        <a:t>개수</a:t>
+                      </a:r>
+                    </a:p>
+                  </a:txBody>
+                  <a:tcPr>
+                    <a:solidFill>
+                      <a:srgbClr val="0B1F3A"/>
+                    </a:solidFill>
+                  </a:tcPr>
+                </a:tc>
+                <a:tc>
+                  <a:txBody>
+                    <a:bodyPr/>
+                    <a:lstStyle/>
+                    <a:p>
+                      <a:r>
+                        <a:rPr sz="1200" b="1">
+                          <a:solidFill>
+                            <a:srgbClr val="FFFFFF"/>
+                          </a:solidFill>
+                          <a:latin typeface="Malgun Gothic"/>
+                        </a:rPr>
+                        <a:t>비고</a:t>
+                      </a:r>
+                    </a:p>
+                  </a:txBody>
+                  <a:tcPr>
+                    <a:solidFill>
+                      <a:srgbClr val="0B1F3A"/>
+                    </a:solidFill>
+                  </a:tcPr>
+                </a:tc>
+              </a:tr>
+              <a:tr h="548640">
+                <a:tc>
+                  <a:txBody>
+                    <a:bodyPr/>
+                    <a:lstStyle/>
+                    <a:p>
+                      <a:r>
+                        <a:rPr sz="1100" b="0">
+                          <a:solidFill>
+                            <a:srgbClr val="1A1A1A"/>
+                          </a:solidFill>
+                          <a:latin typeface="Malgun Gothic"/>
+                        </a:rPr>
+                        <a:t>총 질문 (메타·시스템 제외)</a:t>
+                      </a:r>
+                    </a:p>
+                  </a:txBody>
+                  <a:tcPr>
+                    <a:solidFill>
+                      <a:srgbClr val="FFFFFF"/>
+                    </a:solidFill>
+                  </a:tcPr>
+                </a:tc>
+                <a:tc>
+                  <a:txBody>
+                    <a:bodyPr/>
+                    <a:lstStyle/>
+                    <a:p>
+                      <a:r>
+                        <a:rPr sz="1100" b="0">
+                          <a:solidFill>
+                            <a:srgbClr val="1A1A1A"/>
+                          </a:solidFill>
+                          <a:latin typeface="Malgun Gothic"/>
+                        </a:rPr>
+                        <a:t>약 124~126</a:t>
+                      </a:r>
+                    </a:p>
+                  </a:txBody>
+                  <a:tcPr>
+                    <a:solidFill>
+                      <a:srgbClr val="FFFFFF"/>
+                    </a:solidFill>
+                  </a:tcPr>
+                </a:tc>
+                <a:tc>
+                  <a:txBody>
+                    <a:bodyPr/>
+                    <a:lstStyle/>
+                    <a:p>
+                      <a:r>
+                        <a:rPr sz="1100" b="0">
+                          <a:solidFill>
+                            <a:srgbClr val="1A1A1A"/>
+                          </a:solidFill>
+                          <a:latin typeface="Malgun Gothic"/>
+                        </a:rPr>
+                        <a:t>요약/집계 질문 제외</a:t>
+                      </a:r>
+                    </a:p>
+                  </a:txBody>
+                  <a:tcPr>
+                    <a:solidFill>
+                      <a:srgbClr val="FFFFFF"/>
+                    </a:solidFill>
+                  </a:tcPr>
+                </a:tc>
+              </a:tr>
+              <a:tr h="548640">
+                <a:tc>
+                  <a:txBody>
+                    <a:bodyPr/>
+                    <a:lstStyle/>
+                    <a:p>
+                      <a:r>
+                        <a:rPr sz="1100" b="0">
+                          <a:solidFill>
+                            <a:srgbClr val="1A1A1A"/>
+                          </a:solidFill>
+                          <a:latin typeface="Malgun Gothic"/>
+                        </a:rPr>
+                        <a:t>오류 관련 (중복 제거)</a:t>
+                      </a:r>
+                    </a:p>
+                  </a:txBody>
+                  <a:tcPr>
+                    <a:solidFill>
+                      <a:srgbClr val="E8EEF3"/>
+                    </a:solidFill>
+                  </a:tcPr>
+                </a:tc>
+                <a:tc>
+                  <a:txBody>
+                    <a:bodyPr/>
+                    <a:lstStyle/>
+                    <a:p>
+                      <a:r>
+                        <a:rPr sz="1100" b="0">
+                          <a:solidFill>
+                            <a:srgbClr val="1A1A1A"/>
+                          </a:solidFill>
+                          <a:latin typeface="Malgun Gothic"/>
+                        </a:rPr>
+                        <a:t>23</a:t>
+                      </a:r>
+                    </a:p>
+                  </a:txBody>
+                  <a:tcPr>
+                    <a:solidFill>
+                      <a:srgbClr val="E8EEF3"/>
+                    </a:solidFill>
+                  </a:tcPr>
+                </a:tc>
+                <a:tc>
+                  <a:txBody>
+                    <a:bodyPr/>
+                    <a:lstStyle/>
+                    <a:p>
+                      <a:r>
+                        <a:rPr sz="1100" b="0">
+                          <a:solidFill>
+                            <a:srgbClr val="1A1A1A"/>
+                          </a:solidFill>
+                          <a:latin typeface="Malgun Gothic"/>
+                        </a:rPr>
+                        <a:t>같은 오류 재보고는 1건</a:t>
+                      </a:r>
+                    </a:p>
+                  </a:txBody>
+                  <a:tcPr>
+                    <a:solidFill>
+                      <a:srgbClr val="E8EEF3"/>
+                    </a:solidFill>
+                  </a:tcPr>
+                </a:tc>
+              </a:tr>
+              <a:tr h="548640">
+                <a:tc>
+                  <a:txBody>
+                    <a:bodyPr/>
+                    <a:lstStyle/>
+                    <a:p>
+                      <a:r>
+                        <a:rPr sz="1100" b="0">
+                          <a:solidFill>
+                            <a:srgbClr val="1A1A1A"/>
+                          </a:solidFill>
+                          <a:latin typeface="Malgun Gothic"/>
+                        </a:rPr>
+                        <a:t>단순 기능 수정 (중복 제거)</a:t>
+                      </a:r>
+                    </a:p>
+                  </a:txBody>
+                  <a:tcPr>
+                    <a:solidFill>
+                      <a:srgbClr val="FFFFFF"/>
+                    </a:solidFill>
+                  </a:tcPr>
+                </a:tc>
+                <a:tc>
+                  <a:txBody>
+                    <a:bodyPr/>
+                    <a:lstStyle/>
+                    <a:p>
+                      <a:r>
+                        <a:rPr sz="1100" b="0">
+                          <a:solidFill>
+                            <a:srgbClr val="1A1A1A"/>
+                          </a:solidFill>
+                          <a:latin typeface="Malgun Gothic"/>
+                        </a:rPr>
+                        <a:t>13~15</a:t>
+                      </a:r>
+                    </a:p>
+                  </a:txBody>
+                  <a:tcPr>
+                    <a:solidFill>
+                      <a:srgbClr val="FFFFFF"/>
+                    </a:solidFill>
+                  </a:tcPr>
+                </a:tc>
+                <a:tc>
+                  <a:txBody>
+                    <a:bodyPr/>
+                    <a:lstStyle/>
+                    <a:p>
+                      <a:r>
+                        <a:rPr sz="1100" b="0">
+                          <a:solidFill>
+                            <a:srgbClr val="1A1A1A"/>
+                          </a:solidFill>
+                          <a:latin typeface="Malgun Gothic"/>
+                        </a:rPr>
+                        <a:t>UX·컬럼·색·팝업 polish 등</a:t>
+                      </a:r>
+                    </a:p>
+                  </a:txBody>
+                  <a:tcPr>
+                    <a:solidFill>
+                      <a:srgbClr val="FFFFFF"/>
+                    </a:solidFill>
+                  </a:tcPr>
+                </a:tc>
+              </a:tr>
+            </a:tbl>
+          </a:graphicData>
+        </a:graphic>
+      </p:graphicFrame>
+      <p:sp>
+        <p:nvSpPr>
+          <p:cNvPr id="7" name="TextBox 6"/>
+          <p:cNvSpPr txBox="1"/>
+          <p:nvPr/>
+        </p:nvSpPr>
+        <p:spPr>
+          <a:xfrm>
+            <a:off x="594360" y="4023360"/>
+            <a:ext cx="10972800" cy="4754880"/>
+          </a:xfrm>
+          <a:prstGeom prst="rect">
+            <a:avLst/>
+          </a:prstGeom>
+          <a:noFill/>
+        </p:spPr>
+        <p:txBody>
+          <a:bodyPr wrap="square">
+            <a:spAutoFit/>
+          </a:bodyPr>
+          <a:lstStyle/>
+          <a:p>
+            <a:pPr>
+              <a:spcAft>
+                <a:spcPts val="700"/>
+              </a:spcAft>
+            </a:pPr>
+            <a:r>
+              <a:rPr sz="1400" b="0">
+                <a:solidFill>
+                  <a:srgbClr val="1A1A1A"/>
+                </a:solidFill>
+                <a:latin typeface="Malgun Gothic"/>
+              </a:rPr>
+              <a:t>통짜 소스 / `계속` / 발표자료 / 권한·설계 확정은 ‘총 질문’에는 들어가나</a:t>
+            </a:r>
+          </a:p>
+          <a:p>
+            <a:pPr>
+              <a:spcAft>
+                <a:spcPts val="700"/>
+              </a:spcAft>
+            </a:pPr>
+            <a:r>
+              <a:rPr sz="1400" b="0">
+                <a:solidFill>
+                  <a:srgbClr val="1A1A1A"/>
+                </a:solidFill>
+                <a:latin typeface="Malgun Gothic"/>
+              </a:rPr>
+              <a:t>오류·기능수정 버킷에는 넣지 않음</a:t>
+            </a:r>
+          </a:p>
+        </p:txBody>
+      </p:sp>
+      <p:sp>
+        <p:nvSpPr>
+          <p:cNvPr id="8" name="TextBox 7"/>
+          <p:cNvSpPr txBox="1"/>
+          <p:nvPr/>
+        </p:nvSpPr>
+        <p:spPr>
+          <a:xfrm>
+            <a:off x="502920" y="6446520"/>
+            <a:ext cx="10972800" cy="274320"/>
+          </a:xfrm>
+          <a:prstGeom prst="rect">
+            <a:avLst/>
+          </a:prstGeom>
+          <a:noFill/>
+        </p:spPr>
+        <p:txBody>
+          <a:bodyPr wrap="none">
+            <a:spAutoFit/>
+          </a:bodyPr>
+          <a:lstStyle/>
+          <a:p>
+            <a:r>
+              <a:rPr sz="1000" b="0">
+                <a:solidFill>
+                  <a:srgbClr val="5A5A5A"/>
+                </a:solidFill>
+                <a:latin typeface="Malgun Gothic"/>
+              </a:rPr>
+              <a:t>4 / 13</a:t>
+            </a:r>
+          </a:p>
+        </p:txBody>
+      </p:sp>
+    </p:spTree>
+  </p:cSld>
+  <p:clrMapOvr>
+    <a:masterClrMapping/>
+  </p:clrMapOvr>
+</p:sld>
+</file>
+
+<file path=ppt/slides/slide5.xml><?xml version="1.0" encoding="utf-8"?>
+<p:sld xmlns:a="http://schemas.openxmlformats.org/drawingml/2006/main" xmlns:p="http://schemas.openxmlformats.org/presentationml/2006/main" xmlns:r="http://schemas.openxmlformats.org/officeDocument/2006/relationships">
+  <p:cSld>
+    <p:spTree>
+      <p:nvGrpSpPr>
+        <p:cNvPr id="1" name=""/>
+        <p:cNvGrpSpPr/>
+        <p:nvPr/>
+      </p:nvGrpSpPr>
+      <p:grpSpPr/>
+      <p:sp>
+        <p:nvSpPr>
+          <p:cNvPr id="2" name="Rectangle 1"/>
+          <p:cNvSpPr/>
+          <p:nvPr/>
+        </p:nvSpPr>
+        <p:spPr>
+          <a:xfrm>
+            <a:off x="0" y="0"/>
+            <a:ext cx="12191695" cy="6858000"/>
+          </a:xfrm>
+          <a:prstGeom prst="rect">
+            <a:avLst/>
+          </a:prstGeom>
+          <a:solidFill>
+            <a:srgbClr val="F2F5F8"/>
+          </a:solidFill>
+          <a:ln>
+            <a:noFill/>
+          </a:ln>
+        </p:spPr>
+        <p:style>
+          <a:lnRef idx="1">
+            <a:schemeClr val="accent1"/>
+          </a:lnRef>
+          <a:fillRef idx="3">
+            <a:schemeClr val="accent1"/>
+          </a:fillRef>
+          <a:effectRef idx="2">
+            <a:schemeClr val="accent1"/>
+          </a:effectRef>
+          <a:fontRef idx="minor">
+            <a:schemeClr val="lt1"/>
+          </a:fontRef>
+        </p:style>
+        <p:txBody>
+          <a:bodyPr rtlCol="0" anchor="ctr"/>
+          <a:lstStyle/>
+          <a:p>
+            <a:pPr algn="ctr"/>
+          </a:p>
+        </p:txBody>
+      </p:sp>
+      <p:sp>
+        <p:nvSpPr>
+          <p:cNvPr id="3" name="Rectangle 2"/>
+          <p:cNvSpPr/>
+          <p:nvPr/>
+        </p:nvSpPr>
+        <p:spPr>
+          <a:xfrm>
+            <a:off x="0" y="0"/>
+            <a:ext cx="12191695" cy="502920"/>
+          </a:xfrm>
+          <a:prstGeom prst="rect">
+            <a:avLst/>
+          </a:prstGeom>
+          <a:solidFill>
+            <a:srgbClr val="0B1F3A"/>
+          </a:solidFill>
+          <a:ln>
+            <a:noFill/>
+          </a:ln>
+        </p:spPr>
+        <p:style>
+          <a:lnRef idx="1">
+            <a:schemeClr val="accent1"/>
+          </a:lnRef>
+          <a:fillRef idx="3">
+            <a:schemeClr val="accent1"/>
+          </a:fillRef>
+          <a:effectRef idx="2">
+            <a:schemeClr val="accent1"/>
+          </a:effectRef>
+          <a:fontRef idx="minor">
+            <a:schemeClr val="lt1"/>
+          </a:fontRef>
+        </p:style>
+        <p:txBody>
+          <a:bodyPr rtlCol="0" anchor="ctr"/>
+          <a:lstStyle/>
+          <a:p>
+            <a:pPr algn="ctr"/>
+          </a:p>
+        </p:txBody>
+      </p:sp>
+      <p:sp>
+        <p:nvSpPr>
+          <p:cNvPr id="4" name="TextBox 3"/>
+          <p:cNvSpPr txBox="1"/>
+          <p:nvPr/>
+        </p:nvSpPr>
+        <p:spPr>
+          <a:xfrm>
+            <a:off x="502920" y="109728"/>
+            <a:ext cx="10972800" cy="320040"/>
+          </a:xfrm>
+          <a:prstGeom prst="rect">
+            <a:avLst/>
+          </a:prstGeom>
+          <a:noFill/>
+        </p:spPr>
+        <p:txBody>
+          <a:bodyPr wrap="none">
+            <a:spAutoFit/>
+          </a:bodyPr>
+          <a:lstStyle/>
+          <a:p>
+            <a:r>
+              <a:rPr sz="1100" b="0">
+                <a:solidFill>
+                  <a:srgbClr val="FFFFFF"/>
+                </a:solidFill>
+                <a:latin typeface="Malgun Gothic"/>
+              </a:rPr>
+              <a:t>논의 정리  |  Cursor × ABAP Ops Monitor</a:t>
+            </a:r>
+          </a:p>
+        </p:txBody>
+      </p:sp>
+      <p:sp>
+        <p:nvSpPr>
+          <p:cNvPr id="5" name="TextBox 4"/>
+          <p:cNvSpPr txBox="1"/>
+          <p:nvPr/>
+        </p:nvSpPr>
+        <p:spPr>
+          <a:xfrm>
+            <a:off x="502920" y="685800"/>
+            <a:ext cx="11155680" cy="548640"/>
+          </a:xfrm>
+          <a:prstGeom prst="rect">
+            <a:avLst/>
+          </a:prstGeom>
+          <a:noFill/>
+        </p:spPr>
+        <p:txBody>
+          <a:bodyPr wrap="none">
+            <a:spAutoFit/>
+          </a:bodyPr>
+          <a:lstStyle/>
+          <a:p>
+            <a:r>
+              <a:rPr sz="2600" b="1">
+                <a:solidFill>
+                  <a:srgbClr val="0B1F3A"/>
+                </a:solidFill>
+                <a:latin typeface="Malgun Gothic"/>
+              </a:rPr>
+              <a:t>② 집계 범위 — 보이는 세션 ≠ 전부 열리는 세션</a:t>
+            </a:r>
+          </a:p>
+        </p:txBody>
+      </p:sp>
+      <p:sp>
+        <p:nvSpPr>
+          <p:cNvPr id="6" name="TextBox 5"/>
+          <p:cNvSpPr txBox="1"/>
+          <p:nvPr/>
+        </p:nvSpPr>
+        <p:spPr>
+          <a:xfrm>
+            <a:off x="594360" y="1371600"/>
+            <a:ext cx="10972800" cy="4754880"/>
+          </a:xfrm>
+          <a:prstGeom prst="rect">
+            <a:avLst/>
+          </a:prstGeom>
+          <a:noFill/>
+        </p:spPr>
+        <p:txBody>
+          <a:bodyPr wrap="square">
+            <a:spAutoFit/>
+          </a:bodyPr>
+          <a:lstStyle/>
+          <a:p>
+            <a:pPr>
+              <a:spcAft>
+                <a:spcPts val="700"/>
+              </a:spcAft>
+            </a:pPr>
+            <a:r>
+              <a:rPr sz="1500" b="0">
+                <a:solidFill>
+                  <a:srgbClr val="1A1A1A"/>
+                </a:solidFill>
+                <a:latin typeface="Malgun Gothic"/>
+              </a:rPr>
+              <a:t>집계에 들어간 것: Awesome skills automation + 통합 운영 모니터링 대시보드</a:t>
+            </a:r>
+          </a:p>
+          <a:p>
+            <a:pPr>
+              <a:spcAft>
+                <a:spcPts val="700"/>
+              </a:spcAft>
+            </a:pPr>
+            <a:r>
+              <a:rPr sz="1500" b="0">
+                <a:solidFill>
+                  <a:srgbClr val="1A1A1A"/>
+                </a:solidFill>
+                <a:latin typeface="Malgun Gothic"/>
+              </a:rPr>
+              <a:t>UI에는 약 5개 세션이 보여도, 전사(transcript) API로는 위 2개만 열림</a:t>
+            </a:r>
+          </a:p>
+          <a:p>
+            <a:pPr>
+              <a:spcAft>
+                <a:spcPts val="700"/>
+              </a:spcAft>
+            </a:pPr>
+            <a:r>
+              <a:rPr sz="1500" b="0">
+                <a:solidFill>
+                  <a:srgbClr val="1A1A1A"/>
+                </a:solidFill>
+                <a:latin typeface="Malgun Gothic"/>
+              </a:rPr>
+              <a:t>SELECT-OPTIONS 설계서 세션 등(PR #6 등)은 프로그램 관련이지만</a:t>
+            </a:r>
+          </a:p>
+          <a:p>
+            <a:pPr>
+              <a:spcAft>
+                <a:spcPts val="700"/>
+              </a:spcAft>
+            </a:pPr>
+            <a:r>
+              <a:rPr sz="1500" b="0">
+                <a:solidFill>
+                  <a:srgbClr val="1A1A1A"/>
+                </a:solidFill>
+                <a:latin typeface="Malgun Gothic"/>
+              </a:rPr>
+              <a:t>  → 만료/접근 불가로 개수에 못 넣음</a:t>
+            </a:r>
+          </a:p>
+          <a:p>
+            <a:pPr>
+              <a:spcAft>
+                <a:spcPts val="700"/>
+              </a:spcAft>
+            </a:pPr>
+            <a:r>
+              <a:rPr sz="1500" b="0">
+                <a:solidFill>
+                  <a:srgbClr val="1A1A1A"/>
+                </a:solidFill>
+                <a:latin typeface="Malgun Gothic"/>
+              </a:rPr>
+              <a:t>즉, ‘이 폴더의 모든 과거 대화’가 아니라 ‘지금 읽을 수 있는 대화’ 기준</a:t>
+            </a:r>
+          </a:p>
+        </p:txBody>
+      </p:sp>
+      <p:sp>
+        <p:nvSpPr>
+          <p:cNvPr id="7" name="TextBox 6"/>
+          <p:cNvSpPr txBox="1"/>
+          <p:nvPr/>
+        </p:nvSpPr>
+        <p:spPr>
+          <a:xfrm>
+            <a:off x="502920" y="6446520"/>
+            <a:ext cx="10972800" cy="274320"/>
+          </a:xfrm>
+          <a:prstGeom prst="rect">
+            <a:avLst/>
+          </a:prstGeom>
+          <a:noFill/>
+        </p:spPr>
+        <p:txBody>
+          <a:bodyPr wrap="none">
+            <a:spAutoFit/>
+          </a:bodyPr>
+          <a:lstStyle/>
+          <a:p>
+            <a:r>
+              <a:rPr sz="1000" b="0">
+                <a:solidFill>
+                  <a:srgbClr val="5A5A5A"/>
+                </a:solidFill>
+                <a:latin typeface="Malgun Gothic"/>
+              </a:rPr>
+              <a:t>5 / 13</a:t>
+            </a:r>
+          </a:p>
+        </p:txBody>
+      </p:sp>
+    </p:spTree>
+  </p:cSld>
+  <p:clrMapOvr>
+    <a:masterClrMapping/>
+  </p:clrMapOvr>
+</p:sld>
+</file>
+
+<file path=ppt/slides/slide6.xml><?xml version="1.0" encoding="utf-8"?>
+<p:sld xmlns:a="http://schemas.openxmlformats.org/drawingml/2006/main" xmlns:p="http://schemas.openxmlformats.org/presentationml/2006/main" xmlns:r="http://schemas.openxmlformats.org/officeDocument/2006/relationships">
+  <p:cSld>
+    <p:spTree>
+      <p:nvGrpSpPr>
+        <p:cNvPr id="1" name=""/>
+        <p:cNvGrpSpPr/>
+        <p:nvPr/>
+      </p:nvGrpSpPr>
+      <p:grpSpPr/>
+      <p:sp>
+        <p:nvSpPr>
+          <p:cNvPr id="2" name="Rectangle 1"/>
+          <p:cNvSpPr/>
+          <p:nvPr/>
+        </p:nvSpPr>
+        <p:spPr>
+          <a:xfrm>
+            <a:off x="0" y="0"/>
+            <a:ext cx="12191695" cy="6858000"/>
+          </a:xfrm>
+          <a:prstGeom prst="rect">
+            <a:avLst/>
+          </a:prstGeom>
+          <a:solidFill>
+            <a:srgbClr val="F2F5F8"/>
+          </a:solidFill>
+          <a:ln>
+            <a:noFill/>
+          </a:ln>
+        </p:spPr>
+        <p:style>
+          <a:lnRef idx="1">
+            <a:schemeClr val="accent1"/>
+          </a:lnRef>
+          <a:fillRef idx="3">
+            <a:schemeClr val="accent1"/>
+          </a:fillRef>
+          <a:effectRef idx="2">
+            <a:schemeClr val="accent1"/>
+          </a:effectRef>
+          <a:fontRef idx="minor">
+            <a:schemeClr val="lt1"/>
+          </a:fontRef>
+        </p:style>
+        <p:txBody>
+          <a:bodyPr rtlCol="0" anchor="ctr"/>
+          <a:lstStyle/>
+          <a:p>
+            <a:pPr algn="ctr"/>
+          </a:p>
+        </p:txBody>
+      </p:sp>
+      <p:sp>
+        <p:nvSpPr>
+          <p:cNvPr id="3" name="Rectangle 2"/>
+          <p:cNvSpPr/>
+          <p:nvPr/>
+        </p:nvSpPr>
+        <p:spPr>
+          <a:xfrm>
+            <a:off x="0" y="0"/>
+            <a:ext cx="12191695" cy="502920"/>
+          </a:xfrm>
+          <a:prstGeom prst="rect">
+            <a:avLst/>
+          </a:prstGeom>
+          <a:solidFill>
+            <a:srgbClr val="0B1F3A"/>
+          </a:solidFill>
+          <a:ln>
+            <a:noFill/>
+          </a:ln>
+        </p:spPr>
+        <p:style>
+          <a:lnRef idx="1">
+            <a:schemeClr val="accent1"/>
+          </a:lnRef>
+          <a:fillRef idx="3">
+            <a:schemeClr val="accent1"/>
+          </a:fillRef>
+          <a:effectRef idx="2">
+            <a:schemeClr val="accent1"/>
+          </a:effectRef>
+          <a:fontRef idx="minor">
+            <a:schemeClr val="lt1"/>
+          </a:fontRef>
+        </p:style>
+        <p:txBody>
+          <a:bodyPr rtlCol="0" anchor="ctr"/>
+          <a:lstStyle/>
+          <a:p>
+            <a:pPr algn="ctr"/>
+          </a:p>
+        </p:txBody>
+      </p:sp>
+      <p:sp>
+        <p:nvSpPr>
+          <p:cNvPr id="4" name="TextBox 3"/>
+          <p:cNvSpPr txBox="1"/>
+          <p:nvPr/>
+        </p:nvSpPr>
+        <p:spPr>
+          <a:xfrm>
+            <a:off x="502920" y="109728"/>
+            <a:ext cx="10972800" cy="320040"/>
+          </a:xfrm>
+          <a:prstGeom prst="rect">
+            <a:avLst/>
+          </a:prstGeom>
+          <a:noFill/>
+        </p:spPr>
+        <p:txBody>
+          <a:bodyPr wrap="none">
+            <a:spAutoFit/>
+          </a:bodyPr>
+          <a:lstStyle/>
+          <a:p>
+            <a:r>
+              <a:rPr sz="1100" b="0">
+                <a:solidFill>
+                  <a:srgbClr val="FFFFFF"/>
+                </a:solidFill>
+                <a:latin typeface="Malgun Gothic"/>
+              </a:rPr>
+              <a:t>논의 정리  |  Cursor × ABAP Ops Monitor</a:t>
+            </a:r>
+          </a:p>
+        </p:txBody>
+      </p:sp>
+      <p:sp>
+        <p:nvSpPr>
+          <p:cNvPr id="5" name="TextBox 4"/>
+          <p:cNvSpPr txBox="1"/>
+          <p:nvPr/>
+        </p:nvSpPr>
+        <p:spPr>
+          <a:xfrm>
+            <a:off x="502920" y="685800"/>
+            <a:ext cx="11155680" cy="548640"/>
+          </a:xfrm>
+          <a:prstGeom prst="rect">
+            <a:avLst/>
+          </a:prstGeom>
+          <a:noFill/>
+        </p:spPr>
+        <p:txBody>
+          <a:bodyPr wrap="none">
+            <a:spAutoFit/>
+          </a:bodyPr>
+          <a:lstStyle/>
+          <a:p>
+            <a:r>
+              <a:rPr sz="2600" b="1">
+                <a:solidFill>
+                  <a:srgbClr val="0B1F3A"/>
+                </a:solidFill>
+                <a:latin typeface="Malgun Gothic"/>
+              </a:rPr>
+              <a:t>③ Session A → Skills → Session B</a:t>
+            </a:r>
+          </a:p>
+        </p:txBody>
+      </p:sp>
+      <p:graphicFrame>
+        <p:nvGraphicFramePr>
+          <p:cNvPr id="6" name="Table 5"/>
+          <p:cNvGraphicFramePr>
+            <a:graphicFrameLocks noGrp="1"/>
+          </p:cNvGraphicFramePr>
+          <p:nvPr/>
+        </p:nvGraphicFramePr>
+        <p:xfrm>
+          <a:off x="502920" y="1417320"/>
+          <a:ext cx="11155680" cy="2926080"/>
+        </p:xfrm>
+        <a:graphic>
+          <a:graphicData uri="http://schemas.openxmlformats.org/drawingml/2006/table">
+            <a:tbl>
+              <a:tblPr firstRow="1" bandRow="1">
+                <a:tableStyleId>{5C22544A-7EE6-4342-B048-85BDC9FD1C3A}</a:tableStyleId>
+              </a:tblPr>
+              <a:tblGrid>
+                <a:gridCol w="2011680"/>
+                <a:gridCol w="4572000"/>
+                <a:gridCol w="4572000"/>
+              </a:tblGrid>
+              <a:tr h="585216">
+                <a:tc>
+                  <a:txBody>
+                    <a:bodyPr/>
+                    <a:lstStyle/>
+                    <a:p/>
+                  </a:txBody>
+                  <a:tcPr>
+                    <a:solidFill>
+                      <a:srgbClr val="0B1F3A"/>
+                    </a:solidFill>
+                  </a:tcPr>
+                </a:tc>
+                <a:tc>
+                  <a:txBody>
+                    <a:bodyPr/>
+                    <a:lstStyle/>
+                    <a:p>
+                      <a:r>
+                        <a:rPr sz="1200" b="1">
+                          <a:solidFill>
+                            <a:srgbClr val="FFFFFF"/>
+                          </a:solidFill>
+                          <a:latin typeface="Malgun Gothic"/>
+                        </a:rPr>
+                        <a:t>A Awesome skills</a:t>
+                      </a:r>
+                    </a:p>
+                  </a:txBody>
+                  <a:tcPr>
+                    <a:solidFill>
+                      <a:srgbClr val="0B1F3A"/>
+                    </a:solidFill>
+                  </a:tcPr>
+                </a:tc>
+                <a:tc>
+                  <a:txBody>
+                    <a:bodyPr/>
+                    <a:lstStyle/>
+                    <a:p>
+                      <a:r>
+                        <a:rPr sz="1200" b="1">
+                          <a:solidFill>
+                            <a:srgbClr val="FFFFFF"/>
+                          </a:solidFill>
+                          <a:latin typeface="Malgun Gothic"/>
+                        </a:rPr>
+                        <a:t>B 통합 운영 모니터</a:t>
                       </a:r>
                     </a:p>
                   </a:txBody>
@@ -4474,7 +6480,7 @@
                           </a:solidFill>
                           <a:latin typeface="Malgun Gothic"/>
                         </a:rPr>
-                        <a:t>이름</a:t>
+                        <a:t>한 일</a:t>
                       </a:r>
                     </a:p>
                   </a:txBody>
@@ -4496,7 +6502,7 @@
                           </a:solidFill>
                           <a:latin typeface="Malgun Gothic"/>
                         </a:rPr>
-                        <a:t>Awesome skills automation</a:t>
+                        <a:t>장기 구현 + 오류/UX 루프</a:t>
                       </a:r>
                     </a:p>
                   </a:txBody>
@@ -4518,7 +6524,7 @@
                           </a:solidFill>
                           <a:latin typeface="Malgun Gothic"/>
                         </a:rPr>
-                        <a:t>통합 운영 모니터링 대시보드</a:t>
+                        <a:t>설계서+Skills로 Greenfield 재구현</a:t>
                       </a:r>
                     </a:p>
                   </a:txBody>
@@ -4542,7 +6548,7 @@
                           </a:solidFill>
                           <a:latin typeface="Malgun Gothic"/>
                         </a:rPr>
-                        <a:t>성격</a:t>
+                        <a:t>끝에</a:t>
                       </a:r>
                     </a:p>
                   </a:txBody>
@@ -4564,7 +6570,7 @@
                           </a:solidFill>
                           <a:latin typeface="Malgun Gothic"/>
                         </a:rPr>
-                        <a:t>장기 구현 → 오류/UX 루프 → Skills 작성</a:t>
+                        <a:t>Preflight·UX·Intake·Delivery 정착</a:t>
                       </a:r>
                     </a:p>
                   </a:txBody>
@@ -4586,7 +6592,7 @@
                           </a:solidFill>
                           <a:latin typeface="Malgun Gothic"/>
                         </a:rPr>
-                        <a:t>설계서+Skills만으로 Greenfield 재구현</a:t>
+                        <a:t>같은 규칙을 적용해 재현</a:t>
                       </a:r>
                     </a:p>
                   </a:txBody>
@@ -4610,7 +6616,7 @@
                           </a:solidFill>
                           <a:latin typeface="Malgun Gothic"/>
                         </a:rPr>
-                        <a:t>산출</a:t>
+                        <a:t>공정 Q</a:t>
                       </a:r>
                     </a:p>
                   </a:txBody>
@@ -4632,7 +6638,7 @@
                           </a:solidFill>
                           <a:latin typeface="Malgun Gothic"/>
                         </a:rPr>
-                        <a:t>Y_OPS_MONITOR_V2 + skills/rules</a:t>
+                        <a:t>≈63</a:t>
                       </a:r>
                     </a:p>
                   </a:txBody>
@@ -4654,7 +6660,7 @@
                           </a:solidFill>
                           <a:latin typeface="Malgun Gothic"/>
                         </a:rPr>
-                        <a:t>동일 프로그램 재생성 + scorecard</a:t>
+                        <a:t>≈16</a:t>
                       </a:r>
                     </a:p>
                   </a:txBody>
@@ -4678,7 +6684,7 @@
                           </a:solidFill>
                           <a:latin typeface="Malgun Gothic"/>
                         </a:rPr>
-                        <a:t>공정 Q</a:t>
+                        <a:t>E_compile</a:t>
                       </a:r>
                     </a:p>
                   </a:txBody>
@@ -4700,7 +6706,7 @@
                           </a:solidFill>
                           <a:latin typeface="Malgun Gothic"/>
                         </a:rPr>
-                        <a:t>≈63 (프로그램 관련)</a:t>
+                        <a:t>~18+</a:t>
                       </a:r>
                     </a:p>
                   </a:txBody>
@@ -4722,7 +6728,7 @@
                           </a:solidFill>
                           <a:latin typeface="Malgun Gothic"/>
                         </a:rPr>
-                        <a:t>≈16</a:t>
+                        <a:t>2</a:t>
                       </a:r>
                     </a:p>
                   </a:txBody>
@@ -4739,14 +6745,14 @@
       </p:graphicFrame>
       <p:sp>
         <p:nvSpPr>
-          <p:cNvPr id="6" name="TextBox 5"/>
+          <p:cNvPr id="7" name="TextBox 6"/>
           <p:cNvSpPr txBox="1"/>
           <p:nvPr/>
         </p:nvSpPr>
         <p:spPr>
           <a:xfrm>
-            <a:off x="640080" y="4754880"/>
-            <a:ext cx="10972800" cy="4572000"/>
+            <a:off x="594360" y="4663440"/>
+            <a:ext cx="10972800" cy="4754880"/>
           </a:xfrm>
           <a:prstGeom prst="rect">
             <a:avLst/>
@@ -4761,7 +6767,7 @@
           <a:p>
             <a:pPr>
               <a:spcAft>
-                <a:spcPts val="800"/>
+                <a:spcPts val="700"/>
               </a:spcAft>
             </a:pPr>
             <a:r>
@@ -4771,20 +6777,20 @@
                 </a:solidFill>
                 <a:latin typeface="Malgun Gothic"/>
               </a:rPr>
-              <a:t>인과: A의 실패 패턴을 Skill/Rule로 고착 → B에서 동일 설계서를 더 짧은 과정으로 재현</a:t>
-            </a:r>
-          </a:p>
-        </p:txBody>
-      </p:sp>
-      <p:sp>
-        <p:nvSpPr>
-          <p:cNvPr id="7" name="TextBox 6"/>
+              <a:t>맞음: A에서 겪은 오류·취향을 Skill로 고착하고, B에서 그걸로 다시 만든 구조</a:t>
+            </a:r>
+          </a:p>
+        </p:txBody>
+      </p:sp>
+      <p:sp>
+        <p:nvSpPr>
+          <p:cNvPr id="8" name="TextBox 7"/>
           <p:cNvSpPr txBox="1"/>
           <p:nvPr/>
         </p:nvSpPr>
         <p:spPr>
           <a:xfrm>
-            <a:off x="548640" y="6309360"/>
+            <a:off x="502920" y="6446520"/>
             <a:ext cx="10972800" cy="274320"/>
           </a:xfrm>
           <a:prstGeom prst="rect">
@@ -4805,7 +6811,7 @@
                 </a:solidFill>
                 <a:latin typeface="Malgun Gothic"/>
               </a:rPr>
-              <a:t>Cursor × ABAP Skills 실험  |  3/12</a:t>
+              <a:t>6 / 13</a:t>
             </a:r>
           </a:p>
         </p:txBody>
@@ -4818,7 +6824,7 @@
 </p:sld>
 </file>
 
-<file path=ppt/slides/slide4.xml><?xml version="1.0" encoding="utf-8"?>
+<file path=ppt/slides/slide7.xml><?xml version="1.0" encoding="utf-8"?>
 <p:sld xmlns:a="http://schemas.openxmlformats.org/drawingml/2006/main" xmlns:p="http://schemas.openxmlformats.org/presentationml/2006/main" xmlns:r="http://schemas.openxmlformats.org/officeDocument/2006/relationships">
   <p:cSld>
     <p:spTree>
@@ -4880,7 +6886,7 @@
         <p:spPr>
           <a:xfrm>
             <a:off x="0" y="0"/>
-            <a:ext cx="12191695" cy="640080"/>
+            <a:ext cx="12191695" cy="502920"/>
           </a:xfrm>
           <a:prstGeom prst="rect">
             <a:avLst/>
@@ -4922,8 +6928,8 @@
         </p:nvSpPr>
         <p:spPr>
           <a:xfrm>
-            <a:off x="548640" y="777240"/>
-            <a:ext cx="11155680" cy="640080"/>
+            <a:off x="502920" y="109728"/>
+            <a:ext cx="10972800" cy="320040"/>
           </a:xfrm>
           <a:prstGeom prst="rect">
             <a:avLst/>
@@ -4931,19 +6937,19 @@
           <a:noFill/>
         </p:spPr>
         <p:txBody>
-          <a:bodyPr wrap="square">
+          <a:bodyPr wrap="none">
             <a:spAutoFit/>
           </a:bodyPr>
           <a:lstStyle/>
           <a:p>
             <a:r>
-              <a:rPr sz="2800" b="1">
-                <a:solidFill>
-                  <a:srgbClr val="0B1F3A"/>
-                </a:solidFill>
-                <a:latin typeface="Malgun Gothic"/>
-              </a:rPr>
-              <a:t>2. Skills로 무엇을 고착했는가</a:t>
+              <a:rPr sz="1100" b="0">
+                <a:solidFill>
+                  <a:srgbClr val="FFFFFF"/>
+                </a:solidFill>
+                <a:latin typeface="Malgun Gothic"/>
+              </a:rPr>
+              <a:t>논의 정리  |  Cursor × ABAP Ops Monitor</a:t>
             </a:r>
           </a:p>
         </p:txBody>
@@ -4956,8 +6962,8 @@
         </p:nvSpPr>
         <p:spPr>
           <a:xfrm>
-            <a:off x="640080" y="1554480"/>
-            <a:ext cx="10972800" cy="4572000"/>
+            <a:off x="502920" y="685800"/>
+            <a:ext cx="11155680" cy="548640"/>
           </a:xfrm>
           <a:prstGeom prst="rect">
             <a:avLst/>
@@ -4965,88 +6971,19 @@
           <a:noFill/>
         </p:spPr>
         <p:txBody>
-          <a:bodyPr wrap="square">
+          <a:bodyPr wrap="none">
             <a:spAutoFit/>
           </a:bodyPr>
           <a:lstStyle/>
           <a:p>
-            <a:pPr>
-              <a:spcAft>
-                <a:spcPts val="800"/>
-              </a:spcAft>
-            </a:pPr>
-            <a:r>
-              <a:rPr sz="1500" b="0">
-                <a:solidFill>
-                  <a:srgbClr val="1A1A1A"/>
-                </a:solidFill>
-                <a:latin typeface="Malgun Gothic"/>
-              </a:rPr>
-              <a:t>Always-on Rules: 읽기전용 불변 · SE38 붙여넣기 · 선언+구현 동시</a:t>
-            </a:r>
-          </a:p>
-          <a:p>
-            <a:pPr>
-              <a:spcAft>
-                <a:spcPts val="800"/>
-              </a:spcAft>
-            </a:pPr>
-            <a:r>
-              <a:rPr sz="1500" b="0">
-                <a:solidFill>
-                  <a:srgbClr val="1A1A1A"/>
-                </a:solidFill>
-                <a:latin typeface="Malgun Gothic"/>
-              </a:rPr>
-              <a:t>abap-activation-preflight: 세션 실패 → P1~P10 정적 점검 (선언누락, ECC fcode, CSS {}, 타입…)</a:t>
-            </a:r>
-          </a:p>
-          <a:p>
-            <a:pPr>
-              <a:spcAft>
-                <a:spcPts val="800"/>
-              </a:spcAft>
-            </a:pPr>
-            <a:r>
-              <a:rPr sz="1500" b="0">
-                <a:solidFill>
-                  <a:srgbClr val="1A1A1A"/>
-                </a:solidFill>
-                <a:latin typeface="Malgun Gothic"/>
-              </a:rPr>
-              <a:t>abap-ops-monitor-ux: HTML 차트/STATS·HELP · 영역색 · ALV 최소 툴바</a:t>
-            </a:r>
-          </a:p>
-          <a:p>
-            <a:pPr>
-              <a:spcAft>
-                <a:spcPts val="800"/>
-              </a:spcAft>
-            </a:pPr>
-            <a:r>
-              <a:rPr sz="1500" b="0">
-                <a:solidFill>
-                  <a:srgbClr val="1A1A1A"/>
-                </a:solidFill>
-                <a:latin typeface="Malgun Gothic"/>
-              </a:rPr>
-              <a:t>abap-requirement-intake: 모호한 UX 요청을 ≤8 선택지로 한 번 계약</a:t>
-            </a:r>
-          </a:p>
-          <a:p>
-            <a:pPr>
-              <a:spcAft>
-                <a:spcPts val="800"/>
-              </a:spcAft>
-            </a:pPr>
-            <a:r>
-              <a:rPr sz="1500" b="0">
-                <a:solidFill>
-                  <a:srgbClr val="1A1A1A"/>
-                </a:solidFill>
-                <a:latin typeface="Malgun Gothic"/>
-              </a:rPr>
-              <a:t>가이드/템플릿: 최소 프롬프트 · Replay 테스트 · Parity 채점표</a:t>
+            <a:r>
+              <a:rPr sz="2600" b="1">
+                <a:solidFill>
+                  <a:srgbClr val="0B1F3A"/>
+                </a:solidFill>
+                <a:latin typeface="Malgun Gothic"/>
+              </a:rPr>
+              <a:t>③ 구체적으로 추가된 것</a:t>
             </a:r>
           </a:p>
         </p:txBody>
@@ -5059,8 +6996,8 @@
         </p:nvSpPr>
         <p:spPr>
           <a:xfrm>
-            <a:off x="548640" y="6309360"/>
-            <a:ext cx="10972800" cy="274320"/>
+            <a:off x="594360" y="1371600"/>
+            <a:ext cx="10972800" cy="4754880"/>
           </a:xfrm>
           <a:prstGeom prst="rect">
             <a:avLst/>
@@ -5068,6 +7005,125 @@
           <a:noFill/>
         </p:spPr>
         <p:txBody>
+          <a:bodyPr wrap="square">
+            <a:spAutoFit/>
+          </a:bodyPr>
+          <a:lstStyle/>
+          <a:p>
+            <a:pPr>
+              <a:spcAft>
+                <a:spcPts val="700"/>
+              </a:spcAft>
+            </a:pPr>
+            <a:r>
+              <a:rPr sz="1500" b="0">
+                <a:solidFill>
+                  <a:srgbClr val="1A1A1A"/>
+                </a:solidFill>
+                <a:latin typeface="Malgun Gothic"/>
+              </a:rPr>
+              <a:t>Rules: 읽기전용 · SE38 붙여넣기 · 선언부+구현 동시</a:t>
+            </a:r>
+          </a:p>
+          <a:p>
+            <a:pPr>
+              <a:spcAft>
+                <a:spcPts val="700"/>
+              </a:spcAft>
+            </a:pPr>
+            <a:r>
+              <a:rPr sz="1500" b="0">
+                <a:solidFill>
+                  <a:srgbClr val="1A1A1A"/>
+                </a:solidFill>
+                <a:latin typeface="Malgun Gothic"/>
+              </a:rPr>
+              <a:t>Preflight P1~P10: 선언 누락, ECC fcode, IGS 추측 금지, CSS {}, 타입…</a:t>
+            </a:r>
+          </a:p>
+          <a:p>
+            <a:pPr>
+              <a:spcAft>
+                <a:spcPts val="700"/>
+              </a:spcAft>
+            </a:pPr>
+            <a:r>
+              <a:rPr sz="1500" b="0">
+                <a:solidFill>
+                  <a:srgbClr val="1A1A1A"/>
+                </a:solidFill>
+                <a:latin typeface="Malgun Gothic"/>
+              </a:rPr>
+              <a:t>Ops Monitor UX: HTML 차트/팝업, 영역색, ALV 최소 툴바</a:t>
+            </a:r>
+          </a:p>
+          <a:p>
+            <a:pPr>
+              <a:spcAft>
+                <a:spcPts val="700"/>
+              </a:spcAft>
+            </a:pPr>
+            <a:r>
+              <a:rPr sz="1500" b="0">
+                <a:solidFill>
+                  <a:srgbClr val="1A1A1A"/>
+                </a:solidFill>
+                <a:latin typeface="Malgun Gothic"/>
+              </a:rPr>
+              <a:t>Intake: 모호한 ‘있어보이게’를 ≤8 선택지로 한 번 계약</a:t>
+            </a:r>
+          </a:p>
+          <a:p>
+            <a:pPr>
+              <a:spcAft>
+                <a:spcPts val="700"/>
+              </a:spcAft>
+            </a:pPr>
+            <a:r>
+              <a:rPr sz="1500" b="0">
+                <a:solidFill>
+                  <a:srgbClr val="1A1A1A"/>
+                </a:solidFill>
+                <a:latin typeface="Malgun Gothic"/>
+              </a:rPr>
+              <a:t>B에서 줄어든 것: IGS API 루프, MC_FC_*, LS-DATUM 장루프, MESSAGE 팝업 탐색 등</a:t>
+            </a:r>
+          </a:p>
+          <a:p>
+            <a:pPr>
+              <a:spcAft>
+                <a:spcPts val="700"/>
+              </a:spcAft>
+            </a:pPr>
+            <a:r>
+              <a:rPr sz="1500" b="0">
+                <a:solidFill>
+                  <a:srgbClr val="1A1A1A"/>
+                </a:solidFill>
+                <a:latin typeface="Malgun Gothic"/>
+              </a:rPr>
+              <a:t>B에도 남은 것: MANDT/WRITE, 부분 붙여넣기 잔재, Dynpro 수작업, 팝업X, ST22 공백…</a:t>
+            </a:r>
+          </a:p>
+        </p:txBody>
+      </p:sp>
+      <p:sp>
+        <p:nvSpPr>
+          <p:cNvPr id="7" name="TextBox 6"/>
+          <p:cNvSpPr txBox="1"/>
+          <p:nvPr/>
+        </p:nvSpPr>
+        <p:spPr>
+          <a:xfrm>
+            <a:off x="502920" y="6446520"/>
+            <a:ext cx="10972800" cy="274320"/>
+          </a:xfrm>
+          <a:prstGeom prst="rect">
+            <a:avLst/>
+          </a:prstGeom>
+          <a:noFill/>
+        </p:spPr>
+        <p:txBody>
           <a:bodyPr wrap="none">
             <a:spAutoFit/>
           </a:bodyPr>
@@ -5080,7 +7136,7 @@
                 </a:solidFill>
                 <a:latin typeface="Malgun Gothic"/>
               </a:rPr>
-              <a:t>Cursor × ABAP Skills 실험  |  4/12</a:t>
+              <a:t>7 / 13</a:t>
             </a:r>
           </a:p>
         </p:txBody>
@@ -5093,7 +7149,7 @@
 </p:sld>
 </file>
 
-<file path=ppt/slides/slide5.xml><?xml version="1.0" encoding="utf-8"?>
+<file path=ppt/slides/slide8.xml><?xml version="1.0" encoding="utf-8"?>
 <p:sld xmlns:a="http://schemas.openxmlformats.org/drawingml/2006/main" xmlns:p="http://schemas.openxmlformats.org/presentationml/2006/main" xmlns:r="http://schemas.openxmlformats.org/officeDocument/2006/relationships">
   <p:cSld>
     <p:spTree>
@@ -5155,7 +7211,7 @@
         <p:spPr>
           <a:xfrm>
             <a:off x="0" y="0"/>
-            <a:ext cx="12191695" cy="640080"/>
+            <a:ext cx="12191695" cy="502920"/>
           </a:xfrm>
           <a:prstGeom prst="rect">
             <a:avLst/>
@@ -5197,8 +7253,8 @@
         </p:nvSpPr>
         <p:spPr>
           <a:xfrm>
-            <a:off x="548640" y="777240"/>
-            <a:ext cx="11155680" cy="640080"/>
+            <a:off x="502920" y="109728"/>
+            <a:ext cx="10972800" cy="320040"/>
           </a:xfrm>
           <a:prstGeom prst="rect">
             <a:avLst/>
@@ -5206,19 +7262,19 @@
           <a:noFill/>
         </p:spPr>
         <p:txBody>
-          <a:bodyPr wrap="square">
+          <a:bodyPr wrap="none">
             <a:spAutoFit/>
           </a:bodyPr>
           <a:lstStyle/>
           <a:p>
             <a:r>
-              <a:rPr sz="2800" b="1">
-                <a:solidFill>
-                  <a:srgbClr val="0B1F3A"/>
-                </a:solidFill>
-                <a:latin typeface="Malgun Gothic"/>
-              </a:rPr>
-              <a:t>3. ‘만족할 때까지 질문 수’만으로는 객관적이지 않음</a:t>
+              <a:rPr sz="1100" b="0">
+                <a:solidFill>
+                  <a:srgbClr val="FFFFFF"/>
+                </a:solidFill>
+                <a:latin typeface="Malgun Gothic"/>
+              </a:rPr>
+              <a:t>논의 정리  |  Cursor × ABAP Ops Monitor</a:t>
             </a:r>
           </a:p>
         </p:txBody>
@@ -5231,8 +7287,8 @@
         </p:nvSpPr>
         <p:spPr>
           <a:xfrm>
-            <a:off x="640080" y="1554480"/>
-            <a:ext cx="10972800" cy="4572000"/>
+            <a:off x="502920" y="685800"/>
+            <a:ext cx="11155680" cy="548640"/>
           </a:xfrm>
           <a:prstGeom prst="rect">
             <a:avLst/>
@@ -5240,88 +7296,19 @@
           <a:noFill/>
         </p:spPr>
         <p:txBody>
-          <a:bodyPr wrap="square">
+          <a:bodyPr wrap="none">
             <a:spAutoFit/>
           </a:bodyPr>
           <a:lstStyle/>
           <a:p>
-            <a:pPr>
-              <a:spcAft>
-                <a:spcPts val="800"/>
-              </a:spcAft>
-            </a:pPr>
-            <a:r>
-              <a:rPr sz="1500" b="0">
-                <a:solidFill>
-                  <a:srgbClr val="1A1A1A"/>
-                </a:solidFill>
-                <a:latin typeface="Malgun Gothic"/>
-              </a:rPr>
-              <a:t>문제: 사용자가 그만둔 시점이 곧 ‘품질 달성’이 됨 → 채점 기준이 주관적</a:t>
-            </a:r>
-          </a:p>
-          <a:p>
-            <a:pPr>
-              <a:spcAft>
-                <a:spcPts val="800"/>
-              </a:spcAft>
-            </a:pPr>
-            <a:r>
-              <a:rPr sz="1500" b="0">
-                <a:solidFill>
-                  <a:srgbClr val="1A1A1A"/>
-                </a:solidFill>
-                <a:latin typeface="Malgun Gothic"/>
-              </a:rPr>
-              <a:t>해결: 품질(Parity)과 과정(질문·오류 수)을 분리 측정</a:t>
-            </a:r>
-          </a:p>
-          <a:p>
-            <a:pPr>
-              <a:spcAft>
-                <a:spcPts val="800"/>
-              </a:spcAft>
-            </a:pPr>
-            <a:r>
-              <a:rPr sz="1500" b="0">
-                <a:solidFill>
-                  <a:srgbClr val="1A1A1A"/>
-                </a:solidFill>
-                <a:latin typeface="Malgun Gothic"/>
-              </a:rPr>
-              <a:t>품질 = 동일 설계서 대비 채점표 점수 (만점 56)</a:t>
-            </a:r>
-          </a:p>
-          <a:p>
-            <a:pPr>
-              <a:spcAft>
-                <a:spcPts val="800"/>
-              </a:spcAft>
-            </a:pPr>
-            <a:r>
-              <a:rPr sz="1500" b="0">
-                <a:solidFill>
-                  <a:srgbClr val="1A1A1A"/>
-                </a:solidFill>
-                <a:latin typeface="Malgun Gothic"/>
-              </a:rPr>
-              <a:t>과정 = cum_Q_program / E_compile / E_runtime (효율 지표)</a:t>
-            </a:r>
-          </a:p>
-          <a:p>
-            <a:pPr>
-              <a:spcAft>
-                <a:spcPts val="800"/>
-              </a:spcAft>
-            </a:pPr>
-            <a:r>
-              <a:rPr sz="1500" b="0">
-                <a:solidFill>
-                  <a:srgbClr val="1A1A1A"/>
-                </a:solidFill>
-                <a:latin typeface="Malgun Gothic"/>
-              </a:rPr>
-              <a:t>DoD(완료정의)도 내부 체크리스트일 뿐, 외부 공인 지표가 아님 → Parity로 대체·보완</a:t>
+            <a:r>
+              <a:rPr sz="2600" b="1">
+                <a:solidFill>
+                  <a:srgbClr val="0B1F3A"/>
+                </a:solidFill>
+                <a:latin typeface="Malgun Gothic"/>
+              </a:rPr>
+              <a:t>④ 객관성 문제</a:t>
             </a:r>
           </a:p>
         </p:txBody>
@@ -5334,8 +7321,8 @@
         </p:nvSpPr>
         <p:spPr>
           <a:xfrm>
-            <a:off x="548640" y="6309360"/>
-            <a:ext cx="10972800" cy="274320"/>
+            <a:off x="594360" y="1371600"/>
+            <a:ext cx="10972800" cy="4754880"/>
           </a:xfrm>
           <a:prstGeom prst="rect">
             <a:avLst/>
@@ -5343,6 +7330,109 @@
           <a:noFill/>
         </p:spPr>
         <p:txBody>
+          <a:bodyPr wrap="square">
+            <a:spAutoFit/>
+          </a:bodyPr>
+          <a:lstStyle/>
+          <a:p>
+            <a:pPr>
+              <a:spcAft>
+                <a:spcPts val="700"/>
+              </a:spcAft>
+            </a:pPr>
+            <a:r>
+              <a:rPr sz="1600" b="0">
+                <a:solidFill>
+                  <a:srgbClr val="1A1A1A"/>
+                </a:solidFill>
+                <a:latin typeface="Malgun Gothic"/>
+              </a:rPr>
+              <a:t>기존: 사용자가 만족하면 중단하고 질문 개수만 셈 → 주관적</a:t>
+            </a:r>
+          </a:p>
+          <a:p>
+            <a:pPr>
+              <a:spcAft>
+                <a:spcPts val="700"/>
+              </a:spcAft>
+            </a:pPr>
+            <a:r>
+              <a:rPr sz="1600" b="0">
+                <a:solidFill>
+                  <a:srgbClr val="1A1A1A"/>
+                </a:solidFill>
+                <a:latin typeface="Malgun Gothic"/>
+              </a:rPr>
+              <a:t>DoD도 ‘우리가 만든 내부 체크리스트’이지 외부 공인 지표가 아님</a:t>
+            </a:r>
+          </a:p>
+          <a:p>
+            <a:pPr>
+              <a:spcAft>
+                <a:spcPts val="700"/>
+              </a:spcAft>
+            </a:pPr>
+            <a:r>
+              <a:rPr sz="1600" b="0">
+                <a:solidFill>
+                  <a:srgbClr val="1A1A1A"/>
+                </a:solidFill>
+                <a:latin typeface="Malgun Gothic"/>
+              </a:rPr>
+              <a:t>그래서: 품질(Parity)과 과정(질문·오류 수)을 분리하자고 정리</a:t>
+            </a:r>
+          </a:p>
+          <a:p>
+            <a:pPr>
+              <a:spcAft>
+                <a:spcPts val="700"/>
+              </a:spcAft>
+            </a:pPr>
+            <a:r>
+              <a:rPr sz="1600" b="0">
+                <a:solidFill>
+                  <a:srgbClr val="1A1A1A"/>
+                </a:solidFill>
+                <a:latin typeface="Malgun Gothic"/>
+              </a:rPr>
+              <a:t>품질 = 동일 설계서 대비 채점표 점수</a:t>
+            </a:r>
+          </a:p>
+          <a:p>
+            <a:pPr>
+              <a:spcAft>
+                <a:spcPts val="700"/>
+              </a:spcAft>
+            </a:pPr>
+            <a:r>
+              <a:rPr sz="1600" b="0">
+                <a:solidFill>
+                  <a:srgbClr val="1A1A1A"/>
+                </a:solidFill>
+                <a:latin typeface="Malgun Gothic"/>
+              </a:rPr>
+              <a:t>과정 = 그 점수에 도달하는 데 든 질문·오류 횟수</a:t>
+            </a:r>
+          </a:p>
+        </p:txBody>
+      </p:sp>
+      <p:sp>
+        <p:nvSpPr>
+          <p:cNvPr id="7" name="TextBox 6"/>
+          <p:cNvSpPr txBox="1"/>
+          <p:nvPr/>
+        </p:nvSpPr>
+        <p:spPr>
+          <a:xfrm>
+            <a:off x="502920" y="6446520"/>
+            <a:ext cx="10972800" cy="274320"/>
+          </a:xfrm>
+          <a:prstGeom prst="rect">
+            <a:avLst/>
+          </a:prstGeom>
+          <a:noFill/>
+        </p:spPr>
+        <p:txBody>
           <a:bodyPr wrap="none">
             <a:spAutoFit/>
           </a:bodyPr>
@@ -5355,7 +7445,7 @@
                 </a:solidFill>
                 <a:latin typeface="Malgun Gothic"/>
               </a:rPr>
-              <a:t>Cursor × ABAP Skills 실험  |  5/12</a:t>
+              <a:t>8 / 13</a:t>
             </a:r>
           </a:p>
         </p:txBody>
@@ -5368,7 +7458,7 @@
 </p:sld>
 </file>
 
-<file path=ppt/slides/slide6.xml><?xml version="1.0" encoding="utf-8"?>
+<file path=ppt/slides/slide9.xml><?xml version="1.0" encoding="utf-8"?>
 <p:sld xmlns:a="http://schemas.openxmlformats.org/drawingml/2006/main" xmlns:p="http://schemas.openxmlformats.org/presentationml/2006/main" xmlns:r="http://schemas.openxmlformats.org/officeDocument/2006/relationships">
   <p:cSld>
     <p:spTree>
@@ -5430,7 +7520,7 @@
         <p:spPr>
           <a:xfrm>
             <a:off x="0" y="0"/>
-            <a:ext cx="12191695" cy="640080"/>
+            <a:ext cx="12191695" cy="502920"/>
           </a:xfrm>
           <a:prstGeom prst="rect">
             <a:avLst/>
@@ -5472,8 +7562,8 @@
         </p:nvSpPr>
         <p:spPr>
           <a:xfrm>
-            <a:off x="548640" y="777240"/>
-            <a:ext cx="11155680" cy="640080"/>
+            <a:off x="502920" y="109728"/>
+            <a:ext cx="10972800" cy="320040"/>
           </a:xfrm>
           <a:prstGeom prst="rect">
             <a:avLst/>
@@ -5481,34 +7571,68 @@
           <a:noFill/>
         </p:spPr>
         <p:txBody>
-          <a:bodyPr wrap="square">
+          <a:bodyPr wrap="none">
             <a:spAutoFit/>
           </a:bodyPr>
           <a:lstStyle/>
           <a:p>
             <a:r>
-              <a:rPr sz="2800" b="1">
+              <a:rPr sz="1100" b="0">
+                <a:solidFill>
+                  <a:srgbClr val="FFFFFF"/>
+                </a:solidFill>
+                <a:latin typeface="Malgun Gothic"/>
+              </a:rPr>
+              <a:t>논의 정리  |  Cursor × ABAP Ops Monitor</a:t>
+            </a:r>
+          </a:p>
+        </p:txBody>
+      </p:sp>
+      <p:sp>
+        <p:nvSpPr>
+          <p:cNvPr id="5" name="TextBox 4"/>
+          <p:cNvSpPr txBox="1"/>
+          <p:nvPr/>
+        </p:nvSpPr>
+        <p:spPr>
+          <a:xfrm>
+            <a:off x="502920" y="685800"/>
+            <a:ext cx="11155680" cy="548640"/>
+          </a:xfrm>
+          <a:prstGeom prst="rect">
+            <a:avLst/>
+          </a:prstGeom>
+          <a:noFill/>
+        </p:spPr>
+        <p:txBody>
+          <a:bodyPr wrap="none">
+            <a:spAutoFit/>
+          </a:bodyPr>
+          <a:lstStyle/>
+          <a:p>
+            <a:r>
+              <a:rPr sz="2600" b="1">
                 <a:solidFill>
                   <a:srgbClr val="0B1F3A"/>
                 </a:solidFill>
                 <a:latin typeface="Malgun Gothic"/>
               </a:rPr>
-              <a:t>4. Parity 채점표 (56점) + Hard Gate</a:t>
+              <a:t>⑤ Parity 채점표로 다시 잼</a:t>
             </a:r>
           </a:p>
         </p:txBody>
       </p:sp>
       <p:graphicFrame>
         <p:nvGraphicFramePr>
-          <p:cNvPr id="5" name="Table 4"/>
+          <p:cNvPr id="6" name="Table 5"/>
           <p:cNvGraphicFramePr>
             <a:graphicFrameLocks noGrp="1"/>
           </p:cNvGraphicFramePr>
           <p:nvPr/>
         </p:nvGraphicFramePr>
         <p:xfrm>
-          <a:off x="548640" y="1463040"/>
-          <a:ext cx="11064240" cy="2377440"/>
+          <a:off x="548640" y="1371600"/>
+          <a:ext cx="5943600" cy="3200400"/>
         </p:xfrm>
         <a:graphic>
           <a:graphicData uri="http://schemas.openxmlformats.org/drawingml/2006/table">
@@ -5517,11 +7641,10 @@
                 <a:tableStyleId>{5C22544A-7EE6-4342-B048-85BDC9FD1C3A}</a:tableStyleId>
               </a:tblPr>
               <a:tblGrid>
+                <a:gridCol w="3657600"/>
                 <a:gridCol w="2286000"/>
-                <a:gridCol w="1097280"/>
-                <a:gridCol w="7680960"/>
               </a:tblGrid>
-              <a:tr h="475488">
+              <a:tr h="533400">
                 <a:tc>
                   <a:txBody>
                     <a:bodyPr/>
@@ -5566,30 +7689,8 @@
                     </a:solidFill>
                   </a:tcPr>
                 </a:tc>
-                <a:tc>
-                  <a:txBody>
-                    <a:bodyPr/>
-                    <a:lstStyle/>
-                    <a:p>
-                      <a:r>
-                        <a:rPr sz="1200" b="1">
-                          <a:solidFill>
-                            <a:srgbClr val="FFFFFF"/>
-                          </a:solidFill>
-                          <a:latin typeface="Malgun Gothic"/>
-                        </a:rPr>
-                        <a:t>내용</a:t>
-                      </a:r>
-                    </a:p>
-                  </a:txBody>
-                  <a:tcPr>
-                    <a:solidFill>
-                      <a:srgbClr val="0B1F3A"/>
-                    </a:solidFill>
-                  </a:tcPr>
-                </a:tc>
               </a:tr>
-              <a:tr h="475488">
+              <a:tr h="533400">
                 <a:tc>
                   <a:txBody>
                     <a:bodyPr/>
@@ -5602,7 +7703,7 @@
                           </a:solidFill>
                           <a:latin typeface="Malgun Gothic"/>
                         </a:rPr>
-                        <a:t>S1 기능</a:t>
+                        <a:t>S1 기능 (FR)</a:t>
                       </a:r>
                     </a:p>
                   </a:txBody>
@@ -5634,6 +7735,8 @@
                     </a:solidFill>
                   </a:tcPr>
                 </a:tc>
+              </a:tr>
+              <a:tr h="533400">
                 <a:tc>
                   <a:txBody>
                     <a:bodyPr/>
@@ -5646,31 +7749,7 @@
                           </a:solidFill>
                           <a:latin typeface="Malgun Gothic"/>
                         </a:rPr>
-                        <a:t>FR: 3영역 조회·대시보드·기간·On/Off·드릴다운·권한…</a:t>
-                      </a:r>
-                    </a:p>
-                  </a:txBody>
-                  <a:tcPr>
-                    <a:solidFill>
-                      <a:srgbClr val="FFFFFF"/>
-                    </a:solidFill>
-                  </a:tcPr>
-                </a:tc>
-              </a:tr>
-              <a:tr h="475488">
-                <a:tc>
-                  <a:txBody>
-                    <a:bodyPr/>
-                    <a:lstStyle/>
-                    <a:p>
-                      <a:r>
-                        <a:rPr sz="1100" b="0">
-                          <a:solidFill>
-                            <a:srgbClr val="1A1A1A"/>
-                          </a:solidFill>
-                          <a:latin typeface="Malgun Gothic"/>
-                        </a:rPr>
-                        <a:t>S2 안전</a:t>
+                        <a:t>S2 안전·활성화</a:t>
                       </a:r>
                     </a:p>
                   </a:txBody>
@@ -5702,30 +7781,8 @@
                     </a:solidFill>
                   </a:tcPr>
                 </a:tc>
-                <a:tc>
-                  <a:txBody>
-                    <a:bodyPr/>
-                    <a:lstStyle/>
-                    <a:p>
-                      <a:r>
-                        <a:rPr sz="1100" b="0">
-                          <a:solidFill>
-                            <a:srgbClr val="1A1A1A"/>
-                          </a:solidFill>
-                          <a:latin typeface="Malgun Gothic"/>
-                        </a:rPr>
-                        <a:t>읽기전용·표준오브젝트·모듈화·활성화</a:t>
-                      </a:r>
-                    </a:p>
-                  </a:txBody>
-                  <a:tcPr>
-                    <a:solidFill>
-                      <a:srgbClr val="E8EEF3"/>
-                    </a:solidFill>
-                  </a:tcPr>
-                </a:tc>
               </a:tr>
-              <a:tr h="475488">
+              <a:tr h="533400">
                 <a:tc>
                   <a:txBody>
                     <a:bodyPr/>
@@ -5770,6 +7827,8 @@
                     </a:solidFill>
                   </a:tcPr>
                 </a:tc>
+              </a:tr>
+              <a:tr h="533400">
                 <a:tc>
                   <a:txBody>
                     <a:bodyPr/>
@@ -5782,31 +7841,7 @@
                           </a:solidFill>
                           <a:latin typeface="Malgun Gothic"/>
                         </a:rPr>
-                        <a:t>HTML차트·영역색·스케일·STATS/HELP·ALV툴바</a:t>
-                      </a:r>
-                    </a:p>
-                  </a:txBody>
-                  <a:tcPr>
-                    <a:solidFill>
-                      <a:srgbClr val="FFFFFF"/>
-                    </a:solidFill>
-                  </a:tcPr>
-                </a:tc>
-              </a:tr>
-              <a:tr h="475488">
-                <a:tc>
-                  <a:txBody>
-                    <a:bodyPr/>
-                    <a:lstStyle/>
-                    <a:p>
-                      <a:r>
-                        <a:rPr sz="1100" b="0">
-                          <a:solidFill>
-                            <a:srgbClr val="1A1A1A"/>
-                          </a:solidFill>
-                          <a:latin typeface="Malgun Gothic"/>
-                        </a:rPr>
-                        <a:t>S4 전달</a:t>
+                        <a:t>S4 전달·가이드</a:t>
                       </a:r>
                     </a:p>
                   </a:txBody>
@@ -5838,6 +7873,8 @@
                     </a:solidFill>
                   </a:tcPr>
                 </a:tc>
+              </a:tr>
+              <a:tr h="533400">
                 <a:tc>
                   <a:txBody>
                     <a:bodyPr/>
@@ -5850,369 +7887,7 @@
                           </a:solidFill>
                           <a:latin typeface="Malgun Gothic"/>
                         </a:rPr>
-                        <a:t>붙여넣기 소스·Dynpro가이드·선언완비·Selection texts</a:t>
-                      </a:r>
-                    </a:p>
-                  </a:txBody>
-                  <a:tcPr>
-                    <a:solidFill>
-                      <a:srgbClr val="E8EEF3"/>
-                    </a:solidFill>
-                  </a:tcPr>
-                </a:tc>
-              </a:tr>
-            </a:tbl>
-          </a:graphicData>
-        </a:graphic>
-      </p:graphicFrame>
-      <p:sp>
-        <p:nvSpPr>
-          <p:cNvPr id="6" name="TextBox 5"/>
-          <p:cNvSpPr txBox="1"/>
-          <p:nvPr/>
-        </p:nvSpPr>
-        <p:spPr>
-          <a:xfrm>
-            <a:off x="640080" y="4114800"/>
-            <a:ext cx="10972800" cy="4572000"/>
-          </a:xfrm>
-          <a:prstGeom prst="rect">
-            <a:avLst/>
-          </a:prstGeom>
-          <a:noFill/>
-        </p:spPr>
-        <p:txBody>
-          <a:bodyPr wrap="square">
-            <a:spAutoFit/>
-          </a:bodyPr>
-          <a:lstStyle/>
-          <a:p>
-            <a:pPr>
-              <a:spcAft>
-                <a:spcPts val="800"/>
-              </a:spcAft>
-            </a:pPr>
-            <a:r>
-              <a:rPr sz="1400" b="0">
-                <a:solidFill>
-                  <a:srgbClr val="1A1A1A"/>
-                </a:solidFill>
-                <a:latin typeface="Malgun Gothic"/>
-              </a:rPr>
-              <a:t>PASS = Total≥50 AND 차단 결함 0건 AND 활성화 성공(S2-06=2)</a:t>
-            </a:r>
-          </a:p>
-          <a:p>
-            <a:pPr>
-              <a:spcAft>
-                <a:spcPts val="800"/>
-              </a:spcAft>
-            </a:pPr>
-            <a:r>
-              <a:rPr sz="1400" b="0">
-                <a:solidFill>
-                  <a:srgbClr val="1A1A1A"/>
-                </a:solidFill>
-                <a:latin typeface="Malgun Gothic"/>
-              </a:rPr>
-              <a:t>차단 예: 문법 오류, 빈 화면, 팝업 X 불능, 필수 영역 조회 버그, 드릴다운 불능</a:t>
-            </a:r>
-          </a:p>
-          <a:p>
-            <a:pPr>
-              <a:spcAft>
-                <a:spcPts val="800"/>
-              </a:spcAft>
-            </a:pPr>
-            <a:r>
-              <a:rPr sz="1400" b="0">
-                <a:solidFill>
-                  <a:srgbClr val="1A1A1A"/>
-                </a:solidFill>
-                <a:latin typeface="Malgun Gothic"/>
-              </a:rPr>
-              <a:t>코드만 있고 미실기 → Total 상한 40 (코드 ≠ 동작)</a:t>
-            </a:r>
-          </a:p>
-        </p:txBody>
-      </p:sp>
-      <p:sp>
-        <p:nvSpPr>
-          <p:cNvPr id="7" name="TextBox 6"/>
-          <p:cNvSpPr txBox="1"/>
-          <p:nvPr/>
-        </p:nvSpPr>
-        <p:spPr>
-          <a:xfrm>
-            <a:off x="548640" y="6309360"/>
-            <a:ext cx="10972800" cy="274320"/>
-          </a:xfrm>
-          <a:prstGeom prst="rect">
-            <a:avLst/>
-          </a:prstGeom>
-          <a:noFill/>
-        </p:spPr>
-        <p:txBody>
-          <a:bodyPr wrap="none">
-            <a:spAutoFit/>
-          </a:bodyPr>
-          <a:lstStyle/>
-          <a:p>
-            <a:r>
-              <a:rPr sz="1000" b="0">
-                <a:solidFill>
-                  <a:srgbClr val="5A5A5A"/>
-                </a:solidFill>
-                <a:latin typeface="Malgun Gothic"/>
-              </a:rPr>
-              <a:t>Cursor × ABAP Skills 실험  |  6/12</a:t>
-            </a:r>
-          </a:p>
-        </p:txBody>
-      </p:sp>
-    </p:spTree>
-  </p:cSld>
-  <p:clrMapOvr>
-    <a:masterClrMapping/>
-  </p:clrMapOvr>
-</p:sld>
-</file>
-
-<file path=ppt/slides/slide7.xml><?xml version="1.0" encoding="utf-8"?>
-<p:sld xmlns:a="http://schemas.openxmlformats.org/drawingml/2006/main" xmlns:p="http://schemas.openxmlformats.org/presentationml/2006/main" xmlns:r="http://schemas.openxmlformats.org/officeDocument/2006/relationships">
-  <p:cSld>
-    <p:spTree>
-      <p:nvGrpSpPr>
-        <p:cNvPr id="1" name=""/>
-        <p:cNvGrpSpPr/>
-        <p:nvPr/>
-      </p:nvGrpSpPr>
-      <p:grpSpPr/>
-      <p:sp>
-        <p:nvSpPr>
-          <p:cNvPr id="2" name="Rectangle 1"/>
-          <p:cNvSpPr/>
-          <p:nvPr/>
-        </p:nvSpPr>
-        <p:spPr>
-          <a:xfrm>
-            <a:off x="0" y="0"/>
-            <a:ext cx="12191695" cy="6858000"/>
-          </a:xfrm>
-          <a:prstGeom prst="rect">
-            <a:avLst/>
-          </a:prstGeom>
-          <a:solidFill>
-            <a:srgbClr val="F2F5F8"/>
-          </a:solidFill>
-          <a:ln>
-            <a:noFill/>
-          </a:ln>
-        </p:spPr>
-        <p:style>
-          <a:lnRef idx="1">
-            <a:schemeClr val="accent1"/>
-          </a:lnRef>
-          <a:fillRef idx="3">
-            <a:schemeClr val="accent1"/>
-          </a:fillRef>
-          <a:effectRef idx="2">
-            <a:schemeClr val="accent1"/>
-          </a:effectRef>
-          <a:fontRef idx="minor">
-            <a:schemeClr val="lt1"/>
-          </a:fontRef>
-        </p:style>
-        <p:txBody>
-          <a:bodyPr rtlCol="0" anchor="ctr"/>
-          <a:lstStyle/>
-          <a:p>
-            <a:pPr algn="ctr"/>
-          </a:p>
-        </p:txBody>
-      </p:sp>
-      <p:sp>
-        <p:nvSpPr>
-          <p:cNvPr id="3" name="Rectangle 2"/>
-          <p:cNvSpPr/>
-          <p:nvPr/>
-        </p:nvSpPr>
-        <p:spPr>
-          <a:xfrm>
-            <a:off x="0" y="0"/>
-            <a:ext cx="12191695" cy="640080"/>
-          </a:xfrm>
-          <a:prstGeom prst="rect">
-            <a:avLst/>
-          </a:prstGeom>
-          <a:solidFill>
-            <a:srgbClr val="0B1F3A"/>
-          </a:solidFill>
-          <a:ln>
-            <a:noFill/>
-          </a:ln>
-        </p:spPr>
-        <p:style>
-          <a:lnRef idx="1">
-            <a:schemeClr val="accent1"/>
-          </a:lnRef>
-          <a:fillRef idx="3">
-            <a:schemeClr val="accent1"/>
-          </a:fillRef>
-          <a:effectRef idx="2">
-            <a:schemeClr val="accent1"/>
-          </a:effectRef>
-          <a:fontRef idx="minor">
-            <a:schemeClr val="lt1"/>
-          </a:fontRef>
-        </p:style>
-        <p:txBody>
-          <a:bodyPr rtlCol="0" anchor="ctr"/>
-          <a:lstStyle/>
-          <a:p>
-            <a:pPr algn="ctr"/>
-          </a:p>
-        </p:txBody>
-      </p:sp>
-      <p:sp>
-        <p:nvSpPr>
-          <p:cNvPr id="4" name="TextBox 3"/>
-          <p:cNvSpPr txBox="1"/>
-          <p:nvPr/>
-        </p:nvSpPr>
-        <p:spPr>
-          <a:xfrm>
-            <a:off x="548640" y="777240"/>
-            <a:ext cx="11155680" cy="640080"/>
-          </a:xfrm>
-          <a:prstGeom prst="rect">
-            <a:avLst/>
-          </a:prstGeom>
-          <a:noFill/>
-        </p:spPr>
-        <p:txBody>
-          <a:bodyPr wrap="square">
-            <a:spAutoFit/>
-          </a:bodyPr>
-          <a:lstStyle/>
-          <a:p>
-            <a:r>
-              <a:rPr sz="2800" b="1">
-                <a:solidFill>
-                  <a:srgbClr val="0B1F3A"/>
-                </a:solidFill>
-                <a:latin typeface="Malgun Gothic"/>
-              </a:rPr>
-              <a:t>5-1. 최종 품질 — 동등 (A 54 / B 55)</a:t>
-            </a:r>
-          </a:p>
-        </p:txBody>
-      </p:sp>
-      <p:graphicFrame>
-        <p:nvGraphicFramePr>
-          <p:cNvPr id="5" name="Table 4"/>
-          <p:cNvGraphicFramePr>
-            <a:graphicFrameLocks noGrp="1"/>
-          </p:cNvGraphicFramePr>
-          <p:nvPr/>
-        </p:nvGraphicFramePr>
-        <p:xfrm>
-          <a:off x="548640" y="1554480"/>
-          <a:ext cx="11064239" cy="3657600"/>
-        </p:xfrm>
-        <a:graphic>
-          <a:graphicData uri="http://schemas.openxmlformats.org/drawingml/2006/table">
-            <a:tbl>
-              <a:tblPr firstRow="1" bandRow="1">
-                <a:tableStyleId>{5C22544A-7EE6-4342-B048-85BDC9FD1C3A}</a:tableStyleId>
-              </a:tblPr>
-              <a:tblGrid>
-                <a:gridCol w="3657600"/>
-                <a:gridCol w="3657600"/>
-                <a:gridCol w="3749039"/>
-              </a:tblGrid>
-              <a:tr h="522514">
-                <a:tc>
-                  <a:txBody>
-                    <a:bodyPr/>
-                    <a:lstStyle/>
-                    <a:p>
-                      <a:r>
-                        <a:rPr sz="1200" b="1">
-                          <a:solidFill>
-                            <a:srgbClr val="FFFFFF"/>
-                          </a:solidFill>
-                          <a:latin typeface="Malgun Gothic"/>
-                        </a:rPr>
-                        <a:t>지표</a:t>
-                      </a:r>
-                    </a:p>
-                  </a:txBody>
-                  <a:tcPr>
-                    <a:solidFill>
-                      <a:srgbClr val="0B1F3A"/>
-                    </a:solidFill>
-                  </a:tcPr>
-                </a:tc>
-                <a:tc>
-                  <a:txBody>
-                    <a:bodyPr/>
-                    <a:lstStyle/>
-                    <a:p>
-                      <a:r>
-                        <a:rPr sz="1200" b="1">
-                          <a:solidFill>
-                            <a:srgbClr val="FFFFFF"/>
-                          </a:solidFill>
-                          <a:latin typeface="Malgun Gothic"/>
-                        </a:rPr>
-                        <a:t>Session A</a:t>
-                      </a:r>
-                    </a:p>
-                  </a:txBody>
-                  <a:tcPr>
-                    <a:solidFill>
-                      <a:srgbClr val="0B1F3A"/>
-                    </a:solidFill>
-                  </a:tcPr>
-                </a:tc>
-                <a:tc>
-                  <a:txBody>
-                    <a:bodyPr/>
-                    <a:lstStyle/>
-                    <a:p>
-                      <a:r>
-                        <a:rPr sz="1200" b="1">
-                          <a:solidFill>
-                            <a:srgbClr val="FFFFFF"/>
-                          </a:solidFill>
-                          <a:latin typeface="Malgun Gothic"/>
-                        </a:rPr>
-                        <a:t>Session B</a:t>
-                      </a:r>
-                    </a:p>
-                  </a:txBody>
-                  <a:tcPr>
-                    <a:solidFill>
-                      <a:srgbClr val="0B1F3A"/>
-                    </a:solidFill>
-                  </a:tcPr>
-                </a:tc>
-              </a:tr>
-              <a:tr h="522514">
-                <a:tc>
-                  <a:txBody>
-                    <a:bodyPr/>
-                    <a:lstStyle/>
-                    <a:p>
-                      <a:r>
-                        <a:rPr sz="1100" b="0">
-                          <a:solidFill>
-                            <a:srgbClr val="1A1A1A"/>
-                          </a:solidFill>
-                          <a:latin typeface="Malgun Gothic"/>
-                        </a:rPr>
-                        <a:t>Parity 총점 (/56)</a:t>
+                        <a:t>합계</a:t>
                       </a:r>
                     </a:p>
                   </a:txBody>
@@ -6234,1731 +7909,7 @@
                           </a:solidFill>
                           <a:latin typeface="Malgun Gothic"/>
                         </a:rPr>
-                        <a:t>54</a:t>
-                      </a:r>
-                    </a:p>
-                  </a:txBody>
-                  <a:tcPr>
-                    <a:solidFill>
-                      <a:srgbClr val="FFFFFF"/>
-                    </a:solidFill>
-                  </a:tcPr>
-                </a:tc>
-                <a:tc>
-                  <a:txBody>
-                    <a:bodyPr/>
-                    <a:lstStyle/>
-                    <a:p>
-                      <a:r>
-                        <a:rPr sz="1100" b="0">
-                          <a:solidFill>
-                            <a:srgbClr val="1A1A1A"/>
-                          </a:solidFill>
-                          <a:latin typeface="Malgun Gothic"/>
-                        </a:rPr>
-                        <a:t>55</a:t>
-                      </a:r>
-                    </a:p>
-                  </a:txBody>
-                  <a:tcPr>
-                    <a:solidFill>
-                      <a:srgbClr val="FFFFFF"/>
-                    </a:solidFill>
-                  </a:tcPr>
-                </a:tc>
-              </a:tr>
-              <a:tr h="522514">
-                <a:tc>
-                  <a:txBody>
-                    <a:bodyPr/>
-                    <a:lstStyle/>
-                    <a:p>
-                      <a:r>
-                        <a:rPr sz="1100" b="0">
-                          <a:solidFill>
-                            <a:srgbClr val="1A1A1A"/>
-                          </a:solidFill>
-                          <a:latin typeface="Malgun Gothic"/>
-                        </a:rPr>
-                        <a:t>등급</a:t>
-                      </a:r>
-                    </a:p>
-                  </a:txBody>
-                  <a:tcPr>
-                    <a:solidFill>
-                      <a:srgbClr val="E8EEF3"/>
-                    </a:solidFill>
-                  </a:tcPr>
-                </a:tc>
-                <a:tc>
-                  <a:txBody>
-                    <a:bodyPr/>
-                    <a:lstStyle/>
-                    <a:p>
-                      <a:r>
-                        <a:rPr sz="1100" b="0">
-                          <a:solidFill>
-                            <a:srgbClr val="1A1A1A"/>
-                          </a:solidFill>
-                          <a:latin typeface="Malgun Gothic"/>
-                        </a:rPr>
-                        <a:t>PASS</a:t>
-                      </a:r>
-                    </a:p>
-                  </a:txBody>
-                  <a:tcPr>
-                    <a:solidFill>
-                      <a:srgbClr val="E8EEF3"/>
-                    </a:solidFill>
-                  </a:tcPr>
-                </a:tc>
-                <a:tc>
-                  <a:txBody>
-                    <a:bodyPr/>
-                    <a:lstStyle/>
-                    <a:p>
-                      <a:r>
-                        <a:rPr sz="1100" b="0">
-                          <a:solidFill>
-                            <a:srgbClr val="1A1A1A"/>
-                          </a:solidFill>
-                          <a:latin typeface="Malgun Gothic"/>
-                        </a:rPr>
-                        <a:t>PASS</a:t>
-                      </a:r>
-                    </a:p>
-                  </a:txBody>
-                  <a:tcPr>
-                    <a:solidFill>
-                      <a:srgbClr val="E8EEF3"/>
-                    </a:solidFill>
-                  </a:tcPr>
-                </a:tc>
-              </a:tr>
-              <a:tr h="522514">
-                <a:tc>
-                  <a:txBody>
-                    <a:bodyPr/>
-                    <a:lstStyle/>
-                    <a:p>
-                      <a:r>
-                        <a:rPr sz="1100" b="0">
-                          <a:solidFill>
-                            <a:srgbClr val="1A1A1A"/>
-                          </a:solidFill>
-                          <a:latin typeface="Malgun Gothic"/>
-                        </a:rPr>
-                        <a:t>|A−B|</a:t>
-                      </a:r>
-                    </a:p>
-                  </a:txBody>
-                  <a:tcPr>
-                    <a:solidFill>
-                      <a:srgbClr val="FFFFFF"/>
-                    </a:solidFill>
-                  </a:tcPr>
-                </a:tc>
-                <a:tc>
-                  <a:txBody>
-                    <a:bodyPr/>
-                    <a:lstStyle/>
-                    <a:p>
-                      <a:r>
-                        <a:rPr sz="1100" b="0">
-                          <a:solidFill>
-                            <a:srgbClr val="1A1A1A"/>
-                          </a:solidFill>
-                          <a:latin typeface="Malgun Gothic"/>
-                        </a:rPr>
-                        <a:t>1 → 품질 동등</a:t>
-                      </a:r>
-                    </a:p>
-                  </a:txBody>
-                  <a:tcPr>
-                    <a:solidFill>
-                      <a:srgbClr val="FFFFFF"/>
-                    </a:solidFill>
-                  </a:tcPr>
-                </a:tc>
-                <a:tc>
-                  <a:txBody>
-                    <a:bodyPr/>
-                    <a:lstStyle/>
-                    <a:p/>
-                  </a:txBody>
-                  <a:tcPr>
-                    <a:solidFill>
-                      <a:srgbClr val="FFFFFF"/>
-                    </a:solidFill>
-                  </a:tcPr>
-                </a:tc>
-              </a:tr>
-              <a:tr h="522514">
-                <a:tc>
-                  <a:txBody>
-                    <a:bodyPr/>
-                    <a:lstStyle/>
-                    <a:p>
-                      <a:r>
-                        <a:rPr sz="1100" b="0">
-                          <a:solidFill>
-                            <a:srgbClr val="1A1A1A"/>
-                          </a:solidFill>
-                          <a:latin typeface="Malgun Gothic"/>
-                        </a:rPr>
-                        <a:t>공정 Q (프로그램)</a:t>
-                      </a:r>
-                    </a:p>
-                  </a:txBody>
-                  <a:tcPr>
-                    <a:solidFill>
-                      <a:srgbClr val="E8EEF3"/>
-                    </a:solidFill>
-                  </a:tcPr>
-                </a:tc>
-                <a:tc>
-                  <a:txBody>
-                    <a:bodyPr/>
-                    <a:lstStyle/>
-                    <a:p>
-                      <a:r>
-                        <a:rPr sz="1100" b="0">
-                          <a:solidFill>
-                            <a:srgbClr val="1A1A1A"/>
-                          </a:solidFill>
-                          <a:latin typeface="Malgun Gothic"/>
-                        </a:rPr>
-                        <a:t>≈63</a:t>
-                      </a:r>
-                    </a:p>
-                  </a:txBody>
-                  <a:tcPr>
-                    <a:solidFill>
-                      <a:srgbClr val="E8EEF3"/>
-                    </a:solidFill>
-                  </a:tcPr>
-                </a:tc>
-                <a:tc>
-                  <a:txBody>
-                    <a:bodyPr/>
-                    <a:lstStyle/>
-                    <a:p>
-                      <a:r>
-                        <a:rPr sz="1100" b="0">
-                          <a:solidFill>
-                            <a:srgbClr val="1A1A1A"/>
-                          </a:solidFill>
-                          <a:latin typeface="Malgun Gothic"/>
-                        </a:rPr>
-                        <a:t>≈16</a:t>
-                      </a:r>
-                    </a:p>
-                  </a:txBody>
-                  <a:tcPr>
-                    <a:solidFill>
-                      <a:srgbClr val="E8EEF3"/>
-                    </a:solidFill>
-                  </a:tcPr>
-                </a:tc>
-              </a:tr>
-              <a:tr h="522514">
-                <a:tc>
-                  <a:txBody>
-                    <a:bodyPr/>
-                    <a:lstStyle/>
-                    <a:p>
-                      <a:r>
-                        <a:rPr sz="1100" b="0">
-                          <a:solidFill>
-                            <a:srgbClr val="1A1A1A"/>
-                          </a:solidFill>
-                          <a:latin typeface="Malgun Gothic"/>
-                        </a:rPr>
-                        <a:t>E_compile (첨부)</a:t>
-                      </a:r>
-                    </a:p>
-                  </a:txBody>
-                  <a:tcPr>
-                    <a:solidFill>
-                      <a:srgbClr val="FFFFFF"/>
-                    </a:solidFill>
-                  </a:tcPr>
-                </a:tc>
-                <a:tc>
-                  <a:txBody>
-                    <a:bodyPr/>
-                    <a:lstStyle/>
-                    <a:p>
-                      <a:r>
-                        <a:rPr sz="1100" b="0">
-                          <a:solidFill>
-                            <a:srgbClr val="1A1A1A"/>
-                          </a:solidFill>
-                          <a:latin typeface="Malgun Gothic"/>
-                        </a:rPr>
-                        <a:t>~18+</a:t>
-                      </a:r>
-                    </a:p>
-                  </a:txBody>
-                  <a:tcPr>
-                    <a:solidFill>
-                      <a:srgbClr val="FFFFFF"/>
-                    </a:solidFill>
-                  </a:tcPr>
-                </a:tc>
-                <a:tc>
-                  <a:txBody>
-                    <a:bodyPr/>
-                    <a:lstStyle/>
-                    <a:p>
-                      <a:r>
-                        <a:rPr sz="1100" b="0">
-                          <a:solidFill>
-                            <a:srgbClr val="1A1A1A"/>
-                          </a:solidFill>
-                          <a:latin typeface="Malgun Gothic"/>
-                        </a:rPr>
-                        <a:t>2</a:t>
-                      </a:r>
-                    </a:p>
-                  </a:txBody>
-                  <a:tcPr>
-                    <a:solidFill>
-                      <a:srgbClr val="FFFFFF"/>
-                    </a:solidFill>
-                  </a:tcPr>
-                </a:tc>
-              </a:tr>
-              <a:tr h="522516">
-                <a:tc>
-                  <a:txBody>
-                    <a:bodyPr/>
-                    <a:lstStyle/>
-                    <a:p>
-                      <a:r>
-                        <a:rPr sz="1100" b="0">
-                          <a:solidFill>
-                            <a:srgbClr val="1A1A1A"/>
-                          </a:solidFill>
-                          <a:latin typeface="Malgun Gothic"/>
-                        </a:rPr>
-                        <a:t>첫 PASS 도달 Q (Hard Gate)</a:t>
-                      </a:r>
-                    </a:p>
-                  </a:txBody>
-                  <a:tcPr>
-                    <a:solidFill>
-                      <a:srgbClr val="E8EEF3"/>
-                    </a:solidFill>
-                  </a:tcPr>
-                </a:tc>
-                <a:tc>
-                  <a:txBody>
-                    <a:bodyPr/>
-                    <a:lstStyle/>
-                    <a:p>
-                      <a:r>
-                        <a:rPr sz="1100" b="0">
-                          <a:solidFill>
-                            <a:srgbClr val="1A1A1A"/>
-                          </a:solidFill>
-                          <a:latin typeface="Malgun Gothic"/>
-                        </a:rPr>
-                        <a:t>≈57</a:t>
-                      </a:r>
-                    </a:p>
-                  </a:txBody>
-                  <a:tcPr>
-                    <a:solidFill>
-                      <a:srgbClr val="E8EEF3"/>
-                    </a:solidFill>
-                  </a:tcPr>
-                </a:tc>
-                <a:tc>
-                  <a:txBody>
-                    <a:bodyPr/>
-                    <a:lstStyle/>
-                    <a:p>
-                      <a:r>
-                        <a:rPr sz="1100" b="0">
-                          <a:solidFill>
-                            <a:srgbClr val="1A1A1A"/>
-                          </a:solidFill>
-                          <a:latin typeface="Malgun Gothic"/>
-                        </a:rPr>
-                        <a:t>≈12</a:t>
-                      </a:r>
-                    </a:p>
-                  </a:txBody>
-                  <a:tcPr>
-                    <a:solidFill>
-                      <a:srgbClr val="E8EEF3"/>
-                    </a:solidFill>
-                  </a:tcPr>
-                </a:tc>
-              </a:tr>
-            </a:tbl>
-          </a:graphicData>
-        </a:graphic>
-      </p:graphicFrame>
-      <p:sp>
-        <p:nvSpPr>
-          <p:cNvPr id="6" name="TextBox 5"/>
-          <p:cNvSpPr txBox="1"/>
-          <p:nvPr/>
-        </p:nvSpPr>
-        <p:spPr>
-          <a:xfrm>
-            <a:off x="548640" y="6309360"/>
-            <a:ext cx="10972800" cy="274320"/>
-          </a:xfrm>
-          <a:prstGeom prst="rect">
-            <a:avLst/>
-          </a:prstGeom>
-          <a:noFill/>
-        </p:spPr>
-        <p:txBody>
-          <a:bodyPr wrap="none">
-            <a:spAutoFit/>
-          </a:bodyPr>
-          <a:lstStyle/>
-          <a:p>
-            <a:r>
-              <a:rPr sz="1000" b="0">
-                <a:solidFill>
-                  <a:srgbClr val="5A5A5A"/>
-                </a:solidFill>
-                <a:latin typeface="Malgun Gothic"/>
-              </a:rPr>
-              <a:t>Cursor × ABAP Skills 실험  |  7/12</a:t>
-            </a:r>
-          </a:p>
-        </p:txBody>
-      </p:sp>
-    </p:spTree>
-  </p:cSld>
-  <p:clrMapOvr>
-    <a:masterClrMapping/>
-  </p:clrMapOvr>
-</p:sld>
-</file>
-
-<file path=ppt/slides/slide8.xml><?xml version="1.0" encoding="utf-8"?>
-<p:sld xmlns:a="http://schemas.openxmlformats.org/drawingml/2006/main" xmlns:p="http://schemas.openxmlformats.org/presentationml/2006/main" xmlns:r="http://schemas.openxmlformats.org/officeDocument/2006/relationships">
-  <p:cSld>
-    <p:spTree>
-      <p:nvGrpSpPr>
-        <p:cNvPr id="1" name=""/>
-        <p:cNvGrpSpPr/>
-        <p:nvPr/>
-      </p:nvGrpSpPr>
-      <p:grpSpPr/>
-      <p:sp>
-        <p:nvSpPr>
-          <p:cNvPr id="2" name="Rectangle 1"/>
-          <p:cNvSpPr/>
-          <p:nvPr/>
-        </p:nvSpPr>
-        <p:spPr>
-          <a:xfrm>
-            <a:off x="0" y="0"/>
-            <a:ext cx="12191695" cy="6858000"/>
-          </a:xfrm>
-          <a:prstGeom prst="rect">
-            <a:avLst/>
-          </a:prstGeom>
-          <a:solidFill>
-            <a:srgbClr val="F2F5F8"/>
-          </a:solidFill>
-          <a:ln>
-            <a:noFill/>
-          </a:ln>
-        </p:spPr>
-        <p:style>
-          <a:lnRef idx="1">
-            <a:schemeClr val="accent1"/>
-          </a:lnRef>
-          <a:fillRef idx="3">
-            <a:schemeClr val="accent1"/>
-          </a:fillRef>
-          <a:effectRef idx="2">
-            <a:schemeClr val="accent1"/>
-          </a:effectRef>
-          <a:fontRef idx="minor">
-            <a:schemeClr val="lt1"/>
-          </a:fontRef>
-        </p:style>
-        <p:txBody>
-          <a:bodyPr rtlCol="0" anchor="ctr"/>
-          <a:lstStyle/>
-          <a:p>
-            <a:pPr algn="ctr"/>
-          </a:p>
-        </p:txBody>
-      </p:sp>
-      <p:sp>
-        <p:nvSpPr>
-          <p:cNvPr id="3" name="Rectangle 2"/>
-          <p:cNvSpPr/>
-          <p:nvPr/>
-        </p:nvSpPr>
-        <p:spPr>
-          <a:xfrm>
-            <a:off x="0" y="0"/>
-            <a:ext cx="12191695" cy="640080"/>
-          </a:xfrm>
-          <a:prstGeom prst="rect">
-            <a:avLst/>
-          </a:prstGeom>
-          <a:solidFill>
-            <a:srgbClr val="0B1F3A"/>
-          </a:solidFill>
-          <a:ln>
-            <a:noFill/>
-          </a:ln>
-        </p:spPr>
-        <p:style>
-          <a:lnRef idx="1">
-            <a:schemeClr val="accent1"/>
-          </a:lnRef>
-          <a:fillRef idx="3">
-            <a:schemeClr val="accent1"/>
-          </a:fillRef>
-          <a:effectRef idx="2">
-            <a:schemeClr val="accent1"/>
-          </a:effectRef>
-          <a:fontRef idx="minor">
-            <a:schemeClr val="lt1"/>
-          </a:fontRef>
-        </p:style>
-        <p:txBody>
-          <a:bodyPr rtlCol="0" anchor="ctr"/>
-          <a:lstStyle/>
-          <a:p>
-            <a:pPr algn="ctr"/>
-          </a:p>
-        </p:txBody>
-      </p:sp>
-      <p:sp>
-        <p:nvSpPr>
-          <p:cNvPr id="4" name="TextBox 3"/>
-          <p:cNvSpPr txBox="1"/>
-          <p:nvPr/>
-        </p:nvSpPr>
-        <p:spPr>
-          <a:xfrm>
-            <a:off x="548640" y="777240"/>
-            <a:ext cx="11155680" cy="640080"/>
-          </a:xfrm>
-          <a:prstGeom prst="rect">
-            <a:avLst/>
-          </a:prstGeom>
-          <a:noFill/>
-        </p:spPr>
-        <p:txBody>
-          <a:bodyPr wrap="square">
-            <a:spAutoFit/>
-          </a:bodyPr>
-          <a:lstStyle/>
-          <a:p>
-            <a:r>
-              <a:rPr sz="2800" b="1">
-                <a:solidFill>
-                  <a:srgbClr val="0B1F3A"/>
-                </a:solidFill>
-                <a:latin typeface="Malgun Gothic"/>
-              </a:rPr>
-              <a:t>5-2. 질문 수에 따른 Parity 향상 (Hard Gate 보정)</a:t>
-            </a:r>
-          </a:p>
-        </p:txBody>
-      </p:sp>
-      <p:sp>
-        <p:nvSpPr>
-          <p:cNvPr id="5" name="TextBox 4"/>
-          <p:cNvSpPr txBox="1"/>
-          <p:nvPr/>
-        </p:nvSpPr>
-        <p:spPr>
-          <a:xfrm>
-            <a:off x="640080" y="1554480"/>
-            <a:ext cx="10972800" cy="4572000"/>
-          </a:xfrm>
-          <a:prstGeom prst="rect">
-            <a:avLst/>
-          </a:prstGeom>
-          <a:noFill/>
-        </p:spPr>
-        <p:txBody>
-          <a:bodyPr wrap="square">
-            <a:spAutoFit/>
-          </a:bodyPr>
-          <a:lstStyle/>
-          <a:p>
-            <a:pPr>
-              <a:spcAft>
-                <a:spcPts val="800"/>
-              </a:spcAft>
-            </a:pPr>
-            <a:r>
-              <a:rPr sz="1500" b="0">
-                <a:solidFill>
-                  <a:srgbClr val="1A1A1A"/>
-                </a:solidFill>
-                <a:latin typeface="Malgun Gothic"/>
-              </a:rPr>
-              <a:t>잘못된 채점: B Q=1을 ‘소스에 HTML 있음’만으로 ~44점·조기 PASS처럼 처리</a:t>
-            </a:r>
-          </a:p>
-          <a:p>
-            <a:pPr>
-              <a:spcAft>
-                <a:spcPts val="800"/>
-              </a:spcAft>
-            </a:pPr>
-            <a:r>
-              <a:rPr sz="1500" b="0">
-                <a:solidFill>
-                  <a:srgbClr val="1A1A1A"/>
-                </a:solidFill>
-                <a:latin typeface="Malgun Gothic"/>
-              </a:rPr>
-              <a:t>올바른 채점: 활성화 전·팝업X 불능·ST22 0건(버그) 구간은 FAIL/PARTIAL</a:t>
-            </a:r>
-          </a:p>
-          <a:p>
-            <a:pPr>
-              <a:spcAft>
-                <a:spcPts val="800"/>
-              </a:spcAft>
-            </a:pPr>
-            <a:r>
-              <a:rPr sz="1500" b="0">
-                <a:solidFill>
-                  <a:srgbClr val="1A1A1A"/>
-                </a:solidFill>
-                <a:latin typeface="Malgun Gothic"/>
-              </a:rPr>
-              <a:t>B 실제 곡선: Q1=30(FAIL) → Q7 팝업/ST22 차단 → Q12=53(첫 PASS) → Q16=55</a:t>
-            </a:r>
-          </a:p>
-          <a:p>
-            <a:pPr>
-              <a:spcAft>
-                <a:spcPts val="800"/>
-              </a:spcAft>
-            </a:pPr>
-            <a:r>
-              <a:rPr sz="1500" b="0">
-                <a:solidFill>
-                  <a:srgbClr val="1A1A1A"/>
-                </a:solidFill>
-                <a:latin typeface="Malgun Gothic"/>
-              </a:rPr>
-              <a:t>A 실제 곡선: 천천히 상승, IGS/타입 오류로 정체 → Q≈57에서 첫 PASS → 최종 54</a:t>
-            </a:r>
-          </a:p>
-          <a:p>
-            <a:pPr>
-              <a:spcAft>
-                <a:spcPts val="800"/>
-              </a:spcAft>
-            </a:pPr>
-            <a:r>
-              <a:rPr sz="1500" b="0">
-                <a:solidFill>
-                  <a:srgbClr val="1A1A1A"/>
-                </a:solidFill>
-                <a:latin typeface="Malgun Gothic"/>
-              </a:rPr>
-              <a:t>효율: 첫 PASS까지 pt/Q  ≈ 0.89(A) vs ≈4.4(B)  — 같은 바, 더 짧은 과정</a:t>
-            </a:r>
-          </a:p>
-        </p:txBody>
-      </p:sp>
-      <p:sp>
-        <p:nvSpPr>
-          <p:cNvPr id="6" name="TextBox 5"/>
-          <p:cNvSpPr txBox="1"/>
-          <p:nvPr/>
-        </p:nvSpPr>
-        <p:spPr>
-          <a:xfrm>
-            <a:off x="548640" y="6309360"/>
-            <a:ext cx="10972800" cy="274320"/>
-          </a:xfrm>
-          <a:prstGeom prst="rect">
-            <a:avLst/>
-          </a:prstGeom>
-          <a:noFill/>
-        </p:spPr>
-        <p:txBody>
-          <a:bodyPr wrap="none">
-            <a:spAutoFit/>
-          </a:bodyPr>
-          <a:lstStyle/>
-          <a:p>
-            <a:r>
-              <a:rPr sz="1000" b="0">
-                <a:solidFill>
-                  <a:srgbClr val="5A5A5A"/>
-                </a:solidFill>
-                <a:latin typeface="Malgun Gothic"/>
-              </a:rPr>
-              <a:t>Cursor × ABAP Skills 실험  |  8/12</a:t>
-            </a:r>
-          </a:p>
-        </p:txBody>
-      </p:sp>
-    </p:spTree>
-  </p:cSld>
-  <p:clrMapOvr>
-    <a:masterClrMapping/>
-  </p:clrMapOvr>
-</p:sld>
-</file>
-
-<file path=ppt/slides/slide9.xml><?xml version="1.0" encoding="utf-8"?>
-<p:sld xmlns:a="http://schemas.openxmlformats.org/drawingml/2006/main" xmlns:p="http://schemas.openxmlformats.org/presentationml/2006/main" xmlns:r="http://schemas.openxmlformats.org/officeDocument/2006/relationships">
-  <p:cSld>
-    <p:spTree>
-      <p:nvGrpSpPr>
-        <p:cNvPr id="1" name=""/>
-        <p:cNvGrpSpPr/>
-        <p:nvPr/>
-      </p:nvGrpSpPr>
-      <p:grpSpPr/>
-      <p:sp>
-        <p:nvSpPr>
-          <p:cNvPr id="2" name="Rectangle 1"/>
-          <p:cNvSpPr/>
-          <p:nvPr/>
-        </p:nvSpPr>
-        <p:spPr>
-          <a:xfrm>
-            <a:off x="0" y="0"/>
-            <a:ext cx="12191695" cy="6858000"/>
-          </a:xfrm>
-          <a:prstGeom prst="rect">
-            <a:avLst/>
-          </a:prstGeom>
-          <a:solidFill>
-            <a:srgbClr val="F2F5F8"/>
-          </a:solidFill>
-          <a:ln>
-            <a:noFill/>
-          </a:ln>
-        </p:spPr>
-        <p:style>
-          <a:lnRef idx="1">
-            <a:schemeClr val="accent1"/>
-          </a:lnRef>
-          <a:fillRef idx="3">
-            <a:schemeClr val="accent1"/>
-          </a:fillRef>
-          <a:effectRef idx="2">
-            <a:schemeClr val="accent1"/>
-          </a:effectRef>
-          <a:fontRef idx="minor">
-            <a:schemeClr val="lt1"/>
-          </a:fontRef>
-        </p:style>
-        <p:txBody>
-          <a:bodyPr rtlCol="0" anchor="ctr"/>
-          <a:lstStyle/>
-          <a:p>
-            <a:pPr algn="ctr"/>
-          </a:p>
-        </p:txBody>
-      </p:sp>
-      <p:sp>
-        <p:nvSpPr>
-          <p:cNvPr id="3" name="Rectangle 2"/>
-          <p:cNvSpPr/>
-          <p:nvPr/>
-        </p:nvSpPr>
-        <p:spPr>
-          <a:xfrm>
-            <a:off x="0" y="0"/>
-            <a:ext cx="12191695" cy="640080"/>
-          </a:xfrm>
-          <a:prstGeom prst="rect">
-            <a:avLst/>
-          </a:prstGeom>
-          <a:solidFill>
-            <a:srgbClr val="0B1F3A"/>
-          </a:solidFill>
-          <a:ln>
-            <a:noFill/>
-          </a:ln>
-        </p:spPr>
-        <p:style>
-          <a:lnRef idx="1">
-            <a:schemeClr val="accent1"/>
-          </a:lnRef>
-          <a:fillRef idx="3">
-            <a:schemeClr val="accent1"/>
-          </a:fillRef>
-          <a:effectRef idx="2">
-            <a:schemeClr val="accent1"/>
-          </a:effectRef>
-          <a:fontRef idx="minor">
-            <a:schemeClr val="lt1"/>
-          </a:fontRef>
-        </p:style>
-        <p:txBody>
-          <a:bodyPr rtlCol="0" anchor="ctr"/>
-          <a:lstStyle/>
-          <a:p>
-            <a:pPr algn="ctr"/>
-          </a:p>
-        </p:txBody>
-      </p:sp>
-      <p:sp>
-        <p:nvSpPr>
-          <p:cNvPr id="4" name="TextBox 3"/>
-          <p:cNvSpPr txBox="1"/>
-          <p:nvPr/>
-        </p:nvSpPr>
-        <p:spPr>
-          <a:xfrm>
-            <a:off x="548640" y="777240"/>
-            <a:ext cx="11155680" cy="640080"/>
-          </a:xfrm>
-          <a:prstGeom prst="rect">
-            <a:avLst/>
-          </a:prstGeom>
-          <a:noFill/>
-        </p:spPr>
-        <p:txBody>
-          <a:bodyPr wrap="square">
-            <a:spAutoFit/>
-          </a:bodyPr>
-          <a:lstStyle/>
-          <a:p>
-            <a:r>
-              <a:rPr sz="2800" b="1">
-                <a:solidFill>
-                  <a:srgbClr val="0B1F3A"/>
-                </a:solidFill>
-                <a:latin typeface="Malgun Gothic"/>
-              </a:rPr>
-              <a:t>5-3. 동일 질문 수에서 본 점수</a:t>
-            </a:r>
-          </a:p>
-        </p:txBody>
-      </p:sp>
-      <p:graphicFrame>
-        <p:nvGraphicFramePr>
-          <p:cNvPr id="5" name="Table 4"/>
-          <p:cNvGraphicFramePr>
-            <a:graphicFrameLocks noGrp="1"/>
-          </p:cNvGraphicFramePr>
-          <p:nvPr/>
-        </p:nvGraphicFramePr>
-        <p:xfrm>
-          <a:off x="548640" y="1463040"/>
-          <a:ext cx="11064240" cy="4023360"/>
-        </p:xfrm>
-        <a:graphic>
-          <a:graphicData uri="http://schemas.openxmlformats.org/drawingml/2006/table">
-            <a:tbl>
-              <a:tblPr firstRow="1" bandRow="1">
-                <a:tableStyleId>{5C22544A-7EE6-4342-B048-85BDC9FD1C3A}</a:tableStyleId>
-              </a:tblPr>
-              <a:tblGrid>
-                <a:gridCol w="1828800"/>
-                <a:gridCol w="2194560"/>
-                <a:gridCol w="2194560"/>
-                <a:gridCol w="2194560"/>
-                <a:gridCol w="2651760"/>
-              </a:tblGrid>
-              <a:tr h="502920">
-                <a:tc>
-                  <a:txBody>
-                    <a:bodyPr/>
-                    <a:lstStyle/>
-                    <a:p>
-                      <a:r>
-                        <a:rPr sz="1200" b="1">
-                          <a:solidFill>
-                            <a:srgbClr val="FFFFFF"/>
-                          </a:solidFill>
-                          <a:latin typeface="Malgun Gothic"/>
-                        </a:rPr>
-                        <a:t>cum_Q</a:t>
-                      </a:r>
-                    </a:p>
-                  </a:txBody>
-                  <a:tcPr>
-                    <a:solidFill>
-                      <a:srgbClr val="0B1F3A"/>
-                    </a:solidFill>
-                  </a:tcPr>
-                </a:tc>
-                <a:tc>
-                  <a:txBody>
-                    <a:bodyPr/>
-                    <a:lstStyle/>
-                    <a:p>
-                      <a:r>
-                        <a:rPr sz="1200" b="1">
-                          <a:solidFill>
-                            <a:srgbClr val="FFFFFF"/>
-                          </a:solidFill>
-                          <a:latin typeface="Malgun Gothic"/>
-                        </a:rPr>
-                        <a:t>A Total</a:t>
-                      </a:r>
-                    </a:p>
-                  </a:txBody>
-                  <a:tcPr>
-                    <a:solidFill>
-                      <a:srgbClr val="0B1F3A"/>
-                    </a:solidFill>
-                  </a:tcPr>
-                </a:tc>
-                <a:tc>
-                  <a:txBody>
-                    <a:bodyPr/>
-                    <a:lstStyle/>
-                    <a:p>
-                      <a:r>
-                        <a:rPr sz="1200" b="1">
-                          <a:solidFill>
-                            <a:srgbClr val="FFFFFF"/>
-                          </a:solidFill>
-                          <a:latin typeface="Malgun Gothic"/>
-                        </a:rPr>
-                        <a:t>A 등급</a:t>
-                      </a:r>
-                    </a:p>
-                  </a:txBody>
-                  <a:tcPr>
-                    <a:solidFill>
-                      <a:srgbClr val="0B1F3A"/>
-                    </a:solidFill>
-                  </a:tcPr>
-                </a:tc>
-                <a:tc>
-                  <a:txBody>
-                    <a:bodyPr/>
-                    <a:lstStyle/>
-                    <a:p>
-                      <a:r>
-                        <a:rPr sz="1200" b="1">
-                          <a:solidFill>
-                            <a:srgbClr val="FFFFFF"/>
-                          </a:solidFill>
-                          <a:latin typeface="Malgun Gothic"/>
-                        </a:rPr>
-                        <a:t>B Total</a:t>
-                      </a:r>
-                    </a:p>
-                  </a:txBody>
-                  <a:tcPr>
-                    <a:solidFill>
-                      <a:srgbClr val="0B1F3A"/>
-                    </a:solidFill>
-                  </a:tcPr>
-                </a:tc>
-                <a:tc>
-                  <a:txBody>
-                    <a:bodyPr/>
-                    <a:lstStyle/>
-                    <a:p>
-                      <a:r>
-                        <a:rPr sz="1200" b="1">
-                          <a:solidFill>
-                            <a:srgbClr val="FFFFFF"/>
-                          </a:solidFill>
-                          <a:latin typeface="Malgun Gothic"/>
-                        </a:rPr>
-                        <a:t>B 등급</a:t>
-                      </a:r>
-                    </a:p>
-                  </a:txBody>
-                  <a:tcPr>
-                    <a:solidFill>
-                      <a:srgbClr val="0B1F3A"/>
-                    </a:solidFill>
-                  </a:tcPr>
-                </a:tc>
-              </a:tr>
-              <a:tr h="502920">
-                <a:tc>
-                  <a:txBody>
-                    <a:bodyPr/>
-                    <a:lstStyle/>
-                    <a:p>
-                      <a:r>
-                        <a:rPr sz="1100" b="0">
-                          <a:solidFill>
-                            <a:srgbClr val="1A1A1A"/>
-                          </a:solidFill>
-                          <a:latin typeface="Malgun Gothic"/>
-                        </a:rPr>
-                        <a:t>1</a:t>
-                      </a:r>
-                    </a:p>
-                  </a:txBody>
-                  <a:tcPr>
-                    <a:solidFill>
-                      <a:srgbClr val="FFFFFF"/>
-                    </a:solidFill>
-                  </a:tcPr>
-                </a:tc>
-                <a:tc>
-                  <a:txBody>
-                    <a:bodyPr/>
-                    <a:lstStyle/>
-                    <a:p>
-                      <a:r>
-                        <a:rPr sz="1100" b="0">
-                          <a:solidFill>
-                            <a:srgbClr val="1A1A1A"/>
-                          </a:solidFill>
-                          <a:latin typeface="Malgun Gothic"/>
-                        </a:rPr>
-                        <a:t>0</a:t>
-                      </a:r>
-                    </a:p>
-                  </a:txBody>
-                  <a:tcPr>
-                    <a:solidFill>
-                      <a:srgbClr val="FFFFFF"/>
-                    </a:solidFill>
-                  </a:tcPr>
-                </a:tc>
-                <a:tc>
-                  <a:txBody>
-                    <a:bodyPr/>
-                    <a:lstStyle/>
-                    <a:p>
-                      <a:r>
-                        <a:rPr sz="1100" b="0">
-                          <a:solidFill>
-                            <a:srgbClr val="1A1A1A"/>
-                          </a:solidFill>
-                          <a:latin typeface="Malgun Gothic"/>
-                        </a:rPr>
-                        <a:t>FAIL</a:t>
-                      </a:r>
-                    </a:p>
-                  </a:txBody>
-                  <a:tcPr>
-                    <a:solidFill>
-                      <a:srgbClr val="FFFFFF"/>
-                    </a:solidFill>
-                  </a:tcPr>
-                </a:tc>
-                <a:tc>
-                  <a:txBody>
-                    <a:bodyPr/>
-                    <a:lstStyle/>
-                    <a:p>
-                      <a:r>
-                        <a:rPr sz="1100" b="0">
-                          <a:solidFill>
-                            <a:srgbClr val="1A1A1A"/>
-                          </a:solidFill>
-                          <a:latin typeface="Malgun Gothic"/>
-                        </a:rPr>
-                        <a:t>30</a:t>
-                      </a:r>
-                    </a:p>
-                  </a:txBody>
-                  <a:tcPr>
-                    <a:solidFill>
-                      <a:srgbClr val="FFFFFF"/>
-                    </a:solidFill>
-                  </a:tcPr>
-                </a:tc>
-                <a:tc>
-                  <a:txBody>
-                    <a:bodyPr/>
-                    <a:lstStyle/>
-                    <a:p>
-                      <a:r>
-                        <a:rPr sz="1100" b="0">
-                          <a:solidFill>
-                            <a:srgbClr val="1A1A1A"/>
-                          </a:solidFill>
-                          <a:latin typeface="Malgun Gothic"/>
-                        </a:rPr>
-                        <a:t>FAIL</a:t>
-                      </a:r>
-                    </a:p>
-                  </a:txBody>
-                  <a:tcPr>
-                    <a:solidFill>
-                      <a:srgbClr val="FFFFFF"/>
-                    </a:solidFill>
-                  </a:tcPr>
-                </a:tc>
-              </a:tr>
-              <a:tr h="502920">
-                <a:tc>
-                  <a:txBody>
-                    <a:bodyPr/>
-                    <a:lstStyle/>
-                    <a:p>
-                      <a:r>
-                        <a:rPr sz="1100" b="0">
-                          <a:solidFill>
-                            <a:srgbClr val="1A1A1A"/>
-                          </a:solidFill>
-                          <a:latin typeface="Malgun Gothic"/>
-                        </a:rPr>
-                        <a:t>5</a:t>
-                      </a:r>
-                    </a:p>
-                  </a:txBody>
-                  <a:tcPr>
-                    <a:solidFill>
-                      <a:srgbClr val="E8EEF3"/>
-                    </a:solidFill>
-                  </a:tcPr>
-                </a:tc>
-                <a:tc>
-                  <a:txBody>
-                    <a:bodyPr/>
-                    <a:lstStyle/>
-                    <a:p>
-                      <a:r>
-                        <a:rPr sz="1100" b="0">
-                          <a:solidFill>
-                            <a:srgbClr val="1A1A1A"/>
-                          </a:solidFill>
-                          <a:latin typeface="Malgun Gothic"/>
-                        </a:rPr>
-                        <a:t>~2</a:t>
-                      </a:r>
-                    </a:p>
-                  </a:txBody>
-                  <a:tcPr>
-                    <a:solidFill>
-                      <a:srgbClr val="E8EEF3"/>
-                    </a:solidFill>
-                  </a:tcPr>
-                </a:tc>
-                <a:tc>
-                  <a:txBody>
-                    <a:bodyPr/>
-                    <a:lstStyle/>
-                    <a:p>
-                      <a:r>
-                        <a:rPr sz="1100" b="0">
-                          <a:solidFill>
-                            <a:srgbClr val="1A1A1A"/>
-                          </a:solidFill>
-                          <a:latin typeface="Malgun Gothic"/>
-                        </a:rPr>
-                        <a:t>FAIL</a:t>
-                      </a:r>
-                    </a:p>
-                  </a:txBody>
-                  <a:tcPr>
-                    <a:solidFill>
-                      <a:srgbClr val="E8EEF3"/>
-                    </a:solidFill>
-                  </a:tcPr>
-                </a:tc>
-                <a:tc>
-                  <a:txBody>
-                    <a:bodyPr/>
-                    <a:lstStyle/>
-                    <a:p>
-                      <a:r>
-                        <a:rPr sz="1100" b="0">
-                          <a:solidFill>
-                            <a:srgbClr val="1A1A1A"/>
-                          </a:solidFill>
-                          <a:latin typeface="Malgun Gothic"/>
-                        </a:rPr>
-                        <a:t>40</a:t>
-                      </a:r>
-                    </a:p>
-                  </a:txBody>
-                  <a:tcPr>
-                    <a:solidFill>
-                      <a:srgbClr val="E8EEF3"/>
-                    </a:solidFill>
-                  </a:tcPr>
-                </a:tc>
-                <a:tc>
-                  <a:txBody>
-                    <a:bodyPr/>
-                    <a:lstStyle/>
-                    <a:p>
-                      <a:r>
-                        <a:rPr sz="1100" b="0">
-                          <a:solidFill>
-                            <a:srgbClr val="1A1A1A"/>
-                          </a:solidFill>
-                          <a:latin typeface="Malgun Gothic"/>
-                        </a:rPr>
-                        <a:t>FAIL</a:t>
-                      </a:r>
-                    </a:p>
-                  </a:txBody>
-                  <a:tcPr>
-                    <a:solidFill>
-                      <a:srgbClr val="E8EEF3"/>
-                    </a:solidFill>
-                  </a:tcPr>
-                </a:tc>
-              </a:tr>
-              <a:tr h="502920">
-                <a:tc>
-                  <a:txBody>
-                    <a:bodyPr/>
-                    <a:lstStyle/>
-                    <a:p>
-                      <a:r>
-                        <a:rPr sz="1100" b="0">
-                          <a:solidFill>
-                            <a:srgbClr val="1A1A1A"/>
-                          </a:solidFill>
-                          <a:latin typeface="Malgun Gothic"/>
-                        </a:rPr>
-                        <a:t>10</a:t>
-                      </a:r>
-                    </a:p>
-                  </a:txBody>
-                  <a:tcPr>
-                    <a:solidFill>
-                      <a:srgbClr val="FFFFFF"/>
-                    </a:solidFill>
-                  </a:tcPr>
-                </a:tc>
-                <a:tc>
-                  <a:txBody>
-                    <a:bodyPr/>
-                    <a:lstStyle/>
-                    <a:p>
-                      <a:r>
-                        <a:rPr sz="1100" b="0">
-                          <a:solidFill>
-                            <a:srgbClr val="1A1A1A"/>
-                          </a:solidFill>
-                          <a:latin typeface="Malgun Gothic"/>
-                        </a:rPr>
-                        <a:t>~30</a:t>
-                      </a:r>
-                    </a:p>
-                  </a:txBody>
-                  <a:tcPr>
-                    <a:solidFill>
-                      <a:srgbClr val="FFFFFF"/>
-                    </a:solidFill>
-                  </a:tcPr>
-                </a:tc>
-                <a:tc>
-                  <a:txBody>
-                    <a:bodyPr/>
-                    <a:lstStyle/>
-                    <a:p>
-                      <a:r>
-                        <a:rPr sz="1100" b="0">
-                          <a:solidFill>
-                            <a:srgbClr val="1A1A1A"/>
-                          </a:solidFill>
-                          <a:latin typeface="Malgun Gothic"/>
-                        </a:rPr>
-                        <a:t>FAIL</a:t>
-                      </a:r>
-                    </a:p>
-                  </a:txBody>
-                  <a:tcPr>
-                    <a:solidFill>
-                      <a:srgbClr val="FFFFFF"/>
-                    </a:solidFill>
-                  </a:tcPr>
-                </a:tc>
-                <a:tc>
-                  <a:txBody>
-                    <a:bodyPr/>
-                    <a:lstStyle/>
-                    <a:p>
-                      <a:r>
-                        <a:rPr sz="1100" b="0">
-                          <a:solidFill>
-                            <a:srgbClr val="1A1A1A"/>
-                          </a:solidFill>
-                          <a:latin typeface="Malgun Gothic"/>
-                        </a:rPr>
-                        <a:t>47</a:t>
-                      </a:r>
-                    </a:p>
-                  </a:txBody>
-                  <a:tcPr>
-                    <a:solidFill>
-                      <a:srgbClr val="FFFFFF"/>
-                    </a:solidFill>
-                  </a:tcPr>
-                </a:tc>
-                <a:tc>
-                  <a:txBody>
-                    <a:bodyPr/>
-                    <a:lstStyle/>
-                    <a:p>
-                      <a:r>
-                        <a:rPr sz="1100" b="0">
-                          <a:solidFill>
-                            <a:srgbClr val="1A1A1A"/>
-                          </a:solidFill>
-                          <a:latin typeface="Malgun Gothic"/>
-                        </a:rPr>
-                        <a:t>PARTIAL</a:t>
-                      </a:r>
-                    </a:p>
-                  </a:txBody>
-                  <a:tcPr>
-                    <a:solidFill>
-                      <a:srgbClr val="FFFFFF"/>
-                    </a:solidFill>
-                  </a:tcPr>
-                </a:tc>
-              </a:tr>
-              <a:tr h="502920">
-                <a:tc>
-                  <a:txBody>
-                    <a:bodyPr/>
-                    <a:lstStyle/>
-                    <a:p>
-                      <a:r>
-                        <a:rPr sz="1100" b="0">
-                          <a:solidFill>
-                            <a:srgbClr val="1A1A1A"/>
-                          </a:solidFill>
-                          <a:latin typeface="Malgun Gothic"/>
-                        </a:rPr>
-                        <a:t>12</a:t>
-                      </a:r>
-                    </a:p>
-                  </a:txBody>
-                  <a:tcPr>
-                    <a:solidFill>
-                      <a:srgbClr val="E8EEF3"/>
-                    </a:solidFill>
-                  </a:tcPr>
-                </a:tc>
-                <a:tc>
-                  <a:txBody>
-                    <a:bodyPr/>
-                    <a:lstStyle/>
-                    <a:p>
-                      <a:r>
-                        <a:rPr sz="1100" b="0">
-                          <a:solidFill>
-                            <a:srgbClr val="1A1A1A"/>
-                          </a:solidFill>
-                          <a:latin typeface="Malgun Gothic"/>
-                        </a:rPr>
-                        <a:t>~31</a:t>
-                      </a:r>
-                    </a:p>
-                  </a:txBody>
-                  <a:tcPr>
-                    <a:solidFill>
-                      <a:srgbClr val="E8EEF3"/>
-                    </a:solidFill>
-                  </a:tcPr>
-                </a:tc>
-                <a:tc>
-                  <a:txBody>
-                    <a:bodyPr/>
-                    <a:lstStyle/>
-                    <a:p>
-                      <a:r>
-                        <a:rPr sz="1100" b="0">
-                          <a:solidFill>
-                            <a:srgbClr val="1A1A1A"/>
-                          </a:solidFill>
-                          <a:latin typeface="Malgun Gothic"/>
-                        </a:rPr>
-                        <a:t>FAIL</a:t>
-                      </a:r>
-                    </a:p>
-                  </a:txBody>
-                  <a:tcPr>
-                    <a:solidFill>
-                      <a:srgbClr val="E8EEF3"/>
-                    </a:solidFill>
-                  </a:tcPr>
-                </a:tc>
-                <a:tc>
-                  <a:txBody>
-                    <a:bodyPr/>
-                    <a:lstStyle/>
-                    <a:p>
-                      <a:r>
-                        <a:rPr sz="1100" b="0">
-                          <a:solidFill>
-                            <a:srgbClr val="1A1A1A"/>
-                          </a:solidFill>
-                          <a:latin typeface="Malgun Gothic"/>
-                        </a:rPr>
-                        <a:t>53</a:t>
-                      </a:r>
-                    </a:p>
-                  </a:txBody>
-                  <a:tcPr>
-                    <a:solidFill>
-                      <a:srgbClr val="E8EEF3"/>
-                    </a:solidFill>
-                  </a:tcPr>
-                </a:tc>
-                <a:tc>
-                  <a:txBody>
-                    <a:bodyPr/>
-                    <a:lstStyle/>
-                    <a:p>
-                      <a:r>
-                        <a:rPr sz="1100" b="0">
-                          <a:solidFill>
-                            <a:srgbClr val="1A1A1A"/>
-                          </a:solidFill>
-                          <a:latin typeface="Malgun Gothic"/>
-                        </a:rPr>
-                        <a:t>PASS</a:t>
-                      </a:r>
-                    </a:p>
-                  </a:txBody>
-                  <a:tcPr>
-                    <a:solidFill>
-                      <a:srgbClr val="E8EEF3"/>
-                    </a:solidFill>
-                  </a:tcPr>
-                </a:tc>
-              </a:tr>
-              <a:tr h="502920">
-                <a:tc>
-                  <a:txBody>
-                    <a:bodyPr/>
-                    <a:lstStyle/>
-                    <a:p>
-                      <a:r>
-                        <a:rPr sz="1100" b="0">
-                          <a:solidFill>
-                            <a:srgbClr val="1A1A1A"/>
-                          </a:solidFill>
-                          <a:latin typeface="Malgun Gothic"/>
-                        </a:rPr>
-                        <a:t>16</a:t>
-                      </a:r>
-                    </a:p>
-                  </a:txBody>
-                  <a:tcPr>
-                    <a:solidFill>
-                      <a:srgbClr val="FFFFFF"/>
-                    </a:solidFill>
-                  </a:tcPr>
-                </a:tc>
-                <a:tc>
-                  <a:txBody>
-                    <a:bodyPr/>
-                    <a:lstStyle/>
-                    <a:p>
-                      <a:r>
-                        <a:rPr sz="1100" b="0">
-                          <a:solidFill>
-                            <a:srgbClr val="1A1A1A"/>
-                          </a:solidFill>
-                          <a:latin typeface="Malgun Gothic"/>
-                        </a:rPr>
-                        <a:t>~33</a:t>
-                      </a:r>
-                    </a:p>
-                  </a:txBody>
-                  <a:tcPr>
-                    <a:solidFill>
-                      <a:srgbClr val="FFFFFF"/>
-                    </a:solidFill>
-                  </a:tcPr>
-                </a:tc>
-                <a:tc>
-                  <a:txBody>
-                    <a:bodyPr/>
-                    <a:lstStyle/>
-                    <a:p>
-                      <a:r>
-                        <a:rPr sz="1100" b="0">
-                          <a:solidFill>
-                            <a:srgbClr val="1A1A1A"/>
-                          </a:solidFill>
-                          <a:latin typeface="Malgun Gothic"/>
-                        </a:rPr>
-                        <a:t>FAIL</a:t>
-                      </a:r>
-                    </a:p>
-                  </a:txBody>
-                  <a:tcPr>
-                    <a:solidFill>
-                      <a:srgbClr val="FFFFFF"/>
-                    </a:solidFill>
-                  </a:tcPr>
-                </a:tc>
-                <a:tc>
-                  <a:txBody>
-                    <a:bodyPr/>
-                    <a:lstStyle/>
-                    <a:p>
-                      <a:r>
-                        <a:rPr sz="1100" b="0">
-                          <a:solidFill>
-                            <a:srgbClr val="1A1A1A"/>
-                          </a:solidFill>
-                          <a:latin typeface="Malgun Gothic"/>
-                        </a:rPr>
-                        <a:t>55</a:t>
-                      </a:r>
-                    </a:p>
-                  </a:txBody>
-                  <a:tcPr>
-                    <a:solidFill>
-                      <a:srgbClr val="FFFFFF"/>
-                    </a:solidFill>
-                  </a:tcPr>
-                </a:tc>
-                <a:tc>
-                  <a:txBody>
-                    <a:bodyPr/>
-                    <a:lstStyle/>
-                    <a:p>
-                      <a:r>
-                        <a:rPr sz="1100" b="0">
-                          <a:solidFill>
-                            <a:srgbClr val="1A1A1A"/>
-                          </a:solidFill>
-                          <a:latin typeface="Malgun Gothic"/>
-                        </a:rPr>
-                        <a:t>PASS</a:t>
-                      </a:r>
-                    </a:p>
-                  </a:txBody>
-                  <a:tcPr>
-                    <a:solidFill>
-                      <a:srgbClr val="FFFFFF"/>
-                    </a:solidFill>
-                  </a:tcPr>
-                </a:tc>
-              </a:tr>
-              <a:tr h="502920">
-                <a:tc>
-                  <a:txBody>
-                    <a:bodyPr/>
-                    <a:lstStyle/>
-                    <a:p>
-                      <a:r>
-                        <a:rPr sz="1100" b="0">
-                          <a:solidFill>
-                            <a:srgbClr val="1A1A1A"/>
-                          </a:solidFill>
-                          <a:latin typeface="Malgun Gothic"/>
-                        </a:rPr>
-                        <a:t>57</a:t>
-                      </a:r>
-                    </a:p>
-                  </a:txBody>
-                  <a:tcPr>
-                    <a:solidFill>
-                      <a:srgbClr val="E8EEF3"/>
-                    </a:solidFill>
-                  </a:tcPr>
-                </a:tc>
-                <a:tc>
-                  <a:txBody>
-                    <a:bodyPr/>
-                    <a:lstStyle/>
-                    <a:p>
-                      <a:r>
-                        <a:rPr sz="1100" b="0">
-                          <a:solidFill>
-                            <a:srgbClr val="1A1A1A"/>
-                          </a:solidFill>
-                          <a:latin typeface="Malgun Gothic"/>
-                        </a:rPr>
-                        <a:t>51</a:t>
-                      </a:r>
-                    </a:p>
-                  </a:txBody>
-                  <a:tcPr>
-                    <a:solidFill>
-                      <a:srgbClr val="E8EEF3"/>
-                    </a:solidFill>
-                  </a:tcPr>
-                </a:tc>
-                <a:tc>
-                  <a:txBody>
-                    <a:bodyPr/>
-                    <a:lstStyle/>
-                    <a:p>
-                      <a:r>
-                        <a:rPr sz="1100" b="0">
-                          <a:solidFill>
-                            <a:srgbClr val="1A1A1A"/>
-                          </a:solidFill>
-                          <a:latin typeface="Malgun Gothic"/>
-                        </a:rPr>
-                        <a:t>PASS</a:t>
-                      </a:r>
-                    </a:p>
-                  </a:txBody>
-                  <a:tcPr>
-                    <a:solidFill>
-                      <a:srgbClr val="E8EEF3"/>
-                    </a:solidFill>
-                  </a:tcPr>
-                </a:tc>
-                <a:tc>
-                  <a:txBody>
-                    <a:bodyPr/>
-                    <a:lstStyle/>
-                    <a:p>
-                      <a:r>
-                        <a:rPr sz="1100" b="0">
-                          <a:solidFill>
-                            <a:srgbClr val="1A1A1A"/>
-                          </a:solidFill>
-                          <a:latin typeface="Malgun Gothic"/>
-                        </a:rPr>
-                        <a:t>—</a:t>
-                      </a:r>
-                    </a:p>
-                  </a:txBody>
-                  <a:tcPr>
-                    <a:solidFill>
-                      <a:srgbClr val="E8EEF3"/>
-                    </a:solidFill>
-                  </a:tcPr>
-                </a:tc>
-                <a:tc>
-                  <a:txBody>
-                    <a:bodyPr/>
-                    <a:lstStyle/>
-                    <a:p>
-                      <a:r>
-                        <a:rPr sz="1100" b="0">
-                          <a:solidFill>
-                            <a:srgbClr val="1A1A1A"/>
-                          </a:solidFill>
-                          <a:latin typeface="Malgun Gothic"/>
-                        </a:rPr>
-                        <a:t>—</a:t>
-                      </a:r>
-                    </a:p>
-                  </a:txBody>
-                  <a:tcPr>
-                    <a:solidFill>
-                      <a:srgbClr val="E8EEF3"/>
-                    </a:solidFill>
-                  </a:tcPr>
-                </a:tc>
-              </a:tr>
-              <a:tr h="502920">
-                <a:tc>
-                  <a:txBody>
-                    <a:bodyPr/>
-                    <a:lstStyle/>
-                    <a:p>
-                      <a:r>
-                        <a:rPr sz="1100" b="0">
-                          <a:solidFill>
-                            <a:srgbClr val="1A1A1A"/>
-                          </a:solidFill>
-                          <a:latin typeface="Malgun Gothic"/>
-                        </a:rPr>
-                        <a:t>63</a:t>
-                      </a:r>
-                    </a:p>
-                  </a:txBody>
-                  <a:tcPr>
-                    <a:solidFill>
-                      <a:srgbClr val="FFFFFF"/>
-                    </a:solidFill>
-                  </a:tcPr>
-                </a:tc>
-                <a:tc>
-                  <a:txBody>
-                    <a:bodyPr/>
-                    <a:lstStyle/>
-                    <a:p>
-                      <a:r>
-                        <a:rPr sz="1100" b="0">
-                          <a:solidFill>
-                            <a:srgbClr val="1A1A1A"/>
-                          </a:solidFill>
-                          <a:latin typeface="Malgun Gothic"/>
-                        </a:rPr>
-                        <a:t>54</a:t>
-                      </a:r>
-                    </a:p>
-                  </a:txBody>
-                  <a:tcPr>
-                    <a:solidFill>
-                      <a:srgbClr val="FFFFFF"/>
-                    </a:solidFill>
-                  </a:tcPr>
-                </a:tc>
-                <a:tc>
-                  <a:txBody>
-                    <a:bodyPr/>
-                    <a:lstStyle/>
-                    <a:p>
-                      <a:r>
-                        <a:rPr sz="1100" b="0">
-                          <a:solidFill>
-                            <a:srgbClr val="1A1A1A"/>
-                          </a:solidFill>
-                          <a:latin typeface="Malgun Gothic"/>
-                        </a:rPr>
-                        <a:t>PASS</a:t>
-                      </a:r>
-                    </a:p>
-                  </a:txBody>
-                  <a:tcPr>
-                    <a:solidFill>
-                      <a:srgbClr val="FFFFFF"/>
-                    </a:solidFill>
-                  </a:tcPr>
-                </a:tc>
-                <a:tc>
-                  <a:txBody>
-                    <a:bodyPr/>
-                    <a:lstStyle/>
-                    <a:p>
-                      <a:r>
-                        <a:rPr sz="1100" b="0">
-                          <a:solidFill>
-                            <a:srgbClr val="1A1A1A"/>
-                          </a:solidFill>
-                          <a:latin typeface="Malgun Gothic"/>
-                        </a:rPr>
-                        <a:t>—</a:t>
-                      </a:r>
-                    </a:p>
-                  </a:txBody>
-                  <a:tcPr>
-                    <a:solidFill>
-                      <a:srgbClr val="FFFFFF"/>
-                    </a:solidFill>
-                  </a:tcPr>
-                </a:tc>
-                <a:tc>
-                  <a:txBody>
-                    <a:bodyPr/>
-                    <a:lstStyle/>
-                    <a:p>
-                      <a:r>
-                        <a:rPr sz="1100" b="0">
-                          <a:solidFill>
-                            <a:srgbClr val="1A1A1A"/>
-                          </a:solidFill>
-                          <a:latin typeface="Malgun Gothic"/>
-                        </a:rPr>
-                        <a:t>—</a:t>
+                        <a:t>56</a:t>
                       </a:r>
                     </a:p>
                   </a:txBody>
@@ -7975,14 +7926,14 @@
       </p:graphicFrame>
       <p:sp>
         <p:nvSpPr>
-          <p:cNvPr id="6" name="TextBox 5"/>
+          <p:cNvPr id="7" name="TextBox 6"/>
           <p:cNvSpPr txBox="1"/>
           <p:nvPr/>
         </p:nvSpPr>
         <p:spPr>
           <a:xfrm>
-            <a:off x="548640" y="6309360"/>
-            <a:ext cx="10972800" cy="274320"/>
+            <a:off x="6858000" y="1371600"/>
+            <a:ext cx="10972800" cy="4754880"/>
           </a:xfrm>
           <a:prstGeom prst="rect">
             <a:avLst/>
@@ -7990,6 +7941,93 @@
           <a:noFill/>
         </p:spPr>
         <p:txBody>
+          <a:bodyPr wrap="square">
+            <a:spAutoFit/>
+          </a:bodyPr>
+          <a:lstStyle/>
+          <a:p>
+            <a:pPr>
+              <a:spcAft>
+                <a:spcPts val="700"/>
+              </a:spcAft>
+            </a:pPr>
+            <a:r>
+              <a:rPr sz="1500" b="0">
+                <a:solidFill>
+                  <a:srgbClr val="1A1A1A"/>
+                </a:solidFill>
+                <a:latin typeface="Malgun Gothic"/>
+              </a:rPr>
+              <a:t>최종 채점: A=54, B=55 (Δ=1)</a:t>
+            </a:r>
+          </a:p>
+          <a:p>
+            <a:pPr>
+              <a:spcAft>
+                <a:spcPts val="700"/>
+              </a:spcAft>
+            </a:pPr>
+            <a:r>
+              <a:rPr sz="1500" b="0">
+                <a:solidFill>
+                  <a:srgbClr val="1A1A1A"/>
+                </a:solidFill>
+                <a:latin typeface="Malgun Gothic"/>
+              </a:rPr>
+              <a:t>→ 둘 다 PASS, 품질은 동등</a:t>
+            </a:r>
+          </a:p>
+          <a:p>
+            <a:pPr>
+              <a:spcAft>
+                <a:spcPts val="700"/>
+              </a:spcAft>
+            </a:pPr>
+            <a:r>
+              <a:rPr sz="1500" b="0">
+                <a:solidFill>
+                  <a:srgbClr val="1A1A1A"/>
+                </a:solidFill>
+                <a:latin typeface="Malgun Gothic"/>
+              </a:rPr>
+              <a:t>질문 수는 품질 점수에 넣지 않음</a:t>
+            </a:r>
+          </a:p>
+          <a:p>
+            <a:pPr>
+              <a:spcAft>
+                <a:spcPts val="700"/>
+              </a:spcAft>
+            </a:pPr>
+            <a:r>
+              <a:rPr sz="1500" b="0">
+                <a:solidFill>
+                  <a:srgbClr val="1A1A1A"/>
+                </a:solidFill>
+                <a:latin typeface="Malgun Gothic"/>
+              </a:rPr>
+              <a:t>동등성: |A−B|≤4 이고 둘 다 PASS</a:t>
+            </a:r>
+          </a:p>
+        </p:txBody>
+      </p:sp>
+      <p:sp>
+        <p:nvSpPr>
+          <p:cNvPr id="8" name="TextBox 7"/>
+          <p:cNvSpPr txBox="1"/>
+          <p:nvPr/>
+        </p:nvSpPr>
+        <p:spPr>
+          <a:xfrm>
+            <a:off x="502920" y="6446520"/>
+            <a:ext cx="10972800" cy="274320"/>
+          </a:xfrm>
+          <a:prstGeom prst="rect">
+            <a:avLst/>
+          </a:prstGeom>
+          <a:noFill/>
+        </p:spPr>
+        <p:txBody>
           <a:bodyPr wrap="none">
             <a:spAutoFit/>
           </a:bodyPr>
@@ -8002,7 +8040,7 @@
                 </a:solidFill>
                 <a:latin typeface="Malgun Gothic"/>
               </a:rPr>
-              <a:t>Cursor × ABAP Skills 실험  |  9/12</a:t>
+              <a:t>9 / 13</a:t>
             </a:r>
           </a:p>
         </p:txBody>
